--- a/smart_garden_report/Smart_garden_pp.pptx
+++ b/smart_garden_report/Smart_garden_pp.pptx
@@ -238,7 +238,7 @@
           <a:p>
             <a:fld id="{48B45424-6BAC-416C-8F6C-5F9DE854A36B}" type="datetimeFigureOut">
               <a:rPr lang="en-US" smtClean="0"/>
-              <a:t>6/17/2026</a:t>
+              <a:t>6/19/2026</a:t>
             </a:fld>
             <a:endParaRPr lang="en-US"/>
           </a:p>
@@ -416,7 +416,7 @@
           <a:p>
             <a:fld id="{6B733702-C25A-40B9-9167-54BAA79B29B0}" type="datetimeFigureOut">
               <a:rPr lang="en-US" smtClean="0"/>
-              <a:t>6/17/2026</a:t>
+              <a:t>6/19/2026</a:t>
             </a:fld>
             <a:endParaRPr lang="en-US"/>
           </a:p>
@@ -802,7 +802,7 @@
             <a:fld id="{F70EAA40-3A53-4A3D-924A-D38F1059C7D5}" type="datetime1">
               <a:rPr lang="en-US" smtClean="0"/>
               <a:pPr/>
-              <a:t>6/17/2026</a:t>
+              <a:t>6/19/2026</a:t>
             </a:fld>
             <a:endParaRPr lang="en-US"/>
           </a:p>
@@ -1138,7 +1138,7 @@
             <a:fld id="{F70EAA40-3A53-4A3D-924A-D38F1059C7D5}" type="datetime1">
               <a:rPr lang="en-US" smtClean="0"/>
               <a:pPr/>
-              <a:t>6/17/2026</a:t>
+              <a:t>6/19/2026</a:t>
             </a:fld>
             <a:endParaRPr lang="en-US"/>
           </a:p>
@@ -1368,7 +1368,7 @@
             <a:fld id="{F70EAA40-3A53-4A3D-924A-D38F1059C7D5}" type="datetime1">
               <a:rPr lang="en-US" smtClean="0"/>
               <a:pPr/>
-              <a:t>6/17/2026</a:t>
+              <a:t>6/19/2026</a:t>
             </a:fld>
             <a:endParaRPr lang="en-US"/>
           </a:p>
@@ -1702,7 +1702,7 @@
             <a:fld id="{F70EAA40-3A53-4A3D-924A-D38F1059C7D5}" type="datetime1">
               <a:rPr lang="en-US" smtClean="0"/>
               <a:pPr/>
-              <a:t>6/17/2026</a:t>
+              <a:t>6/19/2026</a:t>
             </a:fld>
             <a:endParaRPr lang="en-US"/>
           </a:p>
@@ -2137,7 +2137,7 @@
             <a:fld id="{F70EAA40-3A53-4A3D-924A-D38F1059C7D5}" type="datetime1">
               <a:rPr lang="en-US" smtClean="0"/>
               <a:pPr/>
-              <a:t>6/17/2026</a:t>
+              <a:t>6/19/2026</a:t>
             </a:fld>
             <a:endParaRPr lang="en-US"/>
           </a:p>
@@ -2471,7 +2471,7 @@
             <a:fld id="{F70EAA40-3A53-4A3D-924A-D38F1059C7D5}" type="datetime1">
               <a:rPr lang="en-US" smtClean="0"/>
               <a:pPr/>
-              <a:t>6/17/2026</a:t>
+              <a:t>6/19/2026</a:t>
             </a:fld>
             <a:endParaRPr lang="en-US"/>
           </a:p>
@@ -3157,7 +3157,7 @@
             <a:fld id="{F70EAA40-3A53-4A3D-924A-D38F1059C7D5}" type="datetime1">
               <a:rPr lang="en-US" smtClean="0"/>
               <a:pPr/>
-              <a:t>6/17/2026</a:t>
+              <a:t>6/19/2026</a:t>
             </a:fld>
             <a:endParaRPr lang="en-US"/>
           </a:p>
@@ -3347,7 +3347,7 @@
             <a:fld id="{F70EAA40-3A53-4A3D-924A-D38F1059C7D5}" type="datetime1">
               <a:rPr lang="en-US" smtClean="0"/>
               <a:pPr/>
-              <a:t>6/17/2026</a:t>
+              <a:t>6/19/2026</a:t>
             </a:fld>
             <a:endParaRPr lang="en-US"/>
           </a:p>
@@ -3930,7 +3930,7 @@
             <a:fld id="{F70EAA40-3A53-4A3D-924A-D38F1059C7D5}" type="datetime1">
               <a:rPr lang="en-US" smtClean="0"/>
               <a:pPr/>
-              <a:t>6/17/2026</a:t>
+              <a:t>6/19/2026</a:t>
             </a:fld>
             <a:endParaRPr lang="en-US"/>
           </a:p>
@@ -5990,7 +5990,7 @@
         <p:spPr>
           <a:xfrm>
             <a:off x="797701" y="920440"/>
-            <a:ext cx="7807041" cy="4832092"/>
+            <a:ext cx="7807041" cy="5632311"/>
           </a:xfrm>
           <a:prstGeom prst="rect">
             <a:avLst/>
@@ -6004,67 +6004,67 @@
           <a:lstStyle/>
           <a:p>
             <a:r>
-              <a:rPr lang="en-US" sz="1400" dirty="0">
+              <a:rPr lang="en-US" dirty="0">
                 <a:latin typeface="Aptos" panose="020B0004020202020204" pitchFamily="34" charset="0"/>
               </a:rPr>
               <a:t>3.9  </a:t>
             </a:r>
             <a:r>
-              <a:rPr lang="en-US" sz="1400" dirty="0" err="1">
+              <a:rPr lang="en-US" dirty="0" err="1">
                 <a:latin typeface="Aptos" panose="020B0004020202020204" pitchFamily="34" charset="0"/>
               </a:rPr>
               <a:t>Các</a:t>
             </a:r>
             <a:r>
-              <a:rPr lang="en-US" sz="1400" dirty="0">
-                <a:latin typeface="Aptos" panose="020B0004020202020204" pitchFamily="34" charset="0"/>
-              </a:rPr>
-              <a:t> </a:t>
-            </a:r>
-            <a:r>
-              <a:rPr lang="en-US" sz="1400" dirty="0" err="1">
+              <a:rPr lang="en-US" dirty="0">
+                <a:latin typeface="Aptos" panose="020B0004020202020204" pitchFamily="34" charset="0"/>
+              </a:rPr>
+              <a:t> </a:t>
+            </a:r>
+            <a:r>
+              <a:rPr lang="en-US" dirty="0" err="1">
                 <a:latin typeface="Aptos" panose="020B0004020202020204" pitchFamily="34" charset="0"/>
               </a:rPr>
               <a:t>chế</a:t>
             </a:r>
             <a:r>
-              <a:rPr lang="en-US" sz="1400" dirty="0">
-                <a:latin typeface="Aptos" panose="020B0004020202020204" pitchFamily="34" charset="0"/>
-              </a:rPr>
-              <a:t> </a:t>
-            </a:r>
-            <a:r>
-              <a:rPr lang="en-US" sz="1400" dirty="0" err="1">
+              <a:rPr lang="en-US" dirty="0">
+                <a:latin typeface="Aptos" panose="020B0004020202020204" pitchFamily="34" charset="0"/>
+              </a:rPr>
+              <a:t> </a:t>
+            </a:r>
+            <a:r>
+              <a:rPr lang="en-US" dirty="0" err="1">
                 <a:latin typeface="Aptos" panose="020B0004020202020204" pitchFamily="34" charset="0"/>
               </a:rPr>
               <a:t>độ</a:t>
             </a:r>
             <a:r>
-              <a:rPr lang="en-US" sz="1400" dirty="0">
-                <a:latin typeface="Aptos" panose="020B0004020202020204" pitchFamily="34" charset="0"/>
-              </a:rPr>
-              <a:t> </a:t>
-            </a:r>
-            <a:r>
-              <a:rPr lang="en-US" sz="1400" dirty="0" err="1">
+              <a:rPr lang="en-US" dirty="0">
+                <a:latin typeface="Aptos" panose="020B0004020202020204" pitchFamily="34" charset="0"/>
+              </a:rPr>
+              <a:t> </a:t>
+            </a:r>
+            <a:r>
+              <a:rPr lang="en-US" dirty="0" err="1">
                 <a:latin typeface="Aptos" panose="020B0004020202020204" pitchFamily="34" charset="0"/>
               </a:rPr>
               <a:t>truy</a:t>
             </a:r>
             <a:r>
-              <a:rPr lang="en-US" sz="1400" dirty="0">
-                <a:latin typeface="Aptos" panose="020B0004020202020204" pitchFamily="34" charset="0"/>
-              </a:rPr>
-              <a:t> </a:t>
-            </a:r>
-            <a:r>
-              <a:rPr lang="en-US" sz="1400" dirty="0" err="1">
+              <a:rPr lang="en-US" dirty="0">
+                <a:latin typeface="Aptos" panose="020B0004020202020204" pitchFamily="34" charset="0"/>
+              </a:rPr>
+              <a:t> </a:t>
+            </a:r>
+            <a:r>
+              <a:rPr lang="en-US" dirty="0" err="1">
                 <a:latin typeface="Aptos" panose="020B0004020202020204" pitchFamily="34" charset="0"/>
               </a:rPr>
               <a:t>cập</a:t>
             </a:r>
             <a:r>
-              <a:rPr lang="en-US" sz="1400" dirty="0">
+              <a:rPr lang="en-US" dirty="0">
                 <a:latin typeface="Aptos" panose="020B0004020202020204" pitchFamily="34" charset="0"/>
               </a:rPr>
               <a:t> qua SPI</a:t>
@@ -6125,10 +6125,6 @@
             </a:endParaRPr>
           </a:p>
           <a:p>
-            <a:pPr marL="285750" indent="-285750">
-              <a:buFont typeface="Wingdings" panose="05000000000000000000" pitchFamily="2" charset="2"/>
-              <a:buChar char="q"/>
-            </a:pPr>
             <a:endParaRPr lang="en-US" sz="1400" dirty="0">
               <a:latin typeface="Aptos" panose="020B0004020202020204" pitchFamily="34" charset="0"/>
             </a:endParaRPr>
@@ -6147,7 +6143,859 @@
               <a:buFont typeface="Wingdings" panose="05000000000000000000" pitchFamily="2" charset="2"/>
               <a:buChar char="q"/>
             </a:pPr>
-            <a:endParaRPr lang="en-US" sz="1400" dirty="0">
+            <a:r>
+              <a:rPr lang="en-US" dirty="0" err="1">
+                <a:latin typeface="Aptos" panose="020B0004020202020204" pitchFamily="34" charset="0"/>
+              </a:rPr>
+              <a:t>việc</a:t>
+            </a:r>
+            <a:r>
+              <a:rPr lang="en-US" dirty="0">
+                <a:latin typeface="Aptos" panose="020B0004020202020204" pitchFamily="34" charset="0"/>
+              </a:rPr>
+              <a:t> </a:t>
+            </a:r>
+            <a:r>
+              <a:rPr lang="en-US" dirty="0" err="1">
+                <a:latin typeface="Aptos" panose="020B0004020202020204" pitchFamily="34" charset="0"/>
+              </a:rPr>
+              <a:t>điều</a:t>
+            </a:r>
+            <a:r>
+              <a:rPr lang="en-US" dirty="0">
+                <a:latin typeface="Aptos" panose="020B0004020202020204" pitchFamily="34" charset="0"/>
+              </a:rPr>
+              <a:t> </a:t>
+            </a:r>
+            <a:r>
+              <a:rPr lang="en-US" dirty="0" err="1">
+                <a:latin typeface="Aptos" panose="020B0004020202020204" pitchFamily="34" charset="0"/>
+              </a:rPr>
+              <a:t>khiển</a:t>
+            </a:r>
+            <a:r>
+              <a:rPr lang="en-US" dirty="0">
+                <a:latin typeface="Aptos" panose="020B0004020202020204" pitchFamily="34" charset="0"/>
+              </a:rPr>
+              <a:t> module LoRa </a:t>
+            </a:r>
+            <a:r>
+              <a:rPr lang="en-US" dirty="0" err="1">
+                <a:latin typeface="Aptos" panose="020B0004020202020204" pitchFamily="34" charset="0"/>
+              </a:rPr>
+              <a:t>thông</a:t>
+            </a:r>
+            <a:r>
+              <a:rPr lang="en-US" dirty="0">
+                <a:latin typeface="Aptos" panose="020B0004020202020204" pitchFamily="34" charset="0"/>
+              </a:rPr>
+              <a:t> qua </a:t>
+            </a:r>
+            <a:r>
+              <a:rPr lang="en-US" dirty="0" err="1">
+                <a:latin typeface="Aptos" panose="020B0004020202020204" pitchFamily="34" charset="0"/>
+              </a:rPr>
+              <a:t>việc</a:t>
+            </a:r>
+            <a:r>
+              <a:rPr lang="en-US" dirty="0">
+                <a:latin typeface="Aptos" panose="020B0004020202020204" pitchFamily="34" charset="0"/>
+              </a:rPr>
+              <a:t> </a:t>
+            </a:r>
+            <a:r>
+              <a:rPr lang="en-US" dirty="0" err="1">
+                <a:latin typeface="Aptos" panose="020B0004020202020204" pitchFamily="34" charset="0"/>
+              </a:rPr>
+              <a:t>cấu</a:t>
+            </a:r>
+            <a:r>
+              <a:rPr lang="en-US" dirty="0">
+                <a:latin typeface="Aptos" panose="020B0004020202020204" pitchFamily="34" charset="0"/>
+              </a:rPr>
+              <a:t> </a:t>
+            </a:r>
+            <a:r>
+              <a:rPr lang="en-US" dirty="0" err="1">
+                <a:latin typeface="Aptos" panose="020B0004020202020204" pitchFamily="34" charset="0"/>
+              </a:rPr>
+              <a:t>hình</a:t>
+            </a:r>
+            <a:r>
+              <a:rPr lang="en-US" dirty="0">
+                <a:latin typeface="Aptos" panose="020B0004020202020204" pitchFamily="34" charset="0"/>
+              </a:rPr>
+              <a:t> </a:t>
+            </a:r>
+            <a:r>
+              <a:rPr lang="en-US" dirty="0" err="1">
+                <a:latin typeface="Aptos" panose="020B0004020202020204" pitchFamily="34" charset="0"/>
+              </a:rPr>
+              <a:t>các</a:t>
+            </a:r>
+            <a:r>
+              <a:rPr lang="en-US" dirty="0">
+                <a:latin typeface="Aptos" panose="020B0004020202020204" pitchFamily="34" charset="0"/>
+              </a:rPr>
+              <a:t> </a:t>
+            </a:r>
+            <a:r>
+              <a:rPr lang="en-US" dirty="0" err="1">
+                <a:latin typeface="Aptos" panose="020B0004020202020204" pitchFamily="34" charset="0"/>
+              </a:rPr>
+              <a:t>thanh</a:t>
+            </a:r>
+            <a:r>
+              <a:rPr lang="en-US" dirty="0">
+                <a:latin typeface="Aptos" panose="020B0004020202020204" pitchFamily="34" charset="0"/>
+              </a:rPr>
+              <a:t> </a:t>
+            </a:r>
+            <a:r>
+              <a:rPr lang="en-US" dirty="0" err="1">
+                <a:latin typeface="Aptos" panose="020B0004020202020204" pitchFamily="34" charset="0"/>
+              </a:rPr>
+              <a:t>ghi</a:t>
+            </a:r>
+            <a:r>
+              <a:rPr lang="en-US" dirty="0">
+                <a:latin typeface="Aptos" panose="020B0004020202020204" pitchFamily="34" charset="0"/>
+              </a:rPr>
+              <a:t>, </a:t>
+            </a:r>
+            <a:r>
+              <a:rPr lang="en-US" dirty="0" err="1">
+                <a:latin typeface="Aptos" panose="020B0004020202020204" pitchFamily="34" charset="0"/>
+              </a:rPr>
+              <a:t>có</a:t>
+            </a:r>
+            <a:r>
+              <a:rPr lang="en-US" dirty="0">
+                <a:latin typeface="Aptos" panose="020B0004020202020204" pitchFamily="34" charset="0"/>
+              </a:rPr>
+              <a:t> 3 </a:t>
+            </a:r>
+            <a:r>
+              <a:rPr lang="en-US" dirty="0" err="1">
+                <a:latin typeface="Aptos" panose="020B0004020202020204" pitchFamily="34" charset="0"/>
+              </a:rPr>
+              <a:t>chế</a:t>
+            </a:r>
+            <a:r>
+              <a:rPr lang="en-US" dirty="0">
+                <a:latin typeface="Aptos" panose="020B0004020202020204" pitchFamily="34" charset="0"/>
+              </a:rPr>
+              <a:t> </a:t>
+            </a:r>
+            <a:r>
+              <a:rPr lang="en-US" dirty="0" err="1">
+                <a:latin typeface="Aptos" panose="020B0004020202020204" pitchFamily="34" charset="0"/>
+              </a:rPr>
+              <a:t>độ</a:t>
+            </a:r>
+            <a:r>
+              <a:rPr lang="en-US" dirty="0">
+                <a:latin typeface="Aptos" panose="020B0004020202020204" pitchFamily="34" charset="0"/>
+              </a:rPr>
+              <a:t> </a:t>
+            </a:r>
+            <a:r>
+              <a:rPr lang="en-US" dirty="0" err="1">
+                <a:latin typeface="Aptos" panose="020B0004020202020204" pitchFamily="34" charset="0"/>
+              </a:rPr>
+              <a:t>truy</a:t>
+            </a:r>
+            <a:r>
+              <a:rPr lang="en-US" dirty="0">
+                <a:latin typeface="Aptos" panose="020B0004020202020204" pitchFamily="34" charset="0"/>
+              </a:rPr>
+              <a:t> </a:t>
+            </a:r>
+            <a:r>
+              <a:rPr lang="en-US" dirty="0" err="1">
+                <a:latin typeface="Aptos" panose="020B0004020202020204" pitchFamily="34" charset="0"/>
+              </a:rPr>
+              <a:t>cập</a:t>
+            </a:r>
+            <a:r>
+              <a:rPr lang="en-US" dirty="0">
+                <a:latin typeface="Aptos" panose="020B0004020202020204" pitchFamily="34" charset="0"/>
+              </a:rPr>
+              <a:t> </a:t>
+            </a:r>
+            <a:r>
+              <a:rPr lang="en-US" dirty="0" err="1">
+                <a:latin typeface="Aptos" panose="020B0004020202020204" pitchFamily="34" charset="0"/>
+              </a:rPr>
+              <a:t>là</a:t>
+            </a:r>
+            <a:r>
+              <a:rPr lang="en-US" dirty="0">
+                <a:latin typeface="Aptos" panose="020B0004020202020204" pitchFamily="34" charset="0"/>
+              </a:rPr>
+              <a:t> Single, Burst, FIFO</a:t>
+            </a:r>
+          </a:p>
+          <a:p>
+            <a:pPr marL="285750" indent="-285750">
+              <a:buFont typeface="Wingdings" panose="05000000000000000000" pitchFamily="2" charset="2"/>
+              <a:buChar char="q"/>
+            </a:pPr>
+            <a:r>
+              <a:rPr lang="en-US" dirty="0" err="1">
+                <a:latin typeface="Aptos" panose="020B0004020202020204" pitchFamily="34" charset="0"/>
+              </a:rPr>
+              <a:t>Quá</a:t>
+            </a:r>
+            <a:r>
+              <a:rPr lang="en-US" dirty="0">
+                <a:latin typeface="Aptos" panose="020B0004020202020204" pitchFamily="34" charset="0"/>
+              </a:rPr>
+              <a:t> </a:t>
+            </a:r>
+            <a:r>
+              <a:rPr lang="en-US" dirty="0" err="1">
+                <a:latin typeface="Aptos" panose="020B0004020202020204" pitchFamily="34" charset="0"/>
+              </a:rPr>
+              <a:t>trình</a:t>
+            </a:r>
+            <a:r>
+              <a:rPr lang="en-US" dirty="0">
+                <a:latin typeface="Aptos" panose="020B0004020202020204" pitchFamily="34" charset="0"/>
+              </a:rPr>
+              <a:t> </a:t>
+            </a:r>
+            <a:r>
+              <a:rPr lang="en-US" dirty="0" err="1">
+                <a:latin typeface="Aptos" panose="020B0004020202020204" pitchFamily="34" charset="0"/>
+              </a:rPr>
+              <a:t>giao</a:t>
+            </a:r>
+            <a:r>
+              <a:rPr lang="en-US" dirty="0">
+                <a:latin typeface="Aptos" panose="020B0004020202020204" pitchFamily="34" charset="0"/>
+              </a:rPr>
+              <a:t> </a:t>
+            </a:r>
+            <a:r>
+              <a:rPr lang="en-US" dirty="0" err="1">
+                <a:latin typeface="Aptos" panose="020B0004020202020204" pitchFamily="34" charset="0"/>
+              </a:rPr>
+              <a:t>tiếp</a:t>
+            </a:r>
+            <a:r>
+              <a:rPr lang="en-US" dirty="0">
+                <a:latin typeface="Aptos" panose="020B0004020202020204" pitchFamily="34" charset="0"/>
+              </a:rPr>
+              <a:t>:</a:t>
+            </a:r>
+          </a:p>
+          <a:p>
+            <a:pPr marL="800100" lvl="1" indent="-342900">
+              <a:buFont typeface="+mj-lt"/>
+              <a:buAutoNum type="arabicParenR"/>
+            </a:pPr>
+            <a:r>
+              <a:rPr lang="en-US" dirty="0">
+                <a:latin typeface="Aptos" panose="020B0004020202020204" pitchFamily="34" charset="0"/>
+              </a:rPr>
+              <a:t>NSS </a:t>
+            </a:r>
+            <a:r>
+              <a:rPr lang="en-US" dirty="0" err="1">
+                <a:latin typeface="Aptos" panose="020B0004020202020204" pitchFamily="34" charset="0"/>
+              </a:rPr>
+              <a:t>được</a:t>
+            </a:r>
+            <a:r>
+              <a:rPr lang="en-US" dirty="0">
+                <a:latin typeface="Aptos" panose="020B0004020202020204" pitchFamily="34" charset="0"/>
+              </a:rPr>
+              <a:t> </a:t>
+            </a:r>
+            <a:r>
+              <a:rPr lang="en-US" dirty="0" err="1">
+                <a:latin typeface="Aptos" panose="020B0004020202020204" pitchFamily="34" charset="0"/>
+              </a:rPr>
+              <a:t>kéo</a:t>
+            </a:r>
+            <a:r>
+              <a:rPr lang="en-US" dirty="0">
+                <a:latin typeface="Aptos" panose="020B0004020202020204" pitchFamily="34" charset="0"/>
+              </a:rPr>
+              <a:t> </a:t>
+            </a:r>
+            <a:r>
+              <a:rPr lang="en-US" dirty="0" err="1">
+                <a:latin typeface="Aptos" panose="020B0004020202020204" pitchFamily="34" charset="0"/>
+              </a:rPr>
+              <a:t>từ</a:t>
+            </a:r>
+            <a:r>
+              <a:rPr lang="en-US" dirty="0">
+                <a:latin typeface="Aptos" panose="020B0004020202020204" pitchFamily="34" charset="0"/>
+              </a:rPr>
+              <a:t> </a:t>
+            </a:r>
+            <a:r>
+              <a:rPr lang="en-US" dirty="0" err="1">
+                <a:latin typeface="Aptos" panose="020B0004020202020204" pitchFamily="34" charset="0"/>
+              </a:rPr>
+              <a:t>mức</a:t>
+            </a:r>
+            <a:r>
+              <a:rPr lang="en-US" dirty="0">
+                <a:latin typeface="Aptos" panose="020B0004020202020204" pitchFamily="34" charset="0"/>
+              </a:rPr>
+              <a:t> </a:t>
+            </a:r>
+            <a:r>
+              <a:rPr lang="en-US" dirty="0" err="1">
+                <a:latin typeface="Aptos" panose="020B0004020202020204" pitchFamily="34" charset="0"/>
+              </a:rPr>
+              <a:t>cao</a:t>
+            </a:r>
+            <a:r>
+              <a:rPr lang="en-US" dirty="0">
+                <a:latin typeface="Aptos" panose="020B0004020202020204" pitchFamily="34" charset="0"/>
+              </a:rPr>
+              <a:t> </a:t>
+            </a:r>
+            <a:r>
+              <a:rPr lang="en-US" dirty="0" err="1">
+                <a:latin typeface="Aptos" panose="020B0004020202020204" pitchFamily="34" charset="0"/>
+              </a:rPr>
+              <a:t>xuống</a:t>
+            </a:r>
+            <a:r>
+              <a:rPr lang="en-US" dirty="0">
+                <a:latin typeface="Aptos" panose="020B0004020202020204" pitchFamily="34" charset="0"/>
+              </a:rPr>
+              <a:t> low </a:t>
+            </a:r>
+            <a:r>
+              <a:rPr lang="en-US" dirty="0" err="1">
+                <a:latin typeface="Aptos" panose="020B0004020202020204" pitchFamily="34" charset="0"/>
+              </a:rPr>
+              <a:t>để</a:t>
+            </a:r>
+            <a:r>
+              <a:rPr lang="en-US" dirty="0">
+                <a:latin typeface="Aptos" panose="020B0004020202020204" pitchFamily="34" charset="0"/>
+              </a:rPr>
+              <a:t> </a:t>
+            </a:r>
+            <a:r>
+              <a:rPr lang="en-US" dirty="0" err="1">
+                <a:latin typeface="Aptos" panose="020B0004020202020204" pitchFamily="34" charset="0"/>
+              </a:rPr>
+              <a:t>bắt</a:t>
+            </a:r>
+            <a:r>
+              <a:rPr lang="en-US" dirty="0">
+                <a:latin typeface="Aptos" panose="020B0004020202020204" pitchFamily="34" charset="0"/>
+              </a:rPr>
+              <a:t> </a:t>
+            </a:r>
+            <a:r>
+              <a:rPr lang="en-US" dirty="0" err="1">
+                <a:latin typeface="Aptos" panose="020B0004020202020204" pitchFamily="34" charset="0"/>
+              </a:rPr>
+              <a:t>đầu</a:t>
+            </a:r>
+            <a:r>
+              <a:rPr lang="en-US" dirty="0">
+                <a:latin typeface="Aptos" panose="020B0004020202020204" pitchFamily="34" charset="0"/>
+              </a:rPr>
+              <a:t> </a:t>
+            </a:r>
+            <a:r>
+              <a:rPr lang="en-US" dirty="0" err="1">
+                <a:latin typeface="Aptos" panose="020B0004020202020204" pitchFamily="34" charset="0"/>
+              </a:rPr>
+              <a:t>truyền</a:t>
+            </a:r>
+            <a:r>
+              <a:rPr lang="en-US" dirty="0">
+                <a:latin typeface="Aptos" panose="020B0004020202020204" pitchFamily="34" charset="0"/>
+              </a:rPr>
+              <a:t>, </a:t>
+            </a:r>
+            <a:r>
+              <a:rPr lang="en-US" dirty="0" err="1">
+                <a:latin typeface="Aptos" panose="020B0004020202020204" pitchFamily="34" charset="0"/>
+              </a:rPr>
+              <a:t>giữ</a:t>
+            </a:r>
+            <a:r>
+              <a:rPr lang="en-US" dirty="0">
+                <a:latin typeface="Aptos" panose="020B0004020202020204" pitchFamily="34" charset="0"/>
+              </a:rPr>
+              <a:t> low </a:t>
+            </a:r>
+            <a:r>
+              <a:rPr lang="en-US" dirty="0" err="1">
+                <a:latin typeface="Aptos" panose="020B0004020202020204" pitchFamily="34" charset="0"/>
+              </a:rPr>
+              <a:t>đến</a:t>
+            </a:r>
+            <a:r>
+              <a:rPr lang="en-US" dirty="0">
+                <a:latin typeface="Aptos" panose="020B0004020202020204" pitchFamily="34" charset="0"/>
+              </a:rPr>
+              <a:t> </a:t>
+            </a:r>
+            <a:r>
+              <a:rPr lang="en-US" dirty="0" err="1">
+                <a:latin typeface="Aptos" panose="020B0004020202020204" pitchFamily="34" charset="0"/>
+              </a:rPr>
+              <a:t>hết</a:t>
+            </a:r>
+            <a:r>
+              <a:rPr lang="en-US" dirty="0">
+                <a:latin typeface="Aptos" panose="020B0004020202020204" pitchFamily="34" charset="0"/>
+              </a:rPr>
+              <a:t> byte </a:t>
+            </a:r>
+            <a:r>
+              <a:rPr lang="en-US" dirty="0" err="1">
+                <a:latin typeface="Aptos" panose="020B0004020202020204" pitchFamily="34" charset="0"/>
+              </a:rPr>
+              <a:t>cuối</a:t>
+            </a:r>
+            <a:r>
+              <a:rPr lang="en-US" dirty="0">
+                <a:latin typeface="Aptos" panose="020B0004020202020204" pitchFamily="34" charset="0"/>
+              </a:rPr>
+              <a:t> </a:t>
+            </a:r>
+            <a:r>
+              <a:rPr lang="en-US" dirty="0" err="1">
+                <a:latin typeface="Aptos" panose="020B0004020202020204" pitchFamily="34" charset="0"/>
+              </a:rPr>
+              <a:t>cùng</a:t>
+            </a:r>
+            <a:r>
+              <a:rPr lang="en-US" dirty="0">
+                <a:latin typeface="Aptos" panose="020B0004020202020204" pitchFamily="34" charset="0"/>
+              </a:rPr>
+              <a:t> </a:t>
+            </a:r>
+            <a:r>
+              <a:rPr lang="en-US" dirty="0" err="1">
+                <a:latin typeface="Aptos" panose="020B0004020202020204" pitchFamily="34" charset="0"/>
+              </a:rPr>
+              <a:t>được</a:t>
+            </a:r>
+            <a:r>
+              <a:rPr lang="en-US" dirty="0">
+                <a:latin typeface="Aptos" panose="020B0004020202020204" pitchFamily="34" charset="0"/>
+              </a:rPr>
+              <a:t> </a:t>
+            </a:r>
+            <a:r>
+              <a:rPr lang="en-US" dirty="0" err="1">
+                <a:latin typeface="Aptos" panose="020B0004020202020204" pitchFamily="34" charset="0"/>
+              </a:rPr>
+              <a:t>truyền</a:t>
+            </a:r>
+            <a:r>
+              <a:rPr lang="en-US" dirty="0">
+                <a:latin typeface="Aptos" panose="020B0004020202020204" pitchFamily="34" charset="0"/>
+              </a:rPr>
+              <a:t> </a:t>
+            </a:r>
+            <a:r>
+              <a:rPr lang="en-US" dirty="0" err="1">
+                <a:latin typeface="Aptos" panose="020B0004020202020204" pitchFamily="34" charset="0"/>
+              </a:rPr>
+              <a:t>đi</a:t>
+            </a:r>
+            <a:endParaRPr lang="en-US" dirty="0">
+              <a:latin typeface="Aptos" panose="020B0004020202020204" pitchFamily="34" charset="0"/>
+            </a:endParaRPr>
+          </a:p>
+          <a:p>
+            <a:pPr marL="800100" lvl="1" indent="-342900">
+              <a:buFont typeface="+mj-lt"/>
+              <a:buAutoNum type="arabicParenR"/>
+            </a:pPr>
+            <a:r>
+              <a:rPr lang="en-US" dirty="0">
+                <a:latin typeface="Aptos" panose="020B0004020202020204" pitchFamily="34" charset="0"/>
+              </a:rPr>
+              <a:t>Byte </a:t>
+            </a:r>
+            <a:r>
+              <a:rPr lang="en-US" dirty="0" err="1">
+                <a:latin typeface="Aptos" panose="020B0004020202020204" pitchFamily="34" charset="0"/>
+              </a:rPr>
+              <a:t>đầu</a:t>
+            </a:r>
+            <a:r>
+              <a:rPr lang="en-US" dirty="0">
+                <a:latin typeface="Aptos" panose="020B0004020202020204" pitchFamily="34" charset="0"/>
+              </a:rPr>
+              <a:t> </a:t>
+            </a:r>
+            <a:r>
+              <a:rPr lang="en-US" dirty="0" err="1">
+                <a:latin typeface="Aptos" panose="020B0004020202020204" pitchFamily="34" charset="0"/>
+              </a:rPr>
+              <a:t>tiên</a:t>
+            </a:r>
+            <a:r>
+              <a:rPr lang="en-US" dirty="0">
+                <a:latin typeface="Aptos" panose="020B0004020202020204" pitchFamily="34" charset="0"/>
+              </a:rPr>
+              <a:t> </a:t>
+            </a:r>
+            <a:r>
+              <a:rPr lang="en-US" dirty="0" err="1">
+                <a:latin typeface="Aptos" panose="020B0004020202020204" pitchFamily="34" charset="0"/>
+              </a:rPr>
+              <a:t>là</a:t>
+            </a:r>
+            <a:r>
+              <a:rPr lang="en-US" dirty="0">
+                <a:latin typeface="Aptos" panose="020B0004020202020204" pitchFamily="34" charset="0"/>
+              </a:rPr>
+              <a:t> 1 bit w/r(1/0) </a:t>
+            </a:r>
+            <a:r>
+              <a:rPr lang="en-US" dirty="0" err="1">
+                <a:latin typeface="Aptos" panose="020B0004020202020204" pitchFamily="34" charset="0"/>
+              </a:rPr>
+              <a:t>và</a:t>
+            </a:r>
+            <a:r>
+              <a:rPr lang="en-US" dirty="0">
+                <a:latin typeface="Aptos" panose="020B0004020202020204" pitchFamily="34" charset="0"/>
+              </a:rPr>
+              <a:t> 7 bit </a:t>
+            </a:r>
+            <a:r>
+              <a:rPr lang="en-US" dirty="0" err="1">
+                <a:latin typeface="Aptos" panose="020B0004020202020204" pitchFamily="34" charset="0"/>
+              </a:rPr>
+              <a:t>địa</a:t>
+            </a:r>
+            <a:r>
+              <a:rPr lang="en-US" dirty="0">
+                <a:latin typeface="Aptos" panose="020B0004020202020204" pitchFamily="34" charset="0"/>
+              </a:rPr>
+              <a:t> </a:t>
+            </a:r>
+            <a:r>
+              <a:rPr lang="en-US" dirty="0" err="1">
+                <a:latin typeface="Aptos" panose="020B0004020202020204" pitchFamily="34" charset="0"/>
+              </a:rPr>
+              <a:t>chỉ</a:t>
+            </a:r>
+            <a:r>
+              <a:rPr lang="en-US" dirty="0">
+                <a:latin typeface="Aptos" panose="020B0004020202020204" pitchFamily="34" charset="0"/>
+              </a:rPr>
+              <a:t> </a:t>
+            </a:r>
+            <a:r>
+              <a:rPr lang="en-US" dirty="0" err="1">
+                <a:latin typeface="Aptos" panose="020B0004020202020204" pitchFamily="34" charset="0"/>
+              </a:rPr>
+              <a:t>thanh</a:t>
+            </a:r>
+            <a:r>
+              <a:rPr lang="en-US" dirty="0">
+                <a:latin typeface="Aptos" panose="020B0004020202020204" pitchFamily="34" charset="0"/>
+              </a:rPr>
+              <a:t> </a:t>
+            </a:r>
+            <a:r>
+              <a:rPr lang="en-US" dirty="0" err="1">
+                <a:latin typeface="Aptos" panose="020B0004020202020204" pitchFamily="34" charset="0"/>
+              </a:rPr>
+              <a:t>ghi</a:t>
+            </a:r>
+            <a:endParaRPr lang="en-US" dirty="0">
+              <a:latin typeface="Aptos" panose="020B0004020202020204" pitchFamily="34" charset="0"/>
+            </a:endParaRPr>
+          </a:p>
+          <a:p>
+            <a:pPr marL="800100" lvl="1" indent="-342900">
+              <a:buFont typeface="+mj-lt"/>
+              <a:buAutoNum type="arabicParenR"/>
+            </a:pPr>
+            <a:r>
+              <a:rPr lang="en-US" dirty="0" err="1">
+                <a:latin typeface="Aptos" panose="020B0004020202020204" pitchFamily="34" charset="0"/>
+              </a:rPr>
+              <a:t>Các</a:t>
+            </a:r>
+            <a:r>
+              <a:rPr lang="en-US" dirty="0">
+                <a:latin typeface="Aptos" panose="020B0004020202020204" pitchFamily="34" charset="0"/>
+              </a:rPr>
+              <a:t> byte </a:t>
+            </a:r>
+            <a:r>
+              <a:rPr lang="en-US" dirty="0" err="1">
+                <a:latin typeface="Aptos" panose="020B0004020202020204" pitchFamily="34" charset="0"/>
+              </a:rPr>
+              <a:t>tiếp</a:t>
+            </a:r>
+            <a:r>
+              <a:rPr lang="en-US" dirty="0">
+                <a:latin typeface="Aptos" panose="020B0004020202020204" pitchFamily="34" charset="0"/>
+              </a:rPr>
+              <a:t> </a:t>
+            </a:r>
+            <a:r>
+              <a:rPr lang="en-US" dirty="0" err="1">
+                <a:latin typeface="Aptos" panose="020B0004020202020204" pitchFamily="34" charset="0"/>
+              </a:rPr>
+              <a:t>theo</a:t>
+            </a:r>
+            <a:r>
+              <a:rPr lang="en-US" dirty="0">
+                <a:latin typeface="Aptos" panose="020B0004020202020204" pitchFamily="34" charset="0"/>
+              </a:rPr>
+              <a:t> </a:t>
+            </a:r>
+            <a:r>
+              <a:rPr lang="en-US" dirty="0" err="1">
+                <a:latin typeface="Aptos" panose="020B0004020202020204" pitchFamily="34" charset="0"/>
+              </a:rPr>
+              <a:t>là</a:t>
+            </a:r>
+            <a:r>
+              <a:rPr lang="en-US" dirty="0">
+                <a:latin typeface="Aptos" panose="020B0004020202020204" pitchFamily="34" charset="0"/>
+              </a:rPr>
+              <a:t> byte </a:t>
+            </a:r>
+            <a:r>
+              <a:rPr lang="en-US" dirty="0" err="1">
+                <a:latin typeface="Aptos" panose="020B0004020202020204" pitchFamily="34" charset="0"/>
+              </a:rPr>
+              <a:t>dữ</a:t>
+            </a:r>
+            <a:r>
+              <a:rPr lang="en-US" dirty="0">
+                <a:latin typeface="Aptos" panose="020B0004020202020204" pitchFamily="34" charset="0"/>
+              </a:rPr>
+              <a:t> </a:t>
+            </a:r>
+            <a:r>
+              <a:rPr lang="en-US" dirty="0" err="1">
+                <a:latin typeface="Aptos" panose="020B0004020202020204" pitchFamily="34" charset="0"/>
+              </a:rPr>
+              <a:t>liệu</a:t>
+            </a:r>
+            <a:r>
+              <a:rPr lang="en-US" dirty="0">
+                <a:latin typeface="Aptos" panose="020B0004020202020204" pitchFamily="34" charset="0"/>
+              </a:rPr>
+              <a:t>, </a:t>
+            </a:r>
+            <a:r>
+              <a:rPr lang="en-US" dirty="0" err="1">
+                <a:latin typeface="Aptos" panose="020B0004020202020204" pitchFamily="34" charset="0"/>
+              </a:rPr>
+              <a:t>kể</a:t>
+            </a:r>
+            <a:r>
+              <a:rPr lang="en-US" dirty="0">
+                <a:latin typeface="Aptos" panose="020B0004020202020204" pitchFamily="34" charset="0"/>
+              </a:rPr>
+              <a:t> </a:t>
+            </a:r>
+            <a:r>
+              <a:rPr lang="en-US" dirty="0" err="1">
+                <a:latin typeface="Aptos" panose="020B0004020202020204" pitchFamily="34" charset="0"/>
+              </a:rPr>
+              <a:t>cả</a:t>
+            </a:r>
+            <a:r>
+              <a:rPr lang="en-US" dirty="0">
+                <a:latin typeface="Aptos" panose="020B0004020202020204" pitchFamily="34" charset="0"/>
+              </a:rPr>
+              <a:t> </a:t>
+            </a:r>
+            <a:r>
+              <a:rPr lang="en-US" dirty="0" err="1">
+                <a:latin typeface="Aptos" panose="020B0004020202020204" pitchFamily="34" charset="0"/>
+              </a:rPr>
+              <a:t>là</a:t>
+            </a:r>
+            <a:r>
+              <a:rPr lang="en-US" dirty="0">
+                <a:latin typeface="Aptos" panose="020B0004020202020204" pitchFamily="34" charset="0"/>
+              </a:rPr>
+              <a:t> </a:t>
+            </a:r>
+            <a:r>
+              <a:rPr lang="en-US" dirty="0" err="1">
+                <a:latin typeface="Aptos" panose="020B0004020202020204" pitchFamily="34" charset="0"/>
+              </a:rPr>
+              <a:t>dữ</a:t>
+            </a:r>
+            <a:r>
+              <a:rPr lang="en-US" dirty="0">
+                <a:latin typeface="Aptos" panose="020B0004020202020204" pitchFamily="34" charset="0"/>
+              </a:rPr>
+              <a:t> </a:t>
+            </a:r>
+            <a:r>
+              <a:rPr lang="en-US" dirty="0" err="1">
+                <a:latin typeface="Aptos" panose="020B0004020202020204" pitchFamily="34" charset="0"/>
+              </a:rPr>
+              <a:t>liệu</a:t>
+            </a:r>
+            <a:r>
+              <a:rPr lang="en-US" dirty="0">
+                <a:latin typeface="Aptos" panose="020B0004020202020204" pitchFamily="34" charset="0"/>
+              </a:rPr>
+              <a:t> MOSI (</a:t>
+            </a:r>
+            <a:r>
+              <a:rPr lang="en-US" dirty="0" err="1">
+                <a:latin typeface="Aptos" panose="020B0004020202020204" pitchFamily="34" charset="0"/>
+              </a:rPr>
+              <a:t>ghi</a:t>
+            </a:r>
+            <a:r>
+              <a:rPr lang="en-US" dirty="0">
+                <a:latin typeface="Aptos" panose="020B0004020202020204" pitchFamily="34" charset="0"/>
+              </a:rPr>
+              <a:t>) hay MISO (</a:t>
+            </a:r>
+            <a:r>
+              <a:rPr lang="en-US" dirty="0" err="1">
+                <a:latin typeface="Aptos" panose="020B0004020202020204" pitchFamily="34" charset="0"/>
+              </a:rPr>
+              <a:t>đọc</a:t>
+            </a:r>
+            <a:r>
+              <a:rPr lang="en-US" dirty="0">
+                <a:latin typeface="Aptos" panose="020B0004020202020204" pitchFamily="34" charset="0"/>
+              </a:rPr>
+              <a:t>)</a:t>
+            </a:r>
+          </a:p>
+          <a:p>
+            <a:pPr marL="800100" lvl="1" indent="-342900">
+              <a:buFont typeface="+mj-lt"/>
+              <a:buAutoNum type="arabicParenR"/>
+            </a:pPr>
+            <a:r>
+              <a:rPr lang="en-US" dirty="0">
+                <a:latin typeface="Aptos" panose="020B0004020202020204" pitchFamily="34" charset="0"/>
+              </a:rPr>
+              <a:t>NSS </a:t>
+            </a:r>
+            <a:r>
+              <a:rPr lang="en-US" dirty="0" err="1">
+                <a:latin typeface="Aptos" panose="020B0004020202020204" pitchFamily="34" charset="0"/>
+              </a:rPr>
+              <a:t>lên</a:t>
+            </a:r>
+            <a:r>
+              <a:rPr lang="en-US" dirty="0">
+                <a:latin typeface="Aptos" panose="020B0004020202020204" pitchFamily="34" charset="0"/>
+              </a:rPr>
+              <a:t> </a:t>
+            </a:r>
+            <a:r>
+              <a:rPr lang="en-US" dirty="0" err="1">
+                <a:latin typeface="Aptos" panose="020B0004020202020204" pitchFamily="34" charset="0"/>
+              </a:rPr>
+              <a:t>cao</a:t>
+            </a:r>
+            <a:r>
+              <a:rPr lang="en-US" dirty="0">
+                <a:latin typeface="Aptos" panose="020B0004020202020204" pitchFamily="34" charset="0"/>
+              </a:rPr>
+              <a:t> </a:t>
+            </a:r>
+            <a:r>
+              <a:rPr lang="en-US" dirty="0" err="1">
+                <a:latin typeface="Aptos" panose="020B0004020202020204" pitchFamily="34" charset="0"/>
+              </a:rPr>
+              <a:t>khi</a:t>
+            </a:r>
+            <a:r>
+              <a:rPr lang="en-US" dirty="0">
+                <a:latin typeface="Aptos" panose="020B0004020202020204" pitchFamily="34" charset="0"/>
+              </a:rPr>
+              <a:t> </a:t>
+            </a:r>
+            <a:r>
+              <a:rPr lang="en-US" dirty="0" err="1">
+                <a:latin typeface="Aptos" panose="020B0004020202020204" pitchFamily="34" charset="0"/>
+              </a:rPr>
+              <a:t>kết</a:t>
+            </a:r>
+            <a:r>
+              <a:rPr lang="en-US" dirty="0">
+                <a:latin typeface="Aptos" panose="020B0004020202020204" pitchFamily="34" charset="0"/>
+              </a:rPr>
+              <a:t> </a:t>
+            </a:r>
+            <a:r>
+              <a:rPr lang="en-US" dirty="0" err="1">
+                <a:latin typeface="Aptos" panose="020B0004020202020204" pitchFamily="34" charset="0"/>
+              </a:rPr>
+              <a:t>thúc</a:t>
+            </a:r>
+            <a:r>
+              <a:rPr lang="en-US" dirty="0">
+                <a:latin typeface="Aptos" panose="020B0004020202020204" pitchFamily="34" charset="0"/>
+              </a:rPr>
+              <a:t> </a:t>
+            </a:r>
+            <a:r>
+              <a:rPr lang="en-US" dirty="0" err="1">
+                <a:latin typeface="Aptos" panose="020B0004020202020204" pitchFamily="34" charset="0"/>
+              </a:rPr>
+              <a:t>quá</a:t>
+            </a:r>
+            <a:r>
+              <a:rPr lang="en-US" dirty="0">
+                <a:latin typeface="Aptos" panose="020B0004020202020204" pitchFamily="34" charset="0"/>
+              </a:rPr>
+              <a:t> </a:t>
+            </a:r>
+            <a:r>
+              <a:rPr lang="en-US" dirty="0" err="1">
+                <a:latin typeface="Aptos" panose="020B0004020202020204" pitchFamily="34" charset="0"/>
+              </a:rPr>
+              <a:t>trình</a:t>
+            </a:r>
+            <a:r>
+              <a:rPr lang="en-US" dirty="0">
+                <a:latin typeface="Aptos" panose="020B0004020202020204" pitchFamily="34" charset="0"/>
+              </a:rPr>
+              <a:t> </a:t>
+            </a:r>
+            <a:r>
+              <a:rPr lang="en-US" dirty="0" err="1">
+                <a:latin typeface="Aptos" panose="020B0004020202020204" pitchFamily="34" charset="0"/>
+              </a:rPr>
+              <a:t>đọc</a:t>
+            </a:r>
+            <a:r>
+              <a:rPr lang="en-US" dirty="0">
+                <a:latin typeface="Aptos" panose="020B0004020202020204" pitchFamily="34" charset="0"/>
+              </a:rPr>
+              <a:t>/</a:t>
+            </a:r>
+            <a:r>
+              <a:rPr lang="en-US" dirty="0" err="1">
+                <a:latin typeface="Aptos" panose="020B0004020202020204" pitchFamily="34" charset="0"/>
+              </a:rPr>
+              <a:t>ghi</a:t>
+            </a:r>
+            <a:endParaRPr lang="en-US" dirty="0">
               <a:latin typeface="Aptos" panose="020B0004020202020204" pitchFamily="34" charset="0"/>
             </a:endParaRPr>
           </a:p>
@@ -6156,7 +7004,211 @@
               <a:buFont typeface="Wingdings" panose="05000000000000000000" pitchFamily="2" charset="2"/>
               <a:buChar char="q"/>
             </a:pPr>
-            <a:endParaRPr lang="en-US" sz="1400" dirty="0">
+            <a:r>
+              <a:rPr lang="en-US" dirty="0">
+                <a:latin typeface="Aptos" panose="020B0004020202020204" pitchFamily="34" charset="0"/>
+              </a:rPr>
+              <a:t>Burst: </a:t>
+            </a:r>
+            <a:r>
+              <a:rPr lang="en-US" dirty="0" err="1">
+                <a:latin typeface="Aptos" panose="020B0004020202020204" pitchFamily="34" charset="0"/>
+              </a:rPr>
+              <a:t>ghi</a:t>
+            </a:r>
+            <a:r>
+              <a:rPr lang="en-US" dirty="0">
+                <a:latin typeface="Aptos" panose="020B0004020202020204" pitchFamily="34" charset="0"/>
+              </a:rPr>
+              <a:t>/ </a:t>
+            </a:r>
+            <a:r>
+              <a:rPr lang="en-US" dirty="0" err="1">
+                <a:latin typeface="Aptos" panose="020B0004020202020204" pitchFamily="34" charset="0"/>
+              </a:rPr>
+              <a:t>đọc</a:t>
+            </a:r>
+            <a:r>
+              <a:rPr lang="en-US" dirty="0">
+                <a:latin typeface="Aptos" panose="020B0004020202020204" pitchFamily="34" charset="0"/>
+              </a:rPr>
+              <a:t> 1 </a:t>
+            </a:r>
+            <a:r>
+              <a:rPr lang="en-US" dirty="0" err="1">
+                <a:latin typeface="Aptos" panose="020B0004020202020204" pitchFamily="34" charset="0"/>
+              </a:rPr>
+              <a:t>loạt</a:t>
+            </a:r>
+            <a:r>
+              <a:rPr lang="en-US" dirty="0">
+                <a:latin typeface="Aptos" panose="020B0004020202020204" pitchFamily="34" charset="0"/>
+              </a:rPr>
+              <a:t> </a:t>
+            </a:r>
+            <a:r>
+              <a:rPr lang="en-US" dirty="0" err="1">
+                <a:latin typeface="Aptos" panose="020B0004020202020204" pitchFamily="34" charset="0"/>
+              </a:rPr>
+              <a:t>thanh</a:t>
+            </a:r>
+            <a:r>
+              <a:rPr lang="en-US" dirty="0">
+                <a:latin typeface="Aptos" panose="020B0004020202020204" pitchFamily="34" charset="0"/>
+              </a:rPr>
+              <a:t> </a:t>
+            </a:r>
+            <a:r>
+              <a:rPr lang="en-US" dirty="0" err="1">
+                <a:latin typeface="Aptos" panose="020B0004020202020204" pitchFamily="34" charset="0"/>
+              </a:rPr>
+              <a:t>ghi</a:t>
+            </a:r>
+            <a:r>
+              <a:rPr lang="en-US" dirty="0">
+                <a:latin typeface="Aptos" panose="020B0004020202020204" pitchFamily="34" charset="0"/>
+              </a:rPr>
+              <a:t> </a:t>
+            </a:r>
+            <a:r>
+              <a:rPr lang="en-US" dirty="0" err="1">
+                <a:latin typeface="Aptos" panose="020B0004020202020204" pitchFamily="34" charset="0"/>
+              </a:rPr>
+              <a:t>với</a:t>
+            </a:r>
+            <a:r>
+              <a:rPr lang="en-US" dirty="0">
+                <a:latin typeface="Aptos" panose="020B0004020202020204" pitchFamily="34" charset="0"/>
+              </a:rPr>
+              <a:t> </a:t>
+            </a:r>
+            <a:r>
+              <a:rPr lang="en-US" dirty="0" err="1">
+                <a:latin typeface="Aptos" panose="020B0004020202020204" pitchFamily="34" charset="0"/>
+              </a:rPr>
+              <a:t>địa</a:t>
+            </a:r>
+            <a:r>
+              <a:rPr lang="en-US" dirty="0">
+                <a:latin typeface="Aptos" panose="020B0004020202020204" pitchFamily="34" charset="0"/>
+              </a:rPr>
+              <a:t> </a:t>
+            </a:r>
+            <a:r>
+              <a:rPr lang="en-US" dirty="0" err="1">
+                <a:latin typeface="Aptos" panose="020B0004020202020204" pitchFamily="34" charset="0"/>
+              </a:rPr>
+              <a:t>chỉ</a:t>
+            </a:r>
+            <a:r>
+              <a:rPr lang="en-US" dirty="0">
+                <a:latin typeface="Aptos" panose="020B0004020202020204" pitchFamily="34" charset="0"/>
+              </a:rPr>
+              <a:t> </a:t>
+            </a:r>
+            <a:r>
+              <a:rPr lang="en-US" dirty="0" err="1">
+                <a:latin typeface="Aptos" panose="020B0004020202020204" pitchFamily="34" charset="0"/>
+              </a:rPr>
+              <a:t>tự</a:t>
+            </a:r>
+            <a:r>
+              <a:rPr lang="en-US" dirty="0">
+                <a:latin typeface="Aptos" panose="020B0004020202020204" pitchFamily="34" charset="0"/>
+              </a:rPr>
+              <a:t> </a:t>
+            </a:r>
+            <a:r>
+              <a:rPr lang="en-US" dirty="0" err="1">
+                <a:latin typeface="Aptos" panose="020B0004020202020204" pitchFamily="34" charset="0"/>
+              </a:rPr>
+              <a:t>động</a:t>
+            </a:r>
+            <a:r>
+              <a:rPr lang="en-US" dirty="0">
+                <a:latin typeface="Aptos" panose="020B0004020202020204" pitchFamily="34" charset="0"/>
+              </a:rPr>
+              <a:t> </a:t>
+            </a:r>
+            <a:r>
+              <a:rPr lang="en-US" dirty="0" err="1">
+                <a:latin typeface="Aptos" panose="020B0004020202020204" pitchFamily="34" charset="0"/>
+              </a:rPr>
+              <a:t>tăng</a:t>
+            </a:r>
+            <a:r>
+              <a:rPr lang="en-US" dirty="0">
+                <a:latin typeface="Aptos" panose="020B0004020202020204" pitchFamily="34" charset="0"/>
+              </a:rPr>
+              <a:t>, </a:t>
+            </a:r>
+            <a:r>
+              <a:rPr lang="en-US" dirty="0" err="1">
+                <a:latin typeface="Aptos" panose="020B0004020202020204" pitchFamily="34" charset="0"/>
+              </a:rPr>
+              <a:t>địa</a:t>
+            </a:r>
+            <a:r>
+              <a:rPr lang="en-US" dirty="0">
+                <a:latin typeface="Aptos" panose="020B0004020202020204" pitchFamily="34" charset="0"/>
+              </a:rPr>
+              <a:t> </a:t>
+            </a:r>
+            <a:r>
+              <a:rPr lang="en-US" dirty="0" err="1">
+                <a:latin typeface="Aptos" panose="020B0004020202020204" pitchFamily="34" charset="0"/>
+              </a:rPr>
+              <a:t>chỉ</a:t>
+            </a:r>
+            <a:r>
+              <a:rPr lang="en-US" dirty="0">
+                <a:latin typeface="Aptos" panose="020B0004020202020204" pitchFamily="34" charset="0"/>
+              </a:rPr>
+              <a:t> </a:t>
+            </a:r>
+            <a:r>
+              <a:rPr lang="en-US" dirty="0" err="1">
+                <a:latin typeface="Aptos" panose="020B0004020202020204" pitchFamily="34" charset="0"/>
+              </a:rPr>
+              <a:t>thanh</a:t>
+            </a:r>
+            <a:r>
+              <a:rPr lang="en-US" dirty="0">
+                <a:latin typeface="Aptos" panose="020B0004020202020204" pitchFamily="34" charset="0"/>
+              </a:rPr>
+              <a:t> </a:t>
+            </a:r>
+            <a:r>
+              <a:rPr lang="en-US" dirty="0" err="1">
+                <a:latin typeface="Aptos" panose="020B0004020202020204" pitchFamily="34" charset="0"/>
+              </a:rPr>
+              <a:t>ghi</a:t>
+            </a:r>
+            <a:r>
+              <a:rPr lang="en-US" dirty="0">
+                <a:latin typeface="Aptos" panose="020B0004020202020204" pitchFamily="34" charset="0"/>
+              </a:rPr>
+              <a:t> </a:t>
+            </a:r>
+            <a:r>
+              <a:rPr lang="en-US" dirty="0" err="1">
+                <a:latin typeface="Aptos" panose="020B0004020202020204" pitchFamily="34" charset="0"/>
+              </a:rPr>
+              <a:t>khác</a:t>
+            </a:r>
+            <a:r>
+              <a:rPr lang="en-US" dirty="0">
+                <a:latin typeface="Aptos" panose="020B0004020202020204" pitchFamily="34" charset="0"/>
+              </a:rPr>
+              <a:t> </a:t>
+            </a:r>
+            <a:r>
+              <a:rPr lang="en-US" dirty="0" err="1">
+                <a:latin typeface="Aptos" panose="020B0004020202020204" pitchFamily="34" charset="0"/>
+              </a:rPr>
+              <a:t>RegFiFo</a:t>
+            </a:r>
+            <a:endParaRPr lang="en-US" dirty="0">
               <a:latin typeface="Aptos" panose="020B0004020202020204" pitchFamily="34" charset="0"/>
             </a:endParaRPr>
           </a:p>
@@ -6166,1242 +7218,168 @@
               <a:buChar char="q"/>
             </a:pPr>
             <a:r>
-              <a:rPr lang="en-US" sz="1400" dirty="0" err="1">
-                <a:latin typeface="Aptos" panose="020B0004020202020204" pitchFamily="34" charset="0"/>
-              </a:rPr>
-              <a:t>việc</a:t>
-            </a:r>
-            <a:r>
-              <a:rPr lang="en-US" sz="1400" dirty="0">
-                <a:latin typeface="Aptos" panose="020B0004020202020204" pitchFamily="34" charset="0"/>
-              </a:rPr>
-              <a:t> </a:t>
-            </a:r>
-            <a:r>
-              <a:rPr lang="en-US" sz="1400" dirty="0" err="1">
-                <a:latin typeface="Aptos" panose="020B0004020202020204" pitchFamily="34" charset="0"/>
-              </a:rPr>
-              <a:t>điều</a:t>
-            </a:r>
-            <a:r>
-              <a:rPr lang="en-US" sz="1400" dirty="0">
-                <a:latin typeface="Aptos" panose="020B0004020202020204" pitchFamily="34" charset="0"/>
-              </a:rPr>
-              <a:t> </a:t>
-            </a:r>
-            <a:r>
-              <a:rPr lang="en-US" sz="1400" dirty="0" err="1">
-                <a:latin typeface="Aptos" panose="020B0004020202020204" pitchFamily="34" charset="0"/>
-              </a:rPr>
-              <a:t>khiển</a:t>
-            </a:r>
-            <a:r>
-              <a:rPr lang="en-US" sz="1400" dirty="0">
-                <a:latin typeface="Aptos" panose="020B0004020202020204" pitchFamily="34" charset="0"/>
-              </a:rPr>
-              <a:t> module LoRa </a:t>
-            </a:r>
-            <a:r>
-              <a:rPr lang="en-US" sz="1400" dirty="0" err="1">
-                <a:latin typeface="Aptos" panose="020B0004020202020204" pitchFamily="34" charset="0"/>
-              </a:rPr>
-              <a:t>thông</a:t>
-            </a:r>
-            <a:r>
-              <a:rPr lang="en-US" sz="1400" dirty="0">
-                <a:latin typeface="Aptos" panose="020B0004020202020204" pitchFamily="34" charset="0"/>
-              </a:rPr>
-              <a:t> qua </a:t>
-            </a:r>
-            <a:r>
-              <a:rPr lang="en-US" sz="1400" dirty="0" err="1">
-                <a:latin typeface="Aptos" panose="020B0004020202020204" pitchFamily="34" charset="0"/>
-              </a:rPr>
-              <a:t>việc</a:t>
-            </a:r>
-            <a:r>
-              <a:rPr lang="en-US" sz="1400" dirty="0">
-                <a:latin typeface="Aptos" panose="020B0004020202020204" pitchFamily="34" charset="0"/>
-              </a:rPr>
-              <a:t> </a:t>
-            </a:r>
-            <a:r>
-              <a:rPr lang="en-US" sz="1400" dirty="0" err="1">
-                <a:latin typeface="Aptos" panose="020B0004020202020204" pitchFamily="34" charset="0"/>
-              </a:rPr>
-              <a:t>cấu</a:t>
-            </a:r>
-            <a:r>
-              <a:rPr lang="en-US" sz="1400" dirty="0">
-                <a:latin typeface="Aptos" panose="020B0004020202020204" pitchFamily="34" charset="0"/>
-              </a:rPr>
-              <a:t> </a:t>
-            </a:r>
-            <a:r>
-              <a:rPr lang="en-US" sz="1400" dirty="0" err="1">
-                <a:latin typeface="Aptos" panose="020B0004020202020204" pitchFamily="34" charset="0"/>
-              </a:rPr>
-              <a:t>hình</a:t>
-            </a:r>
-            <a:r>
-              <a:rPr lang="en-US" sz="1400" dirty="0">
-                <a:latin typeface="Aptos" panose="020B0004020202020204" pitchFamily="34" charset="0"/>
-              </a:rPr>
-              <a:t> </a:t>
-            </a:r>
-            <a:r>
-              <a:rPr lang="en-US" sz="1400" dirty="0" err="1">
-                <a:latin typeface="Aptos" panose="020B0004020202020204" pitchFamily="34" charset="0"/>
-              </a:rPr>
-              <a:t>các</a:t>
-            </a:r>
-            <a:r>
-              <a:rPr lang="en-US" sz="1400" dirty="0">
-                <a:latin typeface="Aptos" panose="020B0004020202020204" pitchFamily="34" charset="0"/>
-              </a:rPr>
-              <a:t> </a:t>
-            </a:r>
-            <a:r>
-              <a:rPr lang="en-US" sz="1400" dirty="0" err="1">
+              <a:rPr lang="en-US" dirty="0" err="1">
+                <a:latin typeface="Aptos" panose="020B0004020202020204" pitchFamily="34" charset="0"/>
+              </a:rPr>
+              <a:t>Chế</a:t>
+            </a:r>
+            <a:r>
+              <a:rPr lang="en-US" dirty="0">
+                <a:latin typeface="Aptos" panose="020B0004020202020204" pitchFamily="34" charset="0"/>
+              </a:rPr>
+              <a:t> </a:t>
+            </a:r>
+            <a:r>
+              <a:rPr lang="en-US" dirty="0" err="1">
+                <a:latin typeface="Aptos" panose="020B0004020202020204" pitchFamily="34" charset="0"/>
+              </a:rPr>
+              <a:t>độ</a:t>
+            </a:r>
+            <a:r>
+              <a:rPr lang="en-US" dirty="0">
+                <a:latin typeface="Aptos" panose="020B0004020202020204" pitchFamily="34" charset="0"/>
+              </a:rPr>
+              <a:t> FIFO </a:t>
+            </a:r>
+            <a:r>
+              <a:rPr lang="en-US" dirty="0" err="1">
+                <a:latin typeface="Aptos" panose="020B0004020202020204" pitchFamily="34" charset="0"/>
+              </a:rPr>
+              <a:t>truy</a:t>
+            </a:r>
+            <a:r>
+              <a:rPr lang="en-US" dirty="0">
+                <a:latin typeface="Aptos" panose="020B0004020202020204" pitchFamily="34" charset="0"/>
+              </a:rPr>
+              <a:t> </a:t>
+            </a:r>
+            <a:r>
+              <a:rPr lang="en-US" dirty="0" err="1">
+                <a:latin typeface="Aptos" panose="020B0004020202020204" pitchFamily="34" charset="0"/>
+              </a:rPr>
+              <a:t>cập</a:t>
+            </a:r>
+            <a:r>
+              <a:rPr lang="en-US" dirty="0">
+                <a:latin typeface="Aptos" panose="020B0004020202020204" pitchFamily="34" charset="0"/>
+              </a:rPr>
+              <a:t> </a:t>
+            </a:r>
+            <a:r>
+              <a:rPr lang="en-US" dirty="0" err="1">
+                <a:latin typeface="Aptos" panose="020B0004020202020204" pitchFamily="34" charset="0"/>
+              </a:rPr>
+              <a:t>tới</a:t>
+            </a:r>
+            <a:r>
+              <a:rPr lang="en-US" dirty="0">
+                <a:latin typeface="Aptos" panose="020B0004020202020204" pitchFamily="34" charset="0"/>
+              </a:rPr>
+              <a:t> </a:t>
+            </a:r>
+            <a:r>
+              <a:rPr lang="en-US" dirty="0" err="1">
+                <a:latin typeface="Aptos" panose="020B0004020202020204" pitchFamily="34" charset="0"/>
+              </a:rPr>
+              <a:t>vùng</a:t>
+            </a:r>
+            <a:r>
+              <a:rPr lang="en-US" dirty="0">
+                <a:latin typeface="Aptos" panose="020B0004020202020204" pitchFamily="34" charset="0"/>
+              </a:rPr>
+              <a:t> </a:t>
+            </a:r>
+            <a:r>
+              <a:rPr lang="en-US" dirty="0" err="1">
+                <a:latin typeface="Aptos" panose="020B0004020202020204" pitchFamily="34" charset="0"/>
+              </a:rPr>
+              <a:t>databuffer</a:t>
+            </a:r>
+            <a:r>
+              <a:rPr lang="en-US" dirty="0">
+                <a:latin typeface="Aptos" panose="020B0004020202020204" pitchFamily="34" charset="0"/>
+              </a:rPr>
+              <a:t> </a:t>
+            </a:r>
+            <a:r>
+              <a:rPr lang="en-US" dirty="0" err="1">
+                <a:latin typeface="Aptos" panose="020B0004020202020204" pitchFamily="34" charset="0"/>
+              </a:rPr>
+              <a:t>với</a:t>
+            </a:r>
+            <a:r>
+              <a:rPr lang="en-US" dirty="0">
+                <a:latin typeface="Aptos" panose="020B0004020202020204" pitchFamily="34" charset="0"/>
+              </a:rPr>
+              <a:t> </a:t>
+            </a:r>
+            <a:r>
+              <a:rPr lang="en-US" dirty="0" err="1">
+                <a:latin typeface="Aptos" panose="020B0004020202020204" pitchFamily="34" charset="0"/>
+              </a:rPr>
+              <a:t>địa</a:t>
+            </a:r>
+            <a:r>
+              <a:rPr lang="en-US" dirty="0">
+                <a:latin typeface="Aptos" panose="020B0004020202020204" pitchFamily="34" charset="0"/>
+              </a:rPr>
+              <a:t> </a:t>
+            </a:r>
+            <a:r>
+              <a:rPr lang="en-US" dirty="0" err="1">
+                <a:latin typeface="Aptos" panose="020B0004020202020204" pitchFamily="34" charset="0"/>
+              </a:rPr>
+              <a:t>chỉ</a:t>
+            </a:r>
+            <a:r>
+              <a:rPr lang="en-US" dirty="0">
+                <a:latin typeface="Aptos" panose="020B0004020202020204" pitchFamily="34" charset="0"/>
+              </a:rPr>
+              <a:t> </a:t>
+            </a:r>
+            <a:r>
+              <a:rPr lang="en-US" dirty="0" err="1">
                 <a:latin typeface="Aptos" panose="020B0004020202020204" pitchFamily="34" charset="0"/>
               </a:rPr>
               <a:t>thanh</a:t>
             </a:r>
             <a:r>
-              <a:rPr lang="en-US" sz="1400" dirty="0">
-                <a:latin typeface="Aptos" panose="020B0004020202020204" pitchFamily="34" charset="0"/>
-              </a:rPr>
-              <a:t> </a:t>
-            </a:r>
-            <a:r>
-              <a:rPr lang="en-US" sz="1400" dirty="0" err="1">
+              <a:rPr lang="en-US" dirty="0">
+                <a:latin typeface="Aptos" panose="020B0004020202020204" pitchFamily="34" charset="0"/>
+              </a:rPr>
+              <a:t> </a:t>
+            </a:r>
+            <a:r>
+              <a:rPr lang="en-US" dirty="0" err="1">
                 <a:latin typeface="Aptos" panose="020B0004020202020204" pitchFamily="34" charset="0"/>
               </a:rPr>
               <a:t>ghi</a:t>
             </a:r>
             <a:r>
-              <a:rPr lang="en-US" sz="1400" dirty="0">
-                <a:latin typeface="Aptos" panose="020B0004020202020204" pitchFamily="34" charset="0"/>
-              </a:rPr>
-              <a:t>, </a:t>
-            </a:r>
-            <a:r>
-              <a:rPr lang="en-US" sz="1400" dirty="0" err="1">
-                <a:latin typeface="Aptos" panose="020B0004020202020204" pitchFamily="34" charset="0"/>
-              </a:rPr>
-              <a:t>có</a:t>
-            </a:r>
-            <a:r>
-              <a:rPr lang="en-US" sz="1400" dirty="0">
-                <a:latin typeface="Aptos" panose="020B0004020202020204" pitchFamily="34" charset="0"/>
-              </a:rPr>
-              <a:t> 3 </a:t>
-            </a:r>
-            <a:r>
-              <a:rPr lang="en-US" sz="1400" dirty="0" err="1">
-                <a:latin typeface="Aptos" panose="020B0004020202020204" pitchFamily="34" charset="0"/>
-              </a:rPr>
-              <a:t>chế</a:t>
-            </a:r>
-            <a:r>
-              <a:rPr lang="en-US" sz="1400" dirty="0">
-                <a:latin typeface="Aptos" panose="020B0004020202020204" pitchFamily="34" charset="0"/>
-              </a:rPr>
-              <a:t> </a:t>
-            </a:r>
-            <a:r>
-              <a:rPr lang="en-US" sz="1400" dirty="0" err="1">
-                <a:latin typeface="Aptos" panose="020B0004020202020204" pitchFamily="34" charset="0"/>
-              </a:rPr>
-              <a:t>độ</a:t>
-            </a:r>
-            <a:r>
-              <a:rPr lang="en-US" sz="1400" dirty="0">
-                <a:latin typeface="Aptos" panose="020B0004020202020204" pitchFamily="34" charset="0"/>
-              </a:rPr>
-              <a:t> </a:t>
-            </a:r>
-            <a:r>
-              <a:rPr lang="en-US" sz="1400" dirty="0" err="1">
-                <a:latin typeface="Aptos" panose="020B0004020202020204" pitchFamily="34" charset="0"/>
-              </a:rPr>
-              <a:t>truy</a:t>
-            </a:r>
-            <a:r>
-              <a:rPr lang="en-US" sz="1400" dirty="0">
-                <a:latin typeface="Aptos" panose="020B0004020202020204" pitchFamily="34" charset="0"/>
-              </a:rPr>
-              <a:t> </a:t>
-            </a:r>
-            <a:r>
-              <a:rPr lang="en-US" sz="1400" dirty="0" err="1">
-                <a:latin typeface="Aptos" panose="020B0004020202020204" pitchFamily="34" charset="0"/>
-              </a:rPr>
-              <a:t>cập</a:t>
-            </a:r>
-            <a:r>
-              <a:rPr lang="en-US" sz="1400" dirty="0">
-                <a:latin typeface="Aptos" panose="020B0004020202020204" pitchFamily="34" charset="0"/>
-              </a:rPr>
-              <a:t> </a:t>
-            </a:r>
-            <a:r>
-              <a:rPr lang="en-US" sz="1400" dirty="0" err="1">
+              <a:rPr lang="en-US" dirty="0">
+                <a:latin typeface="Aptos" panose="020B0004020202020204" pitchFamily="34" charset="0"/>
+              </a:rPr>
+              <a:t> </a:t>
+            </a:r>
+            <a:r>
+              <a:rPr lang="en-US" dirty="0" err="1">
                 <a:latin typeface="Aptos" panose="020B0004020202020204" pitchFamily="34" charset="0"/>
               </a:rPr>
               <a:t>là</a:t>
             </a:r>
             <a:r>
-              <a:rPr lang="en-US" sz="1400" dirty="0">
-                <a:latin typeface="Aptos" panose="020B0004020202020204" pitchFamily="34" charset="0"/>
-              </a:rPr>
-              <a:t> Single, Burst, FIFO</a:t>
-            </a:r>
-          </a:p>
-          <a:p>
-            <a:pPr marL="285750" indent="-285750">
-              <a:buFont typeface="Wingdings" panose="05000000000000000000" pitchFamily="2" charset="2"/>
-              <a:buChar char="q"/>
-            </a:pPr>
-            <a:r>
-              <a:rPr lang="en-US" sz="1400" dirty="0" err="1">
-                <a:latin typeface="Aptos" panose="020B0004020202020204" pitchFamily="34" charset="0"/>
-              </a:rPr>
-              <a:t>Quá</a:t>
-            </a:r>
-            <a:r>
-              <a:rPr lang="en-US" sz="1400" dirty="0">
-                <a:latin typeface="Aptos" panose="020B0004020202020204" pitchFamily="34" charset="0"/>
-              </a:rPr>
-              <a:t> </a:t>
-            </a:r>
-            <a:r>
-              <a:rPr lang="en-US" sz="1400" dirty="0" err="1">
-                <a:latin typeface="Aptos" panose="020B0004020202020204" pitchFamily="34" charset="0"/>
-              </a:rPr>
-              <a:t>trình</a:t>
-            </a:r>
-            <a:r>
-              <a:rPr lang="en-US" sz="1400" dirty="0">
-                <a:latin typeface="Aptos" panose="020B0004020202020204" pitchFamily="34" charset="0"/>
-              </a:rPr>
-              <a:t> </a:t>
-            </a:r>
-            <a:r>
-              <a:rPr lang="en-US" sz="1400" dirty="0" err="1">
-                <a:latin typeface="Aptos" panose="020B0004020202020204" pitchFamily="34" charset="0"/>
-              </a:rPr>
-              <a:t>giao</a:t>
-            </a:r>
-            <a:r>
-              <a:rPr lang="en-US" sz="1400" dirty="0">
-                <a:latin typeface="Aptos" panose="020B0004020202020204" pitchFamily="34" charset="0"/>
-              </a:rPr>
-              <a:t> </a:t>
-            </a:r>
-            <a:r>
-              <a:rPr lang="en-US" sz="1400" dirty="0" err="1">
-                <a:latin typeface="Aptos" panose="020B0004020202020204" pitchFamily="34" charset="0"/>
-              </a:rPr>
-              <a:t>tiếp</a:t>
-            </a:r>
-            <a:r>
-              <a:rPr lang="en-US" sz="1400" dirty="0">
-                <a:latin typeface="Aptos" panose="020B0004020202020204" pitchFamily="34" charset="0"/>
-              </a:rPr>
-              <a:t>:</a:t>
-            </a:r>
-          </a:p>
-          <a:p>
-            <a:pPr marL="800100" lvl="1" indent="-342900">
-              <a:buFont typeface="+mj-lt"/>
-              <a:buAutoNum type="arabicParenR"/>
-            </a:pPr>
-            <a:r>
-              <a:rPr lang="en-US" sz="1400" dirty="0">
-                <a:latin typeface="Aptos" panose="020B0004020202020204" pitchFamily="34" charset="0"/>
-              </a:rPr>
-              <a:t>NSS </a:t>
-            </a:r>
-            <a:r>
-              <a:rPr lang="en-US" sz="1400" dirty="0" err="1">
-                <a:latin typeface="Aptos" panose="020B0004020202020204" pitchFamily="34" charset="0"/>
-              </a:rPr>
-              <a:t>được</a:t>
-            </a:r>
-            <a:r>
-              <a:rPr lang="en-US" sz="1400" dirty="0">
-                <a:latin typeface="Aptos" panose="020B0004020202020204" pitchFamily="34" charset="0"/>
-              </a:rPr>
-              <a:t> </a:t>
-            </a:r>
-            <a:r>
-              <a:rPr lang="en-US" sz="1400" dirty="0" err="1">
-                <a:latin typeface="Aptos" panose="020B0004020202020204" pitchFamily="34" charset="0"/>
-              </a:rPr>
-              <a:t>kéo</a:t>
-            </a:r>
-            <a:r>
-              <a:rPr lang="en-US" sz="1400" dirty="0">
-                <a:latin typeface="Aptos" panose="020B0004020202020204" pitchFamily="34" charset="0"/>
-              </a:rPr>
-              <a:t> </a:t>
-            </a:r>
-            <a:r>
-              <a:rPr lang="en-US" sz="1400" dirty="0" err="1">
-                <a:latin typeface="Aptos" panose="020B0004020202020204" pitchFamily="34" charset="0"/>
-              </a:rPr>
-              <a:t>từ</a:t>
-            </a:r>
-            <a:r>
-              <a:rPr lang="en-US" sz="1400" dirty="0">
-                <a:latin typeface="Aptos" panose="020B0004020202020204" pitchFamily="34" charset="0"/>
-              </a:rPr>
-              <a:t> </a:t>
-            </a:r>
-            <a:r>
-              <a:rPr lang="en-US" sz="1400" dirty="0" err="1">
-                <a:latin typeface="Aptos" panose="020B0004020202020204" pitchFamily="34" charset="0"/>
-              </a:rPr>
-              <a:t>mức</a:t>
-            </a:r>
-            <a:r>
-              <a:rPr lang="en-US" sz="1400" dirty="0">
-                <a:latin typeface="Aptos" panose="020B0004020202020204" pitchFamily="34" charset="0"/>
-              </a:rPr>
-              <a:t> </a:t>
-            </a:r>
-            <a:r>
-              <a:rPr lang="en-US" sz="1400" dirty="0" err="1">
-                <a:latin typeface="Aptos" panose="020B0004020202020204" pitchFamily="34" charset="0"/>
-              </a:rPr>
-              <a:t>cao</a:t>
-            </a:r>
-            <a:r>
-              <a:rPr lang="en-US" sz="1400" dirty="0">
-                <a:latin typeface="Aptos" panose="020B0004020202020204" pitchFamily="34" charset="0"/>
-              </a:rPr>
-              <a:t> </a:t>
-            </a:r>
-            <a:r>
-              <a:rPr lang="en-US" sz="1400" dirty="0" err="1">
-                <a:latin typeface="Aptos" panose="020B0004020202020204" pitchFamily="34" charset="0"/>
-              </a:rPr>
-              <a:t>xuống</a:t>
-            </a:r>
-            <a:r>
-              <a:rPr lang="en-US" sz="1400" dirty="0">
-                <a:latin typeface="Aptos" panose="020B0004020202020204" pitchFamily="34" charset="0"/>
-              </a:rPr>
-              <a:t> low </a:t>
-            </a:r>
-            <a:r>
-              <a:rPr lang="en-US" sz="1400" dirty="0" err="1">
-                <a:latin typeface="Aptos" panose="020B0004020202020204" pitchFamily="34" charset="0"/>
-              </a:rPr>
-              <a:t>để</a:t>
-            </a:r>
-            <a:r>
-              <a:rPr lang="en-US" sz="1400" dirty="0">
-                <a:latin typeface="Aptos" panose="020B0004020202020204" pitchFamily="34" charset="0"/>
-              </a:rPr>
-              <a:t> </a:t>
-            </a:r>
-            <a:r>
-              <a:rPr lang="en-US" sz="1400" dirty="0" err="1">
-                <a:latin typeface="Aptos" panose="020B0004020202020204" pitchFamily="34" charset="0"/>
-              </a:rPr>
-              <a:t>bắt</a:t>
-            </a:r>
-            <a:r>
-              <a:rPr lang="en-US" sz="1400" dirty="0">
-                <a:latin typeface="Aptos" panose="020B0004020202020204" pitchFamily="34" charset="0"/>
-              </a:rPr>
-              <a:t> </a:t>
-            </a:r>
-            <a:r>
-              <a:rPr lang="en-US" sz="1400" dirty="0" err="1">
-                <a:latin typeface="Aptos" panose="020B0004020202020204" pitchFamily="34" charset="0"/>
-              </a:rPr>
-              <a:t>đầu</a:t>
-            </a:r>
-            <a:r>
-              <a:rPr lang="en-US" sz="1400" dirty="0">
-                <a:latin typeface="Aptos" panose="020B0004020202020204" pitchFamily="34" charset="0"/>
-              </a:rPr>
-              <a:t> </a:t>
-            </a:r>
-            <a:r>
-              <a:rPr lang="en-US" sz="1400" dirty="0" err="1">
-                <a:latin typeface="Aptos" panose="020B0004020202020204" pitchFamily="34" charset="0"/>
-              </a:rPr>
-              <a:t>truyền</a:t>
-            </a:r>
-            <a:r>
-              <a:rPr lang="en-US" sz="1400" dirty="0">
-                <a:latin typeface="Aptos" panose="020B0004020202020204" pitchFamily="34" charset="0"/>
-              </a:rPr>
-              <a:t>, </a:t>
-            </a:r>
-            <a:r>
-              <a:rPr lang="en-US" sz="1400" dirty="0" err="1">
-                <a:latin typeface="Aptos" panose="020B0004020202020204" pitchFamily="34" charset="0"/>
-              </a:rPr>
-              <a:t>giữ</a:t>
-            </a:r>
-            <a:r>
-              <a:rPr lang="en-US" sz="1400" dirty="0">
-                <a:latin typeface="Aptos" panose="020B0004020202020204" pitchFamily="34" charset="0"/>
-              </a:rPr>
-              <a:t> low </a:t>
-            </a:r>
-            <a:r>
-              <a:rPr lang="en-US" sz="1400" dirty="0" err="1">
-                <a:latin typeface="Aptos" panose="020B0004020202020204" pitchFamily="34" charset="0"/>
-              </a:rPr>
-              <a:t>đến</a:t>
-            </a:r>
-            <a:r>
-              <a:rPr lang="en-US" sz="1400" dirty="0">
-                <a:latin typeface="Aptos" panose="020B0004020202020204" pitchFamily="34" charset="0"/>
-              </a:rPr>
-              <a:t> </a:t>
-            </a:r>
-            <a:r>
-              <a:rPr lang="en-US" sz="1400" dirty="0" err="1">
-                <a:latin typeface="Aptos" panose="020B0004020202020204" pitchFamily="34" charset="0"/>
-              </a:rPr>
-              <a:t>hết</a:t>
-            </a:r>
-            <a:r>
-              <a:rPr lang="en-US" sz="1400" dirty="0">
-                <a:latin typeface="Aptos" panose="020B0004020202020204" pitchFamily="34" charset="0"/>
-              </a:rPr>
-              <a:t> byte </a:t>
-            </a:r>
-            <a:r>
-              <a:rPr lang="en-US" sz="1400" dirty="0" err="1">
-                <a:latin typeface="Aptos" panose="020B0004020202020204" pitchFamily="34" charset="0"/>
-              </a:rPr>
-              <a:t>cuối</a:t>
-            </a:r>
-            <a:r>
-              <a:rPr lang="en-US" sz="1400" dirty="0">
-                <a:latin typeface="Aptos" panose="020B0004020202020204" pitchFamily="34" charset="0"/>
-              </a:rPr>
-              <a:t> </a:t>
-            </a:r>
-            <a:r>
-              <a:rPr lang="en-US" sz="1400" dirty="0" err="1">
-                <a:latin typeface="Aptos" panose="020B0004020202020204" pitchFamily="34" charset="0"/>
-              </a:rPr>
-              <a:t>cùng</a:t>
-            </a:r>
-            <a:r>
-              <a:rPr lang="en-US" sz="1400" dirty="0">
-                <a:latin typeface="Aptos" panose="020B0004020202020204" pitchFamily="34" charset="0"/>
-              </a:rPr>
-              <a:t> </a:t>
-            </a:r>
-            <a:r>
-              <a:rPr lang="en-US" sz="1400" dirty="0" err="1">
-                <a:latin typeface="Aptos" panose="020B0004020202020204" pitchFamily="34" charset="0"/>
-              </a:rPr>
-              <a:t>được</a:t>
-            </a:r>
-            <a:r>
-              <a:rPr lang="en-US" sz="1400" dirty="0">
-                <a:latin typeface="Aptos" panose="020B0004020202020204" pitchFamily="34" charset="0"/>
-              </a:rPr>
-              <a:t> </a:t>
-            </a:r>
-            <a:r>
-              <a:rPr lang="en-US" sz="1400" dirty="0" err="1">
-                <a:latin typeface="Aptos" panose="020B0004020202020204" pitchFamily="34" charset="0"/>
-              </a:rPr>
-              <a:t>truyền</a:t>
-            </a:r>
-            <a:r>
-              <a:rPr lang="en-US" sz="1400" dirty="0">
-                <a:latin typeface="Aptos" panose="020B0004020202020204" pitchFamily="34" charset="0"/>
-              </a:rPr>
-              <a:t> </a:t>
-            </a:r>
-            <a:r>
-              <a:rPr lang="en-US" sz="1400" dirty="0" err="1">
-                <a:latin typeface="Aptos" panose="020B0004020202020204" pitchFamily="34" charset="0"/>
-              </a:rPr>
-              <a:t>đi</a:t>
-            </a:r>
-            <a:endParaRPr lang="en-US" sz="1400" dirty="0">
-              <a:latin typeface="Aptos" panose="020B0004020202020204" pitchFamily="34" charset="0"/>
-            </a:endParaRPr>
-          </a:p>
-          <a:p>
-            <a:pPr marL="800100" lvl="1" indent="-342900">
-              <a:buFont typeface="+mj-lt"/>
-              <a:buAutoNum type="arabicParenR"/>
-            </a:pPr>
-            <a:r>
-              <a:rPr lang="en-US" sz="1400" dirty="0">
-                <a:latin typeface="Aptos" panose="020B0004020202020204" pitchFamily="34" charset="0"/>
-              </a:rPr>
-              <a:t>Byte </a:t>
-            </a:r>
-            <a:r>
-              <a:rPr lang="en-US" sz="1400" dirty="0" err="1">
-                <a:latin typeface="Aptos" panose="020B0004020202020204" pitchFamily="34" charset="0"/>
-              </a:rPr>
-              <a:t>đầu</a:t>
-            </a:r>
-            <a:r>
-              <a:rPr lang="en-US" sz="1400" dirty="0">
-                <a:latin typeface="Aptos" panose="020B0004020202020204" pitchFamily="34" charset="0"/>
-              </a:rPr>
-              <a:t> </a:t>
-            </a:r>
-            <a:r>
-              <a:rPr lang="en-US" sz="1400" dirty="0" err="1">
-                <a:latin typeface="Aptos" panose="020B0004020202020204" pitchFamily="34" charset="0"/>
-              </a:rPr>
-              <a:t>tiên</a:t>
-            </a:r>
-            <a:r>
-              <a:rPr lang="en-US" sz="1400" dirty="0">
-                <a:latin typeface="Aptos" panose="020B0004020202020204" pitchFamily="34" charset="0"/>
-              </a:rPr>
-              <a:t> </a:t>
-            </a:r>
-            <a:r>
-              <a:rPr lang="en-US" sz="1400" dirty="0" err="1">
-                <a:latin typeface="Aptos" panose="020B0004020202020204" pitchFamily="34" charset="0"/>
-              </a:rPr>
-              <a:t>là</a:t>
-            </a:r>
-            <a:r>
-              <a:rPr lang="en-US" sz="1400" dirty="0">
-                <a:latin typeface="Aptos" panose="020B0004020202020204" pitchFamily="34" charset="0"/>
-              </a:rPr>
-              <a:t> 1 bit w/r(1/0) </a:t>
-            </a:r>
-            <a:r>
-              <a:rPr lang="en-US" sz="1400" dirty="0" err="1">
-                <a:latin typeface="Aptos" panose="020B0004020202020204" pitchFamily="34" charset="0"/>
-              </a:rPr>
-              <a:t>và</a:t>
-            </a:r>
-            <a:r>
-              <a:rPr lang="en-US" sz="1400" dirty="0">
-                <a:latin typeface="Aptos" panose="020B0004020202020204" pitchFamily="34" charset="0"/>
-              </a:rPr>
-              <a:t> 7 bit </a:t>
-            </a:r>
-            <a:r>
-              <a:rPr lang="en-US" sz="1400" dirty="0" err="1">
-                <a:latin typeface="Aptos" panose="020B0004020202020204" pitchFamily="34" charset="0"/>
-              </a:rPr>
-              <a:t>địa</a:t>
-            </a:r>
-            <a:r>
-              <a:rPr lang="en-US" sz="1400" dirty="0">
-                <a:latin typeface="Aptos" panose="020B0004020202020204" pitchFamily="34" charset="0"/>
-              </a:rPr>
-              <a:t> </a:t>
-            </a:r>
-            <a:r>
-              <a:rPr lang="en-US" sz="1400" dirty="0" err="1">
-                <a:latin typeface="Aptos" panose="020B0004020202020204" pitchFamily="34" charset="0"/>
-              </a:rPr>
-              <a:t>chỉ</a:t>
-            </a:r>
-            <a:r>
-              <a:rPr lang="en-US" sz="1400" dirty="0">
-                <a:latin typeface="Aptos" panose="020B0004020202020204" pitchFamily="34" charset="0"/>
-              </a:rPr>
-              <a:t> </a:t>
-            </a:r>
-            <a:r>
-              <a:rPr lang="en-US" sz="1400" dirty="0" err="1">
-                <a:latin typeface="Aptos" panose="020B0004020202020204" pitchFamily="34" charset="0"/>
-              </a:rPr>
-              <a:t>thanh</a:t>
-            </a:r>
-            <a:r>
-              <a:rPr lang="en-US" sz="1400" dirty="0">
-                <a:latin typeface="Aptos" panose="020B0004020202020204" pitchFamily="34" charset="0"/>
-              </a:rPr>
-              <a:t> </a:t>
-            </a:r>
-            <a:r>
-              <a:rPr lang="en-US" sz="1400" dirty="0" err="1">
-                <a:latin typeface="Aptos" panose="020B0004020202020204" pitchFamily="34" charset="0"/>
-              </a:rPr>
-              <a:t>ghi</a:t>
-            </a:r>
-            <a:endParaRPr lang="en-US" sz="1400" dirty="0">
-              <a:latin typeface="Aptos" panose="020B0004020202020204" pitchFamily="34" charset="0"/>
-            </a:endParaRPr>
-          </a:p>
-          <a:p>
-            <a:pPr marL="800100" lvl="1" indent="-342900">
-              <a:buFont typeface="+mj-lt"/>
-              <a:buAutoNum type="arabicParenR"/>
-            </a:pPr>
-            <a:r>
-              <a:rPr lang="en-US" sz="1400" dirty="0" err="1">
-                <a:latin typeface="Aptos" panose="020B0004020202020204" pitchFamily="34" charset="0"/>
-              </a:rPr>
-              <a:t>Các</a:t>
-            </a:r>
-            <a:r>
-              <a:rPr lang="en-US" sz="1400" dirty="0">
-                <a:latin typeface="Aptos" panose="020B0004020202020204" pitchFamily="34" charset="0"/>
-              </a:rPr>
-              <a:t> byte </a:t>
-            </a:r>
-            <a:r>
-              <a:rPr lang="en-US" sz="1400" dirty="0" err="1">
-                <a:latin typeface="Aptos" panose="020B0004020202020204" pitchFamily="34" charset="0"/>
-              </a:rPr>
-              <a:t>tiếp</a:t>
-            </a:r>
-            <a:r>
-              <a:rPr lang="en-US" sz="1400" dirty="0">
-                <a:latin typeface="Aptos" panose="020B0004020202020204" pitchFamily="34" charset="0"/>
-              </a:rPr>
-              <a:t> </a:t>
-            </a:r>
-            <a:r>
-              <a:rPr lang="en-US" sz="1400" dirty="0" err="1">
-                <a:latin typeface="Aptos" panose="020B0004020202020204" pitchFamily="34" charset="0"/>
-              </a:rPr>
-              <a:t>theo</a:t>
-            </a:r>
-            <a:r>
-              <a:rPr lang="en-US" sz="1400" dirty="0">
-                <a:latin typeface="Aptos" panose="020B0004020202020204" pitchFamily="34" charset="0"/>
-              </a:rPr>
-              <a:t> </a:t>
-            </a:r>
-            <a:r>
-              <a:rPr lang="en-US" sz="1400" dirty="0" err="1">
-                <a:latin typeface="Aptos" panose="020B0004020202020204" pitchFamily="34" charset="0"/>
-              </a:rPr>
-              <a:t>là</a:t>
-            </a:r>
-            <a:r>
-              <a:rPr lang="en-US" sz="1400" dirty="0">
-                <a:latin typeface="Aptos" panose="020B0004020202020204" pitchFamily="34" charset="0"/>
-              </a:rPr>
-              <a:t> byte </a:t>
-            </a:r>
-            <a:r>
-              <a:rPr lang="en-US" sz="1400" dirty="0" err="1">
-                <a:latin typeface="Aptos" panose="020B0004020202020204" pitchFamily="34" charset="0"/>
-              </a:rPr>
-              <a:t>dữ</a:t>
-            </a:r>
-            <a:r>
-              <a:rPr lang="en-US" sz="1400" dirty="0">
-                <a:latin typeface="Aptos" panose="020B0004020202020204" pitchFamily="34" charset="0"/>
-              </a:rPr>
-              <a:t> </a:t>
-            </a:r>
-            <a:r>
-              <a:rPr lang="en-US" sz="1400" dirty="0" err="1">
-                <a:latin typeface="Aptos" panose="020B0004020202020204" pitchFamily="34" charset="0"/>
-              </a:rPr>
-              <a:t>liệu</a:t>
-            </a:r>
-            <a:r>
-              <a:rPr lang="en-US" sz="1400" dirty="0">
-                <a:latin typeface="Aptos" panose="020B0004020202020204" pitchFamily="34" charset="0"/>
-              </a:rPr>
-              <a:t>, </a:t>
-            </a:r>
-            <a:r>
-              <a:rPr lang="en-US" sz="1400" dirty="0" err="1">
-                <a:latin typeface="Aptos" panose="020B0004020202020204" pitchFamily="34" charset="0"/>
-              </a:rPr>
-              <a:t>kể</a:t>
-            </a:r>
-            <a:r>
-              <a:rPr lang="en-US" sz="1400" dirty="0">
-                <a:latin typeface="Aptos" panose="020B0004020202020204" pitchFamily="34" charset="0"/>
-              </a:rPr>
-              <a:t> </a:t>
-            </a:r>
-            <a:r>
-              <a:rPr lang="en-US" sz="1400" dirty="0" err="1">
-                <a:latin typeface="Aptos" panose="020B0004020202020204" pitchFamily="34" charset="0"/>
-              </a:rPr>
-              <a:t>cả</a:t>
-            </a:r>
-            <a:r>
-              <a:rPr lang="en-US" sz="1400" dirty="0">
-                <a:latin typeface="Aptos" panose="020B0004020202020204" pitchFamily="34" charset="0"/>
-              </a:rPr>
-              <a:t> </a:t>
-            </a:r>
-            <a:r>
-              <a:rPr lang="en-US" sz="1400" dirty="0" err="1">
-                <a:latin typeface="Aptos" panose="020B0004020202020204" pitchFamily="34" charset="0"/>
-              </a:rPr>
-              <a:t>là</a:t>
-            </a:r>
-            <a:r>
-              <a:rPr lang="en-US" sz="1400" dirty="0">
-                <a:latin typeface="Aptos" panose="020B0004020202020204" pitchFamily="34" charset="0"/>
-              </a:rPr>
-              <a:t> </a:t>
-            </a:r>
-            <a:r>
-              <a:rPr lang="en-US" sz="1400" dirty="0" err="1">
-                <a:latin typeface="Aptos" panose="020B0004020202020204" pitchFamily="34" charset="0"/>
-              </a:rPr>
-              <a:t>dữ</a:t>
-            </a:r>
-            <a:r>
-              <a:rPr lang="en-US" sz="1400" dirty="0">
-                <a:latin typeface="Aptos" panose="020B0004020202020204" pitchFamily="34" charset="0"/>
-              </a:rPr>
-              <a:t> </a:t>
-            </a:r>
-            <a:r>
-              <a:rPr lang="en-US" sz="1400" dirty="0" err="1">
-                <a:latin typeface="Aptos" panose="020B0004020202020204" pitchFamily="34" charset="0"/>
-              </a:rPr>
-              <a:t>liệu</a:t>
-            </a:r>
-            <a:r>
-              <a:rPr lang="en-US" sz="1400" dirty="0">
-                <a:latin typeface="Aptos" panose="020B0004020202020204" pitchFamily="34" charset="0"/>
-              </a:rPr>
-              <a:t> MOSI (</a:t>
-            </a:r>
-            <a:r>
-              <a:rPr lang="en-US" sz="1400" dirty="0" err="1">
-                <a:latin typeface="Aptos" panose="020B0004020202020204" pitchFamily="34" charset="0"/>
-              </a:rPr>
-              <a:t>ghi</a:t>
-            </a:r>
-            <a:r>
-              <a:rPr lang="en-US" sz="1400" dirty="0">
-                <a:latin typeface="Aptos" panose="020B0004020202020204" pitchFamily="34" charset="0"/>
-              </a:rPr>
-              <a:t>) hay MISO (</a:t>
-            </a:r>
-            <a:r>
-              <a:rPr lang="en-US" sz="1400" dirty="0" err="1">
-                <a:latin typeface="Aptos" panose="020B0004020202020204" pitchFamily="34" charset="0"/>
-              </a:rPr>
-              <a:t>đọc</a:t>
-            </a:r>
-            <a:r>
-              <a:rPr lang="en-US" sz="1400" dirty="0">
-                <a:latin typeface="Aptos" panose="020B0004020202020204" pitchFamily="34" charset="0"/>
-              </a:rPr>
-              <a:t>)</a:t>
-            </a:r>
-          </a:p>
-          <a:p>
-            <a:pPr marL="800100" lvl="1" indent="-342900">
-              <a:buFont typeface="+mj-lt"/>
-              <a:buAutoNum type="arabicParenR"/>
-            </a:pPr>
-            <a:r>
-              <a:rPr lang="en-US" sz="1400" dirty="0">
-                <a:latin typeface="Aptos" panose="020B0004020202020204" pitchFamily="34" charset="0"/>
-              </a:rPr>
-              <a:t>NSS </a:t>
-            </a:r>
-            <a:r>
-              <a:rPr lang="en-US" sz="1400" dirty="0" err="1">
-                <a:latin typeface="Aptos" panose="020B0004020202020204" pitchFamily="34" charset="0"/>
-              </a:rPr>
-              <a:t>lên</a:t>
-            </a:r>
-            <a:r>
-              <a:rPr lang="en-US" sz="1400" dirty="0">
-                <a:latin typeface="Aptos" panose="020B0004020202020204" pitchFamily="34" charset="0"/>
-              </a:rPr>
-              <a:t> </a:t>
-            </a:r>
-            <a:r>
-              <a:rPr lang="en-US" sz="1400" dirty="0" err="1">
-                <a:latin typeface="Aptos" panose="020B0004020202020204" pitchFamily="34" charset="0"/>
-              </a:rPr>
-              <a:t>cao</a:t>
-            </a:r>
-            <a:r>
-              <a:rPr lang="en-US" sz="1400" dirty="0">
-                <a:latin typeface="Aptos" panose="020B0004020202020204" pitchFamily="34" charset="0"/>
-              </a:rPr>
-              <a:t> </a:t>
-            </a:r>
-            <a:r>
-              <a:rPr lang="en-US" sz="1400" dirty="0" err="1">
-                <a:latin typeface="Aptos" panose="020B0004020202020204" pitchFamily="34" charset="0"/>
-              </a:rPr>
-              <a:t>khi</a:t>
-            </a:r>
-            <a:r>
-              <a:rPr lang="en-US" sz="1400" dirty="0">
-                <a:latin typeface="Aptos" panose="020B0004020202020204" pitchFamily="34" charset="0"/>
-              </a:rPr>
-              <a:t> </a:t>
-            </a:r>
-            <a:r>
-              <a:rPr lang="en-US" sz="1400" dirty="0" err="1">
-                <a:latin typeface="Aptos" panose="020B0004020202020204" pitchFamily="34" charset="0"/>
-              </a:rPr>
-              <a:t>kết</a:t>
-            </a:r>
-            <a:r>
-              <a:rPr lang="en-US" sz="1400" dirty="0">
-                <a:latin typeface="Aptos" panose="020B0004020202020204" pitchFamily="34" charset="0"/>
-              </a:rPr>
-              <a:t> </a:t>
-            </a:r>
-            <a:r>
-              <a:rPr lang="en-US" sz="1400" dirty="0" err="1">
-                <a:latin typeface="Aptos" panose="020B0004020202020204" pitchFamily="34" charset="0"/>
-              </a:rPr>
-              <a:t>thúc</a:t>
-            </a:r>
-            <a:r>
-              <a:rPr lang="en-US" sz="1400" dirty="0">
-                <a:latin typeface="Aptos" panose="020B0004020202020204" pitchFamily="34" charset="0"/>
-              </a:rPr>
-              <a:t> </a:t>
-            </a:r>
-            <a:r>
-              <a:rPr lang="en-US" sz="1400" dirty="0" err="1">
-                <a:latin typeface="Aptos" panose="020B0004020202020204" pitchFamily="34" charset="0"/>
-              </a:rPr>
-              <a:t>quá</a:t>
-            </a:r>
-            <a:r>
-              <a:rPr lang="en-US" sz="1400" dirty="0">
-                <a:latin typeface="Aptos" panose="020B0004020202020204" pitchFamily="34" charset="0"/>
-              </a:rPr>
-              <a:t> </a:t>
-            </a:r>
-            <a:r>
-              <a:rPr lang="en-US" sz="1400" dirty="0" err="1">
-                <a:latin typeface="Aptos" panose="020B0004020202020204" pitchFamily="34" charset="0"/>
-              </a:rPr>
-              <a:t>trình</a:t>
-            </a:r>
-            <a:r>
-              <a:rPr lang="en-US" sz="1400" dirty="0">
-                <a:latin typeface="Aptos" panose="020B0004020202020204" pitchFamily="34" charset="0"/>
-              </a:rPr>
-              <a:t> </a:t>
-            </a:r>
-            <a:r>
-              <a:rPr lang="en-US" sz="1400" dirty="0" err="1">
-                <a:latin typeface="Aptos" panose="020B0004020202020204" pitchFamily="34" charset="0"/>
-              </a:rPr>
-              <a:t>đọc</a:t>
-            </a:r>
-            <a:r>
-              <a:rPr lang="en-US" sz="1400" dirty="0">
-                <a:latin typeface="Aptos" panose="020B0004020202020204" pitchFamily="34" charset="0"/>
-              </a:rPr>
-              <a:t>/</a:t>
-            </a:r>
-            <a:r>
-              <a:rPr lang="en-US" sz="1400" dirty="0" err="1">
-                <a:latin typeface="Aptos" panose="020B0004020202020204" pitchFamily="34" charset="0"/>
-              </a:rPr>
-              <a:t>ghi</a:t>
-            </a:r>
-            <a:endParaRPr lang="en-US" sz="1400" dirty="0">
-              <a:latin typeface="Aptos" panose="020B0004020202020204" pitchFamily="34" charset="0"/>
-            </a:endParaRPr>
-          </a:p>
-          <a:p>
-            <a:pPr marL="285750" indent="-285750">
-              <a:buFont typeface="Wingdings" panose="05000000000000000000" pitchFamily="2" charset="2"/>
-              <a:buChar char="q"/>
-            </a:pPr>
-            <a:r>
-              <a:rPr lang="en-US" sz="1400" dirty="0">
-                <a:latin typeface="Aptos" panose="020B0004020202020204" pitchFamily="34" charset="0"/>
-              </a:rPr>
-              <a:t>Burst: </a:t>
-            </a:r>
-            <a:r>
-              <a:rPr lang="en-US" sz="1400" dirty="0" err="1">
-                <a:latin typeface="Aptos" panose="020B0004020202020204" pitchFamily="34" charset="0"/>
-              </a:rPr>
-              <a:t>ghi</a:t>
-            </a:r>
-            <a:r>
-              <a:rPr lang="en-US" sz="1400" dirty="0">
-                <a:latin typeface="Aptos" panose="020B0004020202020204" pitchFamily="34" charset="0"/>
-              </a:rPr>
-              <a:t>/ </a:t>
-            </a:r>
-            <a:r>
-              <a:rPr lang="en-US" sz="1400" dirty="0" err="1">
-                <a:latin typeface="Aptos" panose="020B0004020202020204" pitchFamily="34" charset="0"/>
-              </a:rPr>
-              <a:t>đọc</a:t>
-            </a:r>
-            <a:r>
-              <a:rPr lang="en-US" sz="1400" dirty="0">
-                <a:latin typeface="Aptos" panose="020B0004020202020204" pitchFamily="34" charset="0"/>
-              </a:rPr>
-              <a:t> 1 </a:t>
-            </a:r>
-            <a:r>
-              <a:rPr lang="en-US" sz="1400" dirty="0" err="1">
-                <a:latin typeface="Aptos" panose="020B0004020202020204" pitchFamily="34" charset="0"/>
-              </a:rPr>
-              <a:t>loạt</a:t>
-            </a:r>
-            <a:r>
-              <a:rPr lang="en-US" sz="1400" dirty="0">
-                <a:latin typeface="Aptos" panose="020B0004020202020204" pitchFamily="34" charset="0"/>
-              </a:rPr>
-              <a:t> </a:t>
-            </a:r>
-            <a:r>
-              <a:rPr lang="en-US" sz="1400" dirty="0" err="1">
-                <a:latin typeface="Aptos" panose="020B0004020202020204" pitchFamily="34" charset="0"/>
-              </a:rPr>
-              <a:t>thanh</a:t>
-            </a:r>
-            <a:r>
-              <a:rPr lang="en-US" sz="1400" dirty="0">
-                <a:latin typeface="Aptos" panose="020B0004020202020204" pitchFamily="34" charset="0"/>
-              </a:rPr>
-              <a:t> </a:t>
-            </a:r>
-            <a:r>
-              <a:rPr lang="en-US" sz="1400" dirty="0" err="1">
-                <a:latin typeface="Aptos" panose="020B0004020202020204" pitchFamily="34" charset="0"/>
-              </a:rPr>
-              <a:t>ghi</a:t>
-            </a:r>
-            <a:r>
-              <a:rPr lang="en-US" sz="1400" dirty="0">
-                <a:latin typeface="Aptos" panose="020B0004020202020204" pitchFamily="34" charset="0"/>
-              </a:rPr>
-              <a:t> </a:t>
-            </a:r>
-            <a:r>
-              <a:rPr lang="en-US" sz="1400" dirty="0" err="1">
-                <a:latin typeface="Aptos" panose="020B0004020202020204" pitchFamily="34" charset="0"/>
-              </a:rPr>
-              <a:t>với</a:t>
-            </a:r>
-            <a:r>
-              <a:rPr lang="en-US" sz="1400" dirty="0">
-                <a:latin typeface="Aptos" panose="020B0004020202020204" pitchFamily="34" charset="0"/>
-              </a:rPr>
-              <a:t> </a:t>
-            </a:r>
-            <a:r>
-              <a:rPr lang="en-US" sz="1400" dirty="0" err="1">
-                <a:latin typeface="Aptos" panose="020B0004020202020204" pitchFamily="34" charset="0"/>
-              </a:rPr>
-              <a:t>địa</a:t>
-            </a:r>
-            <a:r>
-              <a:rPr lang="en-US" sz="1400" dirty="0">
-                <a:latin typeface="Aptos" panose="020B0004020202020204" pitchFamily="34" charset="0"/>
-              </a:rPr>
-              <a:t> </a:t>
-            </a:r>
-            <a:r>
-              <a:rPr lang="en-US" sz="1400" dirty="0" err="1">
-                <a:latin typeface="Aptos" panose="020B0004020202020204" pitchFamily="34" charset="0"/>
-              </a:rPr>
-              <a:t>chỉ</a:t>
-            </a:r>
-            <a:r>
-              <a:rPr lang="en-US" sz="1400" dirty="0">
-                <a:latin typeface="Aptos" panose="020B0004020202020204" pitchFamily="34" charset="0"/>
-              </a:rPr>
-              <a:t> </a:t>
-            </a:r>
-            <a:r>
-              <a:rPr lang="en-US" sz="1400" dirty="0" err="1">
-                <a:latin typeface="Aptos" panose="020B0004020202020204" pitchFamily="34" charset="0"/>
-              </a:rPr>
-              <a:t>tự</a:t>
-            </a:r>
-            <a:r>
-              <a:rPr lang="en-US" sz="1400" dirty="0">
-                <a:latin typeface="Aptos" panose="020B0004020202020204" pitchFamily="34" charset="0"/>
-              </a:rPr>
-              <a:t> </a:t>
-            </a:r>
-            <a:r>
-              <a:rPr lang="en-US" sz="1400" dirty="0" err="1">
-                <a:latin typeface="Aptos" panose="020B0004020202020204" pitchFamily="34" charset="0"/>
-              </a:rPr>
-              <a:t>động</a:t>
-            </a:r>
-            <a:r>
-              <a:rPr lang="en-US" sz="1400" dirty="0">
-                <a:latin typeface="Aptos" panose="020B0004020202020204" pitchFamily="34" charset="0"/>
-              </a:rPr>
-              <a:t> </a:t>
-            </a:r>
-            <a:r>
-              <a:rPr lang="en-US" sz="1400" dirty="0" err="1">
-                <a:latin typeface="Aptos" panose="020B0004020202020204" pitchFamily="34" charset="0"/>
-              </a:rPr>
-              <a:t>tăng</a:t>
-            </a:r>
-            <a:r>
-              <a:rPr lang="en-US" sz="1400" dirty="0">
-                <a:latin typeface="Aptos" panose="020B0004020202020204" pitchFamily="34" charset="0"/>
-              </a:rPr>
-              <a:t>, </a:t>
-            </a:r>
-            <a:r>
-              <a:rPr lang="en-US" sz="1400" dirty="0" err="1">
-                <a:latin typeface="Aptos" panose="020B0004020202020204" pitchFamily="34" charset="0"/>
-              </a:rPr>
-              <a:t>địa</a:t>
-            </a:r>
-            <a:r>
-              <a:rPr lang="en-US" sz="1400" dirty="0">
-                <a:latin typeface="Aptos" panose="020B0004020202020204" pitchFamily="34" charset="0"/>
-              </a:rPr>
-              <a:t> </a:t>
-            </a:r>
-            <a:r>
-              <a:rPr lang="en-US" sz="1400" dirty="0" err="1">
-                <a:latin typeface="Aptos" panose="020B0004020202020204" pitchFamily="34" charset="0"/>
-              </a:rPr>
-              <a:t>chỉ</a:t>
-            </a:r>
-            <a:r>
-              <a:rPr lang="en-US" sz="1400" dirty="0">
-                <a:latin typeface="Aptos" panose="020B0004020202020204" pitchFamily="34" charset="0"/>
-              </a:rPr>
-              <a:t> </a:t>
-            </a:r>
-            <a:r>
-              <a:rPr lang="en-US" sz="1400" dirty="0" err="1">
-                <a:latin typeface="Aptos" panose="020B0004020202020204" pitchFamily="34" charset="0"/>
-              </a:rPr>
-              <a:t>thanh</a:t>
-            </a:r>
-            <a:r>
-              <a:rPr lang="en-US" sz="1400" dirty="0">
-                <a:latin typeface="Aptos" panose="020B0004020202020204" pitchFamily="34" charset="0"/>
-              </a:rPr>
-              <a:t> </a:t>
-            </a:r>
-            <a:r>
-              <a:rPr lang="en-US" sz="1400" dirty="0" err="1">
-                <a:latin typeface="Aptos" panose="020B0004020202020204" pitchFamily="34" charset="0"/>
-              </a:rPr>
-              <a:t>ghi</a:t>
-            </a:r>
-            <a:r>
-              <a:rPr lang="en-US" sz="1400" dirty="0">
-                <a:latin typeface="Aptos" panose="020B0004020202020204" pitchFamily="34" charset="0"/>
-              </a:rPr>
-              <a:t> </a:t>
-            </a:r>
-            <a:r>
-              <a:rPr lang="en-US" sz="1400" dirty="0" err="1">
-                <a:latin typeface="Aptos" panose="020B0004020202020204" pitchFamily="34" charset="0"/>
-              </a:rPr>
-              <a:t>khác</a:t>
-            </a:r>
-            <a:r>
-              <a:rPr lang="en-US" sz="1400" dirty="0">
-                <a:latin typeface="Aptos" panose="020B0004020202020204" pitchFamily="34" charset="0"/>
-              </a:rPr>
-              <a:t> </a:t>
-            </a:r>
-            <a:r>
-              <a:rPr lang="en-US" sz="1400" dirty="0" err="1">
+              <a:rPr lang="en-US" dirty="0">
+                <a:latin typeface="Aptos" panose="020B0004020202020204" pitchFamily="34" charset="0"/>
+              </a:rPr>
+              <a:t> </a:t>
+            </a:r>
+            <a:r>
+              <a:rPr lang="en-US" dirty="0" err="1">
                 <a:latin typeface="Aptos" panose="020B0004020202020204" pitchFamily="34" charset="0"/>
               </a:rPr>
               <a:t>RegFiFo</a:t>
             </a:r>
-            <a:endParaRPr lang="en-US" sz="1400" dirty="0">
-              <a:latin typeface="Aptos" panose="020B0004020202020204" pitchFamily="34" charset="0"/>
-            </a:endParaRPr>
-          </a:p>
-          <a:p>
-            <a:pPr marL="285750" indent="-285750">
-              <a:buFont typeface="Wingdings" panose="05000000000000000000" pitchFamily="2" charset="2"/>
-              <a:buChar char="q"/>
-            </a:pPr>
-            <a:r>
-              <a:rPr lang="en-US" sz="1400" dirty="0" err="1">
-                <a:latin typeface="Aptos" panose="020B0004020202020204" pitchFamily="34" charset="0"/>
-              </a:rPr>
-              <a:t>Chế</a:t>
-            </a:r>
-            <a:r>
-              <a:rPr lang="en-US" sz="1400" dirty="0">
-                <a:latin typeface="Aptos" panose="020B0004020202020204" pitchFamily="34" charset="0"/>
-              </a:rPr>
-              <a:t> </a:t>
-            </a:r>
-            <a:r>
-              <a:rPr lang="en-US" sz="1400" dirty="0" err="1">
-                <a:latin typeface="Aptos" panose="020B0004020202020204" pitchFamily="34" charset="0"/>
-              </a:rPr>
-              <a:t>độ</a:t>
-            </a:r>
-            <a:r>
-              <a:rPr lang="en-US" sz="1400" dirty="0">
-                <a:latin typeface="Aptos" panose="020B0004020202020204" pitchFamily="34" charset="0"/>
-              </a:rPr>
-              <a:t> FIFO </a:t>
-            </a:r>
-            <a:r>
-              <a:rPr lang="en-US" sz="1400" dirty="0" err="1">
-                <a:latin typeface="Aptos" panose="020B0004020202020204" pitchFamily="34" charset="0"/>
-              </a:rPr>
-              <a:t>truy</a:t>
-            </a:r>
-            <a:r>
-              <a:rPr lang="en-US" sz="1400" dirty="0">
-                <a:latin typeface="Aptos" panose="020B0004020202020204" pitchFamily="34" charset="0"/>
-              </a:rPr>
-              <a:t> </a:t>
-            </a:r>
-            <a:r>
-              <a:rPr lang="en-US" sz="1400" dirty="0" err="1">
-                <a:latin typeface="Aptos" panose="020B0004020202020204" pitchFamily="34" charset="0"/>
-              </a:rPr>
-              <a:t>cập</a:t>
-            </a:r>
-            <a:r>
-              <a:rPr lang="en-US" sz="1400" dirty="0">
-                <a:latin typeface="Aptos" panose="020B0004020202020204" pitchFamily="34" charset="0"/>
-              </a:rPr>
-              <a:t> </a:t>
-            </a:r>
-            <a:r>
-              <a:rPr lang="en-US" sz="1400" dirty="0" err="1">
-                <a:latin typeface="Aptos" panose="020B0004020202020204" pitchFamily="34" charset="0"/>
-              </a:rPr>
-              <a:t>tới</a:t>
-            </a:r>
-            <a:r>
-              <a:rPr lang="en-US" sz="1400" dirty="0">
-                <a:latin typeface="Aptos" panose="020B0004020202020204" pitchFamily="34" charset="0"/>
-              </a:rPr>
-              <a:t> </a:t>
-            </a:r>
-            <a:r>
-              <a:rPr lang="en-US" sz="1400" dirty="0" err="1">
-                <a:latin typeface="Aptos" panose="020B0004020202020204" pitchFamily="34" charset="0"/>
-              </a:rPr>
-              <a:t>vùng</a:t>
-            </a:r>
-            <a:r>
-              <a:rPr lang="en-US" sz="1400" dirty="0">
-                <a:latin typeface="Aptos" panose="020B0004020202020204" pitchFamily="34" charset="0"/>
-              </a:rPr>
-              <a:t> </a:t>
-            </a:r>
-            <a:r>
-              <a:rPr lang="en-US" sz="1400" dirty="0" err="1">
-                <a:latin typeface="Aptos" panose="020B0004020202020204" pitchFamily="34" charset="0"/>
-              </a:rPr>
-              <a:t>databuffer</a:t>
-            </a:r>
-            <a:r>
-              <a:rPr lang="en-US" sz="1400" dirty="0">
-                <a:latin typeface="Aptos" panose="020B0004020202020204" pitchFamily="34" charset="0"/>
-              </a:rPr>
-              <a:t> </a:t>
-            </a:r>
-            <a:r>
-              <a:rPr lang="en-US" sz="1400" dirty="0" err="1">
-                <a:latin typeface="Aptos" panose="020B0004020202020204" pitchFamily="34" charset="0"/>
-              </a:rPr>
-              <a:t>với</a:t>
-            </a:r>
-            <a:r>
-              <a:rPr lang="en-US" sz="1400" dirty="0">
-                <a:latin typeface="Aptos" panose="020B0004020202020204" pitchFamily="34" charset="0"/>
-              </a:rPr>
-              <a:t> </a:t>
-            </a:r>
-            <a:r>
-              <a:rPr lang="en-US" sz="1400" dirty="0" err="1">
-                <a:latin typeface="Aptos" panose="020B0004020202020204" pitchFamily="34" charset="0"/>
-              </a:rPr>
-              <a:t>địa</a:t>
-            </a:r>
-            <a:r>
-              <a:rPr lang="en-US" sz="1400" dirty="0">
-                <a:latin typeface="Aptos" panose="020B0004020202020204" pitchFamily="34" charset="0"/>
-              </a:rPr>
-              <a:t> </a:t>
-            </a:r>
-            <a:r>
-              <a:rPr lang="en-US" sz="1400" dirty="0" err="1">
-                <a:latin typeface="Aptos" panose="020B0004020202020204" pitchFamily="34" charset="0"/>
-              </a:rPr>
-              <a:t>chỉ</a:t>
-            </a:r>
-            <a:r>
-              <a:rPr lang="en-US" sz="1400" dirty="0">
-                <a:latin typeface="Aptos" panose="020B0004020202020204" pitchFamily="34" charset="0"/>
-              </a:rPr>
-              <a:t> </a:t>
-            </a:r>
-            <a:r>
-              <a:rPr lang="en-US" sz="1400" dirty="0" err="1">
-                <a:latin typeface="Aptos" panose="020B0004020202020204" pitchFamily="34" charset="0"/>
-              </a:rPr>
-              <a:t>thanh</a:t>
-            </a:r>
-            <a:r>
-              <a:rPr lang="en-US" sz="1400" dirty="0">
-                <a:latin typeface="Aptos" panose="020B0004020202020204" pitchFamily="34" charset="0"/>
-              </a:rPr>
-              <a:t> </a:t>
-            </a:r>
-            <a:r>
-              <a:rPr lang="en-US" sz="1400" dirty="0" err="1">
-                <a:latin typeface="Aptos" panose="020B0004020202020204" pitchFamily="34" charset="0"/>
-              </a:rPr>
-              <a:t>ghi</a:t>
-            </a:r>
-            <a:r>
-              <a:rPr lang="en-US" sz="1400" dirty="0">
-                <a:latin typeface="Aptos" panose="020B0004020202020204" pitchFamily="34" charset="0"/>
-              </a:rPr>
-              <a:t> </a:t>
-            </a:r>
-            <a:r>
-              <a:rPr lang="en-US" sz="1400" dirty="0" err="1">
-                <a:latin typeface="Aptos" panose="020B0004020202020204" pitchFamily="34" charset="0"/>
-              </a:rPr>
-              <a:t>là</a:t>
-            </a:r>
-            <a:r>
-              <a:rPr lang="en-US" sz="1400" dirty="0">
-                <a:latin typeface="Aptos" panose="020B0004020202020204" pitchFamily="34" charset="0"/>
-              </a:rPr>
-              <a:t> </a:t>
-            </a:r>
-            <a:r>
-              <a:rPr lang="en-US" sz="1400" dirty="0" err="1">
-                <a:latin typeface="Aptos" panose="020B0004020202020204" pitchFamily="34" charset="0"/>
-              </a:rPr>
-              <a:t>RegFiFo</a:t>
-            </a:r>
-            <a:endParaRPr lang="en-US" sz="1400" dirty="0">
+            <a:endParaRPr lang="en-US" dirty="0">
               <a:latin typeface="Aptos" panose="020B0004020202020204" pitchFamily="34" charset="0"/>
             </a:endParaRPr>
           </a:p>
@@ -7438,8 +7416,8 @@
         </p:blipFill>
         <p:spPr>
           <a:xfrm>
-            <a:off x="1312298" y="1322140"/>
-            <a:ext cx="6263745" cy="1672519"/>
+            <a:off x="2087418" y="1349850"/>
+            <a:ext cx="5285425" cy="1411292"/>
           </a:xfrm>
           <a:prstGeom prst="rect">
             <a:avLst/>
@@ -32479,7 +32457,7 @@
         <p:spPr>
           <a:xfrm>
             <a:off x="528506" y="1073791"/>
-            <a:ext cx="8396277" cy="4524315"/>
+            <a:ext cx="8396277" cy="4247317"/>
           </a:xfrm>
           <a:prstGeom prst="rect">
             <a:avLst/>
@@ -32497,127 +32475,193 @@
               <a:buChar char="q"/>
             </a:pPr>
             <a:r>
-              <a:rPr lang="en-US" dirty="0" err="1"/>
+              <a:rPr lang="en-US" dirty="0" err="1">
+                <a:latin typeface="Aptos" panose="020B0004020202020204" pitchFamily="34" charset="0"/>
+              </a:rPr>
               <a:t>Với</a:t>
             </a:r>
             <a:r>
-              <a:rPr lang="en-US" dirty="0"/>
-              <a:t> </a:t>
-            </a:r>
-            <a:r>
-              <a:rPr lang="en-US" dirty="0" err="1"/>
+              <a:rPr lang="en-US" dirty="0">
+                <a:latin typeface="Aptos" panose="020B0004020202020204" pitchFamily="34" charset="0"/>
+              </a:rPr>
+              <a:t> </a:t>
+            </a:r>
+            <a:r>
+              <a:rPr lang="en-US" dirty="0" err="1">
+                <a:latin typeface="Aptos" panose="020B0004020202020204" pitchFamily="34" charset="0"/>
+              </a:rPr>
               <a:t>sự</a:t>
             </a:r>
             <a:r>
-              <a:rPr lang="en-US" dirty="0"/>
-              <a:t> </a:t>
-            </a:r>
-            <a:r>
-              <a:rPr lang="en-US" dirty="0" err="1"/>
+              <a:rPr lang="en-US" dirty="0">
+                <a:latin typeface="Aptos" panose="020B0004020202020204" pitchFamily="34" charset="0"/>
+              </a:rPr>
+              <a:t> </a:t>
+            </a:r>
+            <a:r>
+              <a:rPr lang="en-US" dirty="0" err="1">
+                <a:latin typeface="Aptos" panose="020B0004020202020204" pitchFamily="34" charset="0"/>
+              </a:rPr>
               <a:t>phát</a:t>
             </a:r>
             <a:r>
-              <a:rPr lang="en-US" dirty="0"/>
-              <a:t> </a:t>
-            </a:r>
-            <a:r>
-              <a:rPr lang="en-US" dirty="0" err="1"/>
+              <a:rPr lang="en-US" dirty="0">
+                <a:latin typeface="Aptos" panose="020B0004020202020204" pitchFamily="34" charset="0"/>
+              </a:rPr>
+              <a:t> </a:t>
+            </a:r>
+            <a:r>
+              <a:rPr lang="en-US" dirty="0" err="1">
+                <a:latin typeface="Aptos" panose="020B0004020202020204" pitchFamily="34" charset="0"/>
+              </a:rPr>
               <a:t>triển</a:t>
             </a:r>
             <a:r>
-              <a:rPr lang="en-US" dirty="0"/>
-              <a:t> </a:t>
-            </a:r>
-            <a:r>
-              <a:rPr lang="en-US" dirty="0" err="1"/>
+              <a:rPr lang="en-US" dirty="0">
+                <a:latin typeface="Aptos" panose="020B0004020202020204" pitchFamily="34" charset="0"/>
+              </a:rPr>
+              <a:t> </a:t>
+            </a:r>
+            <a:r>
+              <a:rPr lang="en-US" dirty="0" err="1">
+                <a:latin typeface="Aptos" panose="020B0004020202020204" pitchFamily="34" charset="0"/>
+              </a:rPr>
               <a:t>của</a:t>
             </a:r>
             <a:r>
-              <a:rPr lang="en-US" dirty="0"/>
-              <a:t> </a:t>
-            </a:r>
-            <a:r>
-              <a:rPr lang="en-US" dirty="0" err="1"/>
+              <a:rPr lang="en-US" dirty="0">
+                <a:latin typeface="Aptos" panose="020B0004020202020204" pitchFamily="34" charset="0"/>
+              </a:rPr>
+              <a:t> </a:t>
+            </a:r>
+            <a:r>
+              <a:rPr lang="en-US" dirty="0" err="1">
+                <a:latin typeface="Aptos" panose="020B0004020202020204" pitchFamily="34" charset="0"/>
+              </a:rPr>
               <a:t>công</a:t>
             </a:r>
             <a:r>
-              <a:rPr lang="en-US" dirty="0"/>
-              <a:t> </a:t>
-            </a:r>
-            <a:r>
-              <a:rPr lang="en-US" dirty="0" err="1"/>
+              <a:rPr lang="en-US" dirty="0">
+                <a:latin typeface="Aptos" panose="020B0004020202020204" pitchFamily="34" charset="0"/>
+              </a:rPr>
+              <a:t> </a:t>
+            </a:r>
+            <a:r>
+              <a:rPr lang="en-US" dirty="0" err="1">
+                <a:latin typeface="Aptos" panose="020B0004020202020204" pitchFamily="34" charset="0"/>
+              </a:rPr>
               <a:t>nghệ</a:t>
             </a:r>
             <a:r>
-              <a:rPr lang="en-US" dirty="0"/>
-              <a:t> </a:t>
-            </a:r>
-            <a:r>
-              <a:rPr lang="en-US" dirty="0" err="1"/>
+              <a:rPr lang="en-US" dirty="0">
+                <a:latin typeface="Aptos" panose="020B0004020202020204" pitchFamily="34" charset="0"/>
+              </a:rPr>
+              <a:t> </a:t>
+            </a:r>
+            <a:r>
+              <a:rPr lang="en-US" dirty="0" err="1">
+                <a:latin typeface="Aptos" panose="020B0004020202020204" pitchFamily="34" charset="0"/>
+              </a:rPr>
               <a:t>số</a:t>
             </a:r>
             <a:r>
-              <a:rPr lang="en-US" dirty="0"/>
+              <a:rPr lang="en-US" dirty="0">
+                <a:latin typeface="Aptos" panose="020B0004020202020204" pitchFamily="34" charset="0"/>
+              </a:rPr>
               <a:t>, </a:t>
             </a:r>
             <a:r>
-              <a:rPr lang="vi-VN" dirty="0"/>
+              <a:rPr lang="vi-VN" dirty="0">
+                <a:latin typeface="Aptos" panose="020B0004020202020204" pitchFamily="34" charset="0"/>
+              </a:rPr>
               <a:t>ngành nông nghiệp đang dần chuyển đổi theo hướng thông minh, tự động hóa và bền vững. Một số xu hướng nổi bật hiện nay gồm:</a:t>
             </a:r>
-            <a:endParaRPr lang="en-US" dirty="0"/>
+            <a:endParaRPr lang="en-US" dirty="0">
+              <a:latin typeface="Aptos" panose="020B0004020202020204" pitchFamily="34" charset="0"/>
+            </a:endParaRPr>
           </a:p>
           <a:p>
             <a:r>
-              <a:rPr lang="vi-VN" dirty="0"/>
+              <a:rPr lang="vi-VN" dirty="0">
+                <a:latin typeface="Aptos" panose="020B0004020202020204" pitchFamily="34" charset="0"/>
+              </a:rPr>
               <a:t>• Nông nghiệp thông minh (Smart Agriculture) ứng dụng IoT, AI và tự động hóa trong sản xuất.</a:t>
             </a:r>
             <a:br>
-              <a:rPr lang="vi-VN" dirty="0"/>
+              <a:rPr lang="vi-VN" dirty="0">
+                <a:latin typeface="Aptos" panose="020B0004020202020204" pitchFamily="34" charset="0"/>
+              </a:rPr>
             </a:br>
             <a:r>
-              <a:rPr lang="vi-VN" dirty="0"/>
+              <a:rPr lang="vi-VN" dirty="0">
+                <a:latin typeface="Aptos" panose="020B0004020202020204" pitchFamily="34" charset="0"/>
+              </a:rPr>
               <a:t>• Canh tác chính xác (Precision Farming) giúp tối ưu nước, phân bón và năng suất cây trồng.</a:t>
             </a:r>
             <a:br>
-              <a:rPr lang="vi-VN" dirty="0"/>
+              <a:rPr lang="vi-VN" dirty="0">
+                <a:latin typeface="Aptos" panose="020B0004020202020204" pitchFamily="34" charset="0"/>
+              </a:rPr>
             </a:br>
             <a:r>
-              <a:rPr lang="vi-VN" dirty="0"/>
+              <a:rPr lang="vi-VN" dirty="0">
+                <a:latin typeface="Aptos" panose="020B0004020202020204" pitchFamily="34" charset="0"/>
+              </a:rPr>
               <a:t>• Sử dụng drone và cảm biến để giám sát đồng ruộng và phát hiện sâu bệnh sớm.</a:t>
             </a:r>
             <a:br>
-              <a:rPr lang="vi-VN" dirty="0"/>
+              <a:rPr lang="vi-VN" dirty="0">
+                <a:latin typeface="Aptos" panose="020B0004020202020204" pitchFamily="34" charset="0"/>
+              </a:rPr>
             </a:br>
             <a:r>
-              <a:rPr lang="vi-VN" dirty="0"/>
+              <a:rPr lang="vi-VN" dirty="0">
+                <a:latin typeface="Aptos" panose="020B0004020202020204" pitchFamily="34" charset="0"/>
+              </a:rPr>
               <a:t>• Nhà kính và hệ thống tưới tự động ngày càng phổ biến.</a:t>
             </a:r>
             <a:br>
-              <a:rPr lang="vi-VN" dirty="0"/>
+              <a:rPr lang="vi-VN" dirty="0">
+                <a:latin typeface="Aptos" panose="020B0004020202020204" pitchFamily="34" charset="0"/>
+              </a:rPr>
             </a:br>
             <a:r>
-              <a:rPr lang="vi-VN" dirty="0"/>
+              <a:rPr lang="vi-VN" dirty="0">
+                <a:latin typeface="Aptos" panose="020B0004020202020204" pitchFamily="34" charset="0"/>
+              </a:rPr>
               <a:t>• Nông nghiệp xanh, hữu cơ và bền vững được quan tâm nhằm giảm tác động môi trường.</a:t>
             </a:r>
             <a:br>
-              <a:rPr lang="vi-VN" dirty="0"/>
+              <a:rPr lang="vi-VN" dirty="0">
+                <a:latin typeface="Aptos" panose="020B0004020202020204" pitchFamily="34" charset="0"/>
+              </a:rPr>
             </a:br>
             <a:r>
-              <a:rPr lang="vi-VN" dirty="0"/>
+              <a:rPr lang="vi-VN" dirty="0">
+                <a:latin typeface="Aptos" panose="020B0004020202020204" pitchFamily="34" charset="0"/>
+              </a:rPr>
               <a:t>• Truy xuất nguồn gốc nông sản bằng QR code và blockchain phát triển mạnh.</a:t>
             </a:r>
             <a:br>
-              <a:rPr lang="vi-VN" dirty="0"/>
+              <a:rPr lang="vi-VN" dirty="0">
+                <a:latin typeface="Aptos" panose="020B0004020202020204" pitchFamily="34" charset="0"/>
+              </a:rPr>
             </a:br>
             <a:r>
-              <a:rPr lang="vi-VN" dirty="0"/>
+              <a:rPr lang="vi-VN" dirty="0">
+                <a:latin typeface="Aptos" panose="020B0004020202020204" pitchFamily="34" charset="0"/>
+              </a:rPr>
               <a:t>• Ứng dụng Big Data và AI để dự báo thời tiết, mùa vụ và thị trường.</a:t>
             </a:r>
             <a:br>
-              <a:rPr lang="vi-VN" dirty="0"/>
+              <a:rPr lang="vi-VN" dirty="0">
+                <a:latin typeface="Aptos" panose="020B0004020202020204" pitchFamily="34" charset="0"/>
+              </a:rPr>
             </a:br>
             <a:r>
-              <a:rPr lang="vi-VN" dirty="0"/>
+              <a:rPr lang="vi-VN" dirty="0">
+                <a:latin typeface="Aptos" panose="020B0004020202020204" pitchFamily="34" charset="0"/>
+              </a:rPr>
               <a:t>• Robot và máy móc tự hành dần được áp dụng trong thu hoạch và chăm sóc cây trồng.</a:t>
             </a:r>
           </a:p>
@@ -32765,141 +32809,211 @@
               <a:buChar char="q"/>
             </a:pPr>
             <a:r>
-              <a:rPr lang="en-US" dirty="0"/>
+              <a:rPr lang="en-US" dirty="0">
+                <a:latin typeface="Aptos" panose="020B0004020202020204" pitchFamily="34" charset="0"/>
+              </a:rPr>
               <a:t>Vai </a:t>
             </a:r>
             <a:r>
-              <a:rPr lang="en-US" dirty="0" err="1"/>
+              <a:rPr lang="en-US" dirty="0" err="1">
+                <a:latin typeface="Aptos" panose="020B0004020202020204" pitchFamily="34" charset="0"/>
+              </a:rPr>
               <a:t>trò</a:t>
             </a:r>
             <a:r>
-              <a:rPr lang="en-US" dirty="0"/>
-              <a:t> </a:t>
-            </a:r>
-            <a:r>
-              <a:rPr lang="en-US" dirty="0" err="1"/>
+              <a:rPr lang="en-US" dirty="0">
+                <a:latin typeface="Aptos" panose="020B0004020202020204" pitchFamily="34" charset="0"/>
+              </a:rPr>
+              <a:t> </a:t>
+            </a:r>
+            <a:r>
+              <a:rPr lang="en-US" dirty="0" err="1">
+                <a:latin typeface="Aptos" panose="020B0004020202020204" pitchFamily="34" charset="0"/>
+              </a:rPr>
               <a:t>của</a:t>
             </a:r>
             <a:r>
-              <a:rPr lang="en-US" dirty="0"/>
-              <a:t> </a:t>
-            </a:r>
-            <a:r>
-              <a:rPr lang="en-US" dirty="0" err="1"/>
+              <a:rPr lang="en-US" dirty="0">
+                <a:latin typeface="Aptos" panose="020B0004020202020204" pitchFamily="34" charset="0"/>
+              </a:rPr>
+              <a:t> </a:t>
+            </a:r>
+            <a:r>
+              <a:rPr lang="en-US" dirty="0" err="1">
+                <a:latin typeface="Aptos" panose="020B0004020202020204" pitchFamily="34" charset="0"/>
+              </a:rPr>
               <a:t>mạng</a:t>
             </a:r>
             <a:r>
-              <a:rPr lang="en-US" dirty="0"/>
-              <a:t> </a:t>
-            </a:r>
-            <a:r>
-              <a:rPr lang="en-US" dirty="0" err="1"/>
+              <a:rPr lang="en-US" dirty="0">
+                <a:latin typeface="Aptos" panose="020B0004020202020204" pitchFamily="34" charset="0"/>
+              </a:rPr>
+              <a:t> </a:t>
+            </a:r>
+            <a:r>
+              <a:rPr lang="en-US" dirty="0" err="1">
+                <a:latin typeface="Aptos" panose="020B0004020202020204" pitchFamily="34" charset="0"/>
+              </a:rPr>
               <a:t>cảm</a:t>
             </a:r>
             <a:r>
-              <a:rPr lang="en-US" dirty="0"/>
-              <a:t> </a:t>
-            </a:r>
-            <a:r>
-              <a:rPr lang="en-US" dirty="0" err="1"/>
+              <a:rPr lang="en-US" dirty="0">
+                <a:latin typeface="Aptos" panose="020B0004020202020204" pitchFamily="34" charset="0"/>
+              </a:rPr>
+              <a:t> </a:t>
+            </a:r>
+            <a:r>
+              <a:rPr lang="en-US" dirty="0" err="1">
+                <a:latin typeface="Aptos" panose="020B0004020202020204" pitchFamily="34" charset="0"/>
+              </a:rPr>
               <a:t>biến</a:t>
             </a:r>
             <a:r>
-              <a:rPr lang="en-US" dirty="0"/>
-              <a:t> </a:t>
-            </a:r>
-            <a:r>
-              <a:rPr lang="en-US" dirty="0" err="1"/>
+              <a:rPr lang="en-US" dirty="0">
+                <a:latin typeface="Aptos" panose="020B0004020202020204" pitchFamily="34" charset="0"/>
+              </a:rPr>
+              <a:t> </a:t>
+            </a:r>
+            <a:r>
+              <a:rPr lang="en-US" dirty="0" err="1">
+                <a:latin typeface="Aptos" panose="020B0004020202020204" pitchFamily="34" charset="0"/>
+              </a:rPr>
               <a:t>không</a:t>
             </a:r>
             <a:r>
-              <a:rPr lang="en-US" dirty="0"/>
-              <a:t> </a:t>
-            </a:r>
-            <a:r>
-              <a:rPr lang="en-US" dirty="0" err="1"/>
+              <a:rPr lang="en-US" dirty="0">
+                <a:latin typeface="Aptos" panose="020B0004020202020204" pitchFamily="34" charset="0"/>
+              </a:rPr>
+              <a:t> </a:t>
+            </a:r>
+            <a:r>
+              <a:rPr lang="en-US" dirty="0" err="1">
+                <a:latin typeface="Aptos" panose="020B0004020202020204" pitchFamily="34" charset="0"/>
+              </a:rPr>
               <a:t>dây</a:t>
             </a:r>
             <a:r>
-              <a:rPr lang="en-US" dirty="0"/>
+              <a:rPr lang="en-US" dirty="0">
+                <a:latin typeface="Aptos" panose="020B0004020202020204" pitchFamily="34" charset="0"/>
+              </a:rPr>
               <a:t> (WNS) </a:t>
             </a:r>
             <a:r>
-              <a:rPr lang="en-US" dirty="0" err="1"/>
+              <a:rPr lang="en-US" dirty="0" err="1">
+                <a:latin typeface="Aptos" panose="020B0004020202020204" pitchFamily="34" charset="0"/>
+              </a:rPr>
               <a:t>trông</a:t>
             </a:r>
             <a:r>
-              <a:rPr lang="en-US" dirty="0"/>
-              <a:t> </a:t>
-            </a:r>
-            <a:r>
-              <a:rPr lang="en-US" dirty="0" err="1"/>
+              <a:rPr lang="en-US" dirty="0">
+                <a:latin typeface="Aptos" panose="020B0004020202020204" pitchFamily="34" charset="0"/>
+              </a:rPr>
+              <a:t> </a:t>
+            </a:r>
+            <a:r>
+              <a:rPr lang="en-US" dirty="0" err="1">
+                <a:latin typeface="Aptos" panose="020B0004020202020204" pitchFamily="34" charset="0"/>
+              </a:rPr>
               <a:t>nông</a:t>
             </a:r>
             <a:r>
-              <a:rPr lang="en-US" dirty="0"/>
-              <a:t> </a:t>
-            </a:r>
-            <a:r>
-              <a:rPr lang="en-US" dirty="0" err="1"/>
+              <a:rPr lang="en-US" dirty="0">
+                <a:latin typeface="Aptos" panose="020B0004020202020204" pitchFamily="34" charset="0"/>
+              </a:rPr>
+              <a:t> </a:t>
+            </a:r>
+            <a:r>
+              <a:rPr lang="en-US" dirty="0" err="1">
+                <a:latin typeface="Aptos" panose="020B0004020202020204" pitchFamily="34" charset="0"/>
+              </a:rPr>
               <a:t>nghiệp</a:t>
             </a:r>
             <a:r>
-              <a:rPr lang="en-US" dirty="0"/>
-              <a:t> </a:t>
-            </a:r>
-            <a:r>
-              <a:rPr lang="en-US" dirty="0" err="1"/>
+              <a:rPr lang="en-US" dirty="0">
+                <a:latin typeface="Aptos" panose="020B0004020202020204" pitchFamily="34" charset="0"/>
+              </a:rPr>
+              <a:t> </a:t>
+            </a:r>
+            <a:r>
+              <a:rPr lang="en-US" dirty="0" err="1">
+                <a:latin typeface="Aptos" panose="020B0004020202020204" pitchFamily="34" charset="0"/>
+              </a:rPr>
               <a:t>tự</a:t>
             </a:r>
             <a:r>
-              <a:rPr lang="en-US" dirty="0"/>
-              <a:t> </a:t>
-            </a:r>
-            <a:r>
-              <a:rPr lang="en-US" dirty="0" err="1"/>
+              <a:rPr lang="en-US" dirty="0">
+                <a:latin typeface="Aptos" panose="020B0004020202020204" pitchFamily="34" charset="0"/>
+              </a:rPr>
+              <a:t> </a:t>
+            </a:r>
+            <a:r>
+              <a:rPr lang="en-US" dirty="0" err="1">
+                <a:latin typeface="Aptos" panose="020B0004020202020204" pitchFamily="34" charset="0"/>
+              </a:rPr>
               <a:t>động</a:t>
             </a:r>
             <a:r>
-              <a:rPr lang="en-US" dirty="0"/>
+              <a:rPr lang="en-US" dirty="0">
+                <a:latin typeface="Aptos" panose="020B0004020202020204" pitchFamily="34" charset="0"/>
+              </a:rPr>
               <a:t>:</a:t>
             </a:r>
           </a:p>
           <a:p>
             <a:pPr lvl="1"/>
             <a:r>
-              <a:rPr lang="vi-VN" dirty="0"/>
+              <a:rPr lang="vi-VN" dirty="0">
+                <a:latin typeface="Aptos" panose="020B0004020202020204" pitchFamily="34" charset="0"/>
+              </a:rPr>
               <a:t>• Thu thập dữ liệu môi trường như nhiệt độ, độ ẩm, ánh sáng và độ ẩm đất theo thời gian thực.</a:t>
             </a:r>
             <a:br>
-              <a:rPr lang="vi-VN" dirty="0"/>
+              <a:rPr lang="vi-VN" dirty="0">
+                <a:latin typeface="Aptos" panose="020B0004020202020204" pitchFamily="34" charset="0"/>
+              </a:rPr>
             </a:br>
             <a:r>
-              <a:rPr lang="vi-VN" dirty="0"/>
+              <a:rPr lang="vi-VN" dirty="0">
+                <a:latin typeface="Aptos" panose="020B0004020202020204" pitchFamily="34" charset="0"/>
+              </a:rPr>
               <a:t>• Giám sát liên tục điều kiện canh tác nhằm phát hiện sớm các yếu tố ảnh hưởng đến cây trồng.</a:t>
             </a:r>
             <a:br>
-              <a:rPr lang="vi-VN" dirty="0"/>
+              <a:rPr lang="vi-VN" dirty="0">
+                <a:latin typeface="Aptos" panose="020B0004020202020204" pitchFamily="34" charset="0"/>
+              </a:rPr>
             </a:br>
             <a:r>
-              <a:rPr lang="vi-VN" dirty="0"/>
+              <a:rPr lang="vi-VN" dirty="0">
+                <a:latin typeface="Aptos" panose="020B0004020202020204" pitchFamily="34" charset="0"/>
+              </a:rPr>
               <a:t>• Hỗ trợ hệ thống tưới tiêu và bón phân tự động dựa trên dữ liệu cảm biến..</a:t>
             </a:r>
             <a:br>
-              <a:rPr lang="vi-VN" dirty="0"/>
+              <a:rPr lang="vi-VN" dirty="0">
+                <a:latin typeface="Aptos" panose="020B0004020202020204" pitchFamily="34" charset="0"/>
+              </a:rPr>
             </a:br>
             <a:r>
-              <a:rPr lang="vi-VN" dirty="0"/>
+              <a:rPr lang="vi-VN" dirty="0">
+                <a:latin typeface="Aptos" panose="020B0004020202020204" pitchFamily="34" charset="0"/>
+              </a:rPr>
               <a:t>• Hỗ trợ quản lý và điều khiển từ xa thông qua Internet hoặc thiết bị di động.</a:t>
             </a:r>
             <a:br>
-              <a:rPr lang="vi-VN" dirty="0"/>
+              <a:rPr lang="vi-VN" dirty="0">
+                <a:latin typeface="Aptos" panose="020B0004020202020204" pitchFamily="34" charset="0"/>
+              </a:rPr>
             </a:br>
             <a:r>
-              <a:rPr lang="vi-VN" dirty="0"/>
+              <a:rPr lang="vi-VN" dirty="0">
+                <a:latin typeface="Aptos" panose="020B0004020202020204" pitchFamily="34" charset="0"/>
+              </a:rPr>
               <a:t>• Tiết kiệm năng lượng và chi phí nhân công.</a:t>
             </a:r>
-            <a:endParaRPr lang="en-US" dirty="0"/>
+            <a:endParaRPr lang="en-US" dirty="0">
+              <a:latin typeface="Aptos" panose="020B0004020202020204" pitchFamily="34" charset="0"/>
+            </a:endParaRPr>
           </a:p>
           <a:p>
             <a:pPr marL="742950" lvl="1" indent="-285750">
@@ -32907,130 +33021,194 @@
               <a:buChar char="Ø"/>
             </a:pPr>
             <a:r>
-              <a:rPr lang="en-US" dirty="0" err="1"/>
+              <a:rPr lang="en-US" dirty="0" err="1">
+                <a:latin typeface="Aptos" panose="020B0004020202020204" pitchFamily="34" charset="0"/>
+              </a:rPr>
               <a:t>Mạng</a:t>
             </a:r>
             <a:r>
-              <a:rPr lang="en-US" dirty="0"/>
-              <a:t> </a:t>
-            </a:r>
-            <a:r>
-              <a:rPr lang="en-US" dirty="0" err="1"/>
+              <a:rPr lang="en-US" dirty="0">
+                <a:latin typeface="Aptos" panose="020B0004020202020204" pitchFamily="34" charset="0"/>
+              </a:rPr>
+              <a:t> </a:t>
+            </a:r>
+            <a:r>
+              <a:rPr lang="en-US" dirty="0" err="1">
+                <a:latin typeface="Aptos" panose="020B0004020202020204" pitchFamily="34" charset="0"/>
+              </a:rPr>
               <a:t>cảm</a:t>
             </a:r>
             <a:r>
-              <a:rPr lang="en-US" dirty="0"/>
-              <a:t> </a:t>
-            </a:r>
-            <a:r>
-              <a:rPr lang="en-US" dirty="0" err="1"/>
+              <a:rPr lang="en-US" dirty="0">
+                <a:latin typeface="Aptos" panose="020B0004020202020204" pitchFamily="34" charset="0"/>
+              </a:rPr>
+              <a:t> </a:t>
+            </a:r>
+            <a:r>
+              <a:rPr lang="en-US" dirty="0" err="1">
+                <a:latin typeface="Aptos" panose="020B0004020202020204" pitchFamily="34" charset="0"/>
+              </a:rPr>
               <a:t>biến</a:t>
             </a:r>
             <a:r>
-              <a:rPr lang="en-US" dirty="0"/>
-              <a:t> </a:t>
-            </a:r>
-            <a:r>
-              <a:rPr lang="en-US" dirty="0" err="1"/>
+              <a:rPr lang="en-US" dirty="0">
+                <a:latin typeface="Aptos" panose="020B0004020202020204" pitchFamily="34" charset="0"/>
+              </a:rPr>
+              <a:t> </a:t>
+            </a:r>
+            <a:r>
+              <a:rPr lang="en-US" dirty="0" err="1">
+                <a:latin typeface="Aptos" panose="020B0004020202020204" pitchFamily="34" charset="0"/>
+              </a:rPr>
               <a:t>như</a:t>
             </a:r>
             <a:r>
-              <a:rPr lang="en-US" dirty="0"/>
-              <a:t> </a:t>
-            </a:r>
-            <a:r>
-              <a:rPr lang="en-US" dirty="0" err="1"/>
+              <a:rPr lang="en-US" dirty="0">
+                <a:latin typeface="Aptos" panose="020B0004020202020204" pitchFamily="34" charset="0"/>
+              </a:rPr>
+              <a:t> </a:t>
+            </a:r>
+            <a:r>
+              <a:rPr lang="en-US" dirty="0" err="1">
+                <a:latin typeface="Aptos" panose="020B0004020202020204" pitchFamily="34" charset="0"/>
+              </a:rPr>
               <a:t>cầu</a:t>
             </a:r>
             <a:r>
-              <a:rPr lang="en-US" dirty="0"/>
-              <a:t> </a:t>
-            </a:r>
-            <a:r>
-              <a:rPr lang="en-US" dirty="0" err="1"/>
+              <a:rPr lang="en-US" dirty="0">
+                <a:latin typeface="Aptos" panose="020B0004020202020204" pitchFamily="34" charset="0"/>
+              </a:rPr>
+              <a:t> </a:t>
+            </a:r>
+            <a:r>
+              <a:rPr lang="en-US" dirty="0" err="1">
+                <a:latin typeface="Aptos" panose="020B0004020202020204" pitchFamily="34" charset="0"/>
+              </a:rPr>
               <a:t>nối</a:t>
             </a:r>
             <a:r>
-              <a:rPr lang="en-US" dirty="0"/>
-              <a:t> </a:t>
-            </a:r>
-            <a:r>
-              <a:rPr lang="en-US" dirty="0" err="1"/>
+              <a:rPr lang="en-US" dirty="0">
+                <a:latin typeface="Aptos" panose="020B0004020202020204" pitchFamily="34" charset="0"/>
+              </a:rPr>
+              <a:t> </a:t>
+            </a:r>
+            <a:r>
+              <a:rPr lang="en-US" dirty="0" err="1">
+                <a:latin typeface="Aptos" panose="020B0004020202020204" pitchFamily="34" charset="0"/>
+              </a:rPr>
               <a:t>giữa</a:t>
             </a:r>
             <a:r>
-              <a:rPr lang="en-US" dirty="0"/>
-              <a:t> </a:t>
-            </a:r>
-            <a:r>
-              <a:rPr lang="en-US" dirty="0" err="1"/>
+              <a:rPr lang="en-US" dirty="0">
+                <a:latin typeface="Aptos" panose="020B0004020202020204" pitchFamily="34" charset="0"/>
+              </a:rPr>
+              <a:t> </a:t>
+            </a:r>
+            <a:r>
+              <a:rPr lang="en-US" dirty="0" err="1">
+                <a:latin typeface="Aptos" panose="020B0004020202020204" pitchFamily="34" charset="0"/>
+              </a:rPr>
               <a:t>môi</a:t>
             </a:r>
             <a:r>
-              <a:rPr lang="en-US" dirty="0"/>
-              <a:t> </a:t>
-            </a:r>
-            <a:r>
-              <a:rPr lang="en-US" dirty="0" err="1"/>
+              <a:rPr lang="en-US" dirty="0">
+                <a:latin typeface="Aptos" panose="020B0004020202020204" pitchFamily="34" charset="0"/>
+              </a:rPr>
+              <a:t> </a:t>
+            </a:r>
+            <a:r>
+              <a:rPr lang="en-US" dirty="0" err="1">
+                <a:latin typeface="Aptos" panose="020B0004020202020204" pitchFamily="34" charset="0"/>
+              </a:rPr>
               <a:t>trường</a:t>
             </a:r>
             <a:r>
-              <a:rPr lang="en-US" dirty="0"/>
-              <a:t> </a:t>
-            </a:r>
-            <a:r>
-              <a:rPr lang="en-US" dirty="0" err="1"/>
+              <a:rPr lang="en-US" dirty="0">
+                <a:latin typeface="Aptos" panose="020B0004020202020204" pitchFamily="34" charset="0"/>
+              </a:rPr>
+              <a:t> </a:t>
+            </a:r>
+            <a:r>
+              <a:rPr lang="en-US" dirty="0" err="1">
+                <a:latin typeface="Aptos" panose="020B0004020202020204" pitchFamily="34" charset="0"/>
+              </a:rPr>
               <a:t>thực</a:t>
             </a:r>
             <a:r>
-              <a:rPr lang="en-US" dirty="0"/>
-              <a:t> </a:t>
-            </a:r>
-            <a:r>
-              <a:rPr lang="en-US" dirty="0" err="1"/>
+              <a:rPr lang="en-US" dirty="0">
+                <a:latin typeface="Aptos" panose="020B0004020202020204" pitchFamily="34" charset="0"/>
+              </a:rPr>
+              <a:t> </a:t>
+            </a:r>
+            <a:r>
+              <a:rPr lang="en-US" dirty="0" err="1">
+                <a:latin typeface="Aptos" panose="020B0004020202020204" pitchFamily="34" charset="0"/>
+              </a:rPr>
               <a:t>tế</a:t>
             </a:r>
             <a:r>
-              <a:rPr lang="en-US" dirty="0"/>
-              <a:t> </a:t>
-            </a:r>
-            <a:r>
-              <a:rPr lang="en-US" dirty="0" err="1"/>
+              <a:rPr lang="en-US" dirty="0">
+                <a:latin typeface="Aptos" panose="020B0004020202020204" pitchFamily="34" charset="0"/>
+              </a:rPr>
+              <a:t> </a:t>
+            </a:r>
+            <a:r>
+              <a:rPr lang="en-US" dirty="0" err="1">
+                <a:latin typeface="Aptos" panose="020B0004020202020204" pitchFamily="34" charset="0"/>
+              </a:rPr>
               <a:t>và</a:t>
             </a:r>
             <a:r>
-              <a:rPr lang="en-US" dirty="0"/>
-              <a:t> </a:t>
-            </a:r>
-            <a:r>
-              <a:rPr lang="en-US" dirty="0" err="1"/>
+              <a:rPr lang="en-US" dirty="0">
+                <a:latin typeface="Aptos" panose="020B0004020202020204" pitchFamily="34" charset="0"/>
+              </a:rPr>
+              <a:t> </a:t>
+            </a:r>
+            <a:r>
+              <a:rPr lang="en-US" dirty="0" err="1">
+                <a:latin typeface="Aptos" panose="020B0004020202020204" pitchFamily="34" charset="0"/>
+              </a:rPr>
               <a:t>hệ</a:t>
             </a:r>
             <a:r>
-              <a:rPr lang="en-US" dirty="0"/>
-              <a:t> </a:t>
-            </a:r>
-            <a:r>
-              <a:rPr lang="en-US" dirty="0" err="1"/>
+              <a:rPr lang="en-US" dirty="0">
+                <a:latin typeface="Aptos" panose="020B0004020202020204" pitchFamily="34" charset="0"/>
+              </a:rPr>
+              <a:t> </a:t>
+            </a:r>
+            <a:r>
+              <a:rPr lang="en-US" dirty="0" err="1">
+                <a:latin typeface="Aptos" panose="020B0004020202020204" pitchFamily="34" charset="0"/>
+              </a:rPr>
               <a:t>thống</a:t>
             </a:r>
             <a:r>
-              <a:rPr lang="en-US" dirty="0"/>
-              <a:t> </a:t>
-            </a:r>
-            <a:r>
-              <a:rPr lang="en-US" dirty="0" err="1"/>
+              <a:rPr lang="en-US" dirty="0">
+                <a:latin typeface="Aptos" panose="020B0004020202020204" pitchFamily="34" charset="0"/>
+              </a:rPr>
+              <a:t> </a:t>
+            </a:r>
+            <a:r>
+              <a:rPr lang="en-US" dirty="0" err="1">
+                <a:latin typeface="Aptos" panose="020B0004020202020204" pitchFamily="34" charset="0"/>
+              </a:rPr>
               <a:t>điều</a:t>
             </a:r>
             <a:r>
-              <a:rPr lang="en-US" dirty="0"/>
-              <a:t> </a:t>
-            </a:r>
-            <a:r>
-              <a:rPr lang="en-US" dirty="0" err="1"/>
+              <a:rPr lang="en-US" dirty="0">
+                <a:latin typeface="Aptos" panose="020B0004020202020204" pitchFamily="34" charset="0"/>
+              </a:rPr>
+              <a:t> </a:t>
+            </a:r>
+            <a:r>
+              <a:rPr lang="en-US" dirty="0" err="1">
+                <a:latin typeface="Aptos" panose="020B0004020202020204" pitchFamily="34" charset="0"/>
+              </a:rPr>
               <a:t>khiển</a:t>
             </a:r>
-            <a:endParaRPr lang="en-US" dirty="0"/>
+            <a:endParaRPr lang="en-US" dirty="0">
+              <a:latin typeface="Aptos" panose="020B0004020202020204" pitchFamily="34" charset="0"/>
+            </a:endParaRPr>
           </a:p>
           <a:p>
             <a:pPr marL="285750" indent="-285750">
@@ -33038,198 +33216,296 @@
               <a:buChar char="q"/>
             </a:pPr>
             <a:r>
-              <a:rPr lang="en-US" dirty="0" err="1"/>
+              <a:rPr lang="en-US" dirty="0" err="1">
+                <a:latin typeface="Aptos" panose="020B0004020202020204" pitchFamily="34" charset="0"/>
+              </a:rPr>
               <a:t>Một</a:t>
             </a:r>
             <a:r>
-              <a:rPr lang="en-US" dirty="0"/>
-              <a:t> </a:t>
-            </a:r>
-            <a:r>
-              <a:rPr lang="en-US" dirty="0" err="1"/>
+              <a:rPr lang="en-US" dirty="0">
+                <a:latin typeface="Aptos" panose="020B0004020202020204" pitchFamily="34" charset="0"/>
+              </a:rPr>
+              <a:t> </a:t>
+            </a:r>
+            <a:r>
+              <a:rPr lang="en-US" dirty="0" err="1">
+                <a:latin typeface="Aptos" panose="020B0004020202020204" pitchFamily="34" charset="0"/>
+              </a:rPr>
               <a:t>số</a:t>
             </a:r>
             <a:r>
-              <a:rPr lang="en-US" dirty="0"/>
-              <a:t> </a:t>
-            </a:r>
-            <a:r>
-              <a:rPr lang="en-US" dirty="0" err="1"/>
+              <a:rPr lang="en-US" dirty="0">
+                <a:latin typeface="Aptos" panose="020B0004020202020204" pitchFamily="34" charset="0"/>
+              </a:rPr>
+              <a:t> </a:t>
+            </a:r>
+            <a:r>
+              <a:rPr lang="en-US" dirty="0" err="1">
+                <a:latin typeface="Aptos" panose="020B0004020202020204" pitchFamily="34" charset="0"/>
+              </a:rPr>
               <a:t>yêu</a:t>
             </a:r>
             <a:r>
-              <a:rPr lang="en-US" dirty="0"/>
-              <a:t> </a:t>
-            </a:r>
-            <a:r>
-              <a:rPr lang="en-US" dirty="0" err="1"/>
+              <a:rPr lang="en-US" dirty="0">
+                <a:latin typeface="Aptos" panose="020B0004020202020204" pitchFamily="34" charset="0"/>
+              </a:rPr>
+              <a:t> </a:t>
+            </a:r>
+            <a:r>
+              <a:rPr lang="en-US" dirty="0" err="1">
+                <a:latin typeface="Aptos" panose="020B0004020202020204" pitchFamily="34" charset="0"/>
+              </a:rPr>
               <a:t>cầu</a:t>
             </a:r>
             <a:r>
-              <a:rPr lang="en-US" dirty="0"/>
-              <a:t> </a:t>
-            </a:r>
-            <a:r>
-              <a:rPr lang="en-US" dirty="0" err="1"/>
+              <a:rPr lang="en-US" dirty="0">
+                <a:latin typeface="Aptos" panose="020B0004020202020204" pitchFamily="34" charset="0"/>
+              </a:rPr>
+              <a:t> </a:t>
+            </a:r>
+            <a:r>
+              <a:rPr lang="en-US" dirty="0" err="1">
+                <a:latin typeface="Aptos" panose="020B0004020202020204" pitchFamily="34" charset="0"/>
+              </a:rPr>
               <a:t>đối</a:t>
             </a:r>
             <a:r>
-              <a:rPr lang="en-US" dirty="0"/>
-              <a:t> </a:t>
-            </a:r>
-            <a:r>
-              <a:rPr lang="en-US" dirty="0" err="1"/>
+              <a:rPr lang="en-US" dirty="0">
+                <a:latin typeface="Aptos" panose="020B0004020202020204" pitchFamily="34" charset="0"/>
+              </a:rPr>
+              <a:t> </a:t>
+            </a:r>
+            <a:r>
+              <a:rPr lang="en-US" dirty="0" err="1">
+                <a:latin typeface="Aptos" panose="020B0004020202020204" pitchFamily="34" charset="0"/>
+              </a:rPr>
               <a:t>với</a:t>
             </a:r>
             <a:r>
-              <a:rPr lang="en-US" dirty="0"/>
-              <a:t> </a:t>
-            </a:r>
-            <a:r>
-              <a:rPr lang="en-US" dirty="0" err="1"/>
+              <a:rPr lang="en-US" dirty="0">
+                <a:latin typeface="Aptos" panose="020B0004020202020204" pitchFamily="34" charset="0"/>
+              </a:rPr>
+              <a:t> </a:t>
+            </a:r>
+            <a:r>
+              <a:rPr lang="en-US" dirty="0" err="1">
+                <a:latin typeface="Aptos" panose="020B0004020202020204" pitchFamily="34" charset="0"/>
+              </a:rPr>
               <a:t>mạng</a:t>
             </a:r>
             <a:r>
-              <a:rPr lang="en-US" dirty="0"/>
-              <a:t> </a:t>
-            </a:r>
-            <a:r>
-              <a:rPr lang="en-US" dirty="0" err="1"/>
+              <a:rPr lang="en-US" dirty="0">
+                <a:latin typeface="Aptos" panose="020B0004020202020204" pitchFamily="34" charset="0"/>
+              </a:rPr>
+              <a:t> </a:t>
+            </a:r>
+            <a:r>
+              <a:rPr lang="en-US" dirty="0" err="1">
+                <a:latin typeface="Aptos" panose="020B0004020202020204" pitchFamily="34" charset="0"/>
+              </a:rPr>
               <a:t>cảm</a:t>
             </a:r>
             <a:r>
-              <a:rPr lang="en-US" dirty="0"/>
-              <a:t> </a:t>
-            </a:r>
-            <a:r>
-              <a:rPr lang="en-US" dirty="0" err="1"/>
+              <a:rPr lang="en-US" dirty="0">
+                <a:latin typeface="Aptos" panose="020B0004020202020204" pitchFamily="34" charset="0"/>
+              </a:rPr>
+              <a:t> </a:t>
+            </a:r>
+            <a:r>
+              <a:rPr lang="en-US" dirty="0" err="1">
+                <a:latin typeface="Aptos" panose="020B0004020202020204" pitchFamily="34" charset="0"/>
+              </a:rPr>
               <a:t>biến</a:t>
             </a:r>
             <a:r>
-              <a:rPr lang="en-US" dirty="0"/>
-              <a:t> </a:t>
-            </a:r>
-            <a:r>
-              <a:rPr lang="en-US" dirty="0" err="1"/>
+              <a:rPr lang="en-US" dirty="0">
+                <a:latin typeface="Aptos" panose="020B0004020202020204" pitchFamily="34" charset="0"/>
+              </a:rPr>
+              <a:t> </a:t>
+            </a:r>
+            <a:r>
+              <a:rPr lang="en-US" dirty="0" err="1">
+                <a:latin typeface="Aptos" panose="020B0004020202020204" pitchFamily="34" charset="0"/>
+              </a:rPr>
               <a:t>nông</a:t>
             </a:r>
             <a:r>
-              <a:rPr lang="en-US" dirty="0"/>
-              <a:t> </a:t>
-            </a:r>
-            <a:r>
-              <a:rPr lang="en-US" dirty="0" err="1"/>
+              <a:rPr lang="en-US" dirty="0">
+                <a:latin typeface="Aptos" panose="020B0004020202020204" pitchFamily="34" charset="0"/>
+              </a:rPr>
+              <a:t> </a:t>
+            </a:r>
+            <a:r>
+              <a:rPr lang="en-US" dirty="0" err="1">
+                <a:latin typeface="Aptos" panose="020B0004020202020204" pitchFamily="34" charset="0"/>
+              </a:rPr>
               <a:t>nghiệp</a:t>
             </a:r>
             <a:r>
-              <a:rPr lang="en-US" dirty="0"/>
+              <a:rPr lang="en-US" dirty="0">
+                <a:latin typeface="Aptos" panose="020B0004020202020204" pitchFamily="34" charset="0"/>
+              </a:rPr>
               <a:t>:</a:t>
             </a:r>
           </a:p>
           <a:p>
             <a:pPr lvl="1"/>
             <a:r>
-              <a:rPr lang="vi-VN" dirty="0"/>
+              <a:rPr lang="vi-VN" dirty="0">
+                <a:latin typeface="Aptos" panose="020B0004020202020204" pitchFamily="34" charset="0"/>
+              </a:rPr>
               <a:t>• Tiêu thụ năng lượng thấp để hoạt động lâu dài ngoài thực địa.</a:t>
             </a:r>
             <a:br>
-              <a:rPr lang="vi-VN" dirty="0"/>
+              <a:rPr lang="vi-VN" dirty="0">
+                <a:latin typeface="Aptos" panose="020B0004020202020204" pitchFamily="34" charset="0"/>
+              </a:rPr>
             </a:br>
             <a:r>
-              <a:rPr lang="vi-VN" dirty="0"/>
+              <a:rPr lang="vi-VN" dirty="0">
+                <a:latin typeface="Aptos" panose="020B0004020202020204" pitchFamily="34" charset="0"/>
+              </a:rPr>
               <a:t>• Khả năng truyền dữ liệu ổn định và khoảng cách truyền xa.</a:t>
             </a:r>
             <a:br>
-              <a:rPr lang="vi-VN" dirty="0"/>
+              <a:rPr lang="vi-VN" dirty="0">
+                <a:latin typeface="Aptos" panose="020B0004020202020204" pitchFamily="34" charset="0"/>
+              </a:rPr>
             </a:br>
             <a:r>
-              <a:rPr lang="vi-VN" dirty="0"/>
+              <a:rPr lang="vi-VN" dirty="0">
+                <a:latin typeface="Aptos" panose="020B0004020202020204" pitchFamily="34" charset="0"/>
+              </a:rPr>
               <a:t>• Độ chính xác cao trong việc thu thập dữ liệu môi trường.</a:t>
             </a:r>
             <a:br>
-              <a:rPr lang="vi-VN" dirty="0"/>
+              <a:rPr lang="vi-VN" dirty="0">
+                <a:latin typeface="Aptos" panose="020B0004020202020204" pitchFamily="34" charset="0"/>
+              </a:rPr>
             </a:br>
             <a:r>
-              <a:rPr lang="vi-VN" dirty="0"/>
+              <a:rPr lang="vi-VN" dirty="0">
+                <a:latin typeface="Aptos" panose="020B0004020202020204" pitchFamily="34" charset="0"/>
+              </a:rPr>
               <a:t>• Khả năng chống chịu tốt với điều kiện thời tiết khắc nghiệt.</a:t>
             </a:r>
             <a:br>
-              <a:rPr lang="vi-VN" dirty="0"/>
+              <a:rPr lang="vi-VN" dirty="0">
+                <a:latin typeface="Aptos" panose="020B0004020202020204" pitchFamily="34" charset="0"/>
+              </a:rPr>
             </a:br>
             <a:r>
-              <a:rPr lang="vi-VN" dirty="0"/>
+              <a:rPr lang="vi-VN" dirty="0">
+                <a:latin typeface="Aptos" panose="020B0004020202020204" pitchFamily="34" charset="0"/>
+              </a:rPr>
               <a:t>• Dễ dàng triển khai, mở rộng và bảo trì hệ thống.</a:t>
             </a:r>
-            <a:endParaRPr lang="en-US" dirty="0"/>
+            <a:endParaRPr lang="en-US" dirty="0">
+              <a:latin typeface="Aptos" panose="020B0004020202020204" pitchFamily="34" charset="0"/>
+            </a:endParaRPr>
           </a:p>
           <a:p>
             <a:pPr lvl="1"/>
             <a:r>
-              <a:rPr lang="en-US" dirty="0"/>
+              <a:rPr lang="en-US" dirty="0">
+                <a:latin typeface="Aptos" panose="020B0004020202020204" pitchFamily="34" charset="0"/>
+              </a:rPr>
               <a:t>• Chi </a:t>
             </a:r>
             <a:r>
-              <a:rPr lang="en-US" dirty="0" err="1"/>
+              <a:rPr lang="en-US" dirty="0" err="1">
+                <a:latin typeface="Aptos" panose="020B0004020202020204" pitchFamily="34" charset="0"/>
+              </a:rPr>
               <a:t>phí</a:t>
             </a:r>
             <a:r>
-              <a:rPr lang="en-US" dirty="0"/>
-              <a:t> </a:t>
-            </a:r>
-            <a:r>
-              <a:rPr lang="en-US" dirty="0" err="1"/>
+              <a:rPr lang="en-US" dirty="0">
+                <a:latin typeface="Aptos" panose="020B0004020202020204" pitchFamily="34" charset="0"/>
+              </a:rPr>
+              <a:t> </a:t>
+            </a:r>
+            <a:r>
+              <a:rPr lang="en-US" dirty="0" err="1">
+                <a:latin typeface="Aptos" panose="020B0004020202020204" pitchFamily="34" charset="0"/>
+              </a:rPr>
               <a:t>lắp</a:t>
             </a:r>
             <a:r>
-              <a:rPr lang="en-US" dirty="0"/>
-              <a:t> </a:t>
-            </a:r>
-            <a:r>
-              <a:rPr lang="en-US" dirty="0" err="1"/>
+              <a:rPr lang="en-US" dirty="0">
+                <a:latin typeface="Aptos" panose="020B0004020202020204" pitchFamily="34" charset="0"/>
+              </a:rPr>
+              <a:t> </a:t>
+            </a:r>
+            <a:r>
+              <a:rPr lang="en-US" dirty="0" err="1">
+                <a:latin typeface="Aptos" panose="020B0004020202020204" pitchFamily="34" charset="0"/>
+              </a:rPr>
               <a:t>đặt</a:t>
             </a:r>
             <a:r>
-              <a:rPr lang="en-US" dirty="0"/>
-              <a:t> </a:t>
-            </a:r>
-            <a:r>
-              <a:rPr lang="en-US" dirty="0" err="1"/>
+              <a:rPr lang="en-US" dirty="0">
+                <a:latin typeface="Aptos" panose="020B0004020202020204" pitchFamily="34" charset="0"/>
+              </a:rPr>
+              <a:t> </a:t>
+            </a:r>
+            <a:r>
+              <a:rPr lang="en-US" dirty="0" err="1">
+                <a:latin typeface="Aptos" panose="020B0004020202020204" pitchFamily="34" charset="0"/>
+              </a:rPr>
               <a:t>và</a:t>
             </a:r>
             <a:r>
-              <a:rPr lang="en-US" dirty="0"/>
-              <a:t> </a:t>
-            </a:r>
-            <a:r>
-              <a:rPr lang="en-US" dirty="0" err="1"/>
+              <a:rPr lang="en-US" dirty="0">
+                <a:latin typeface="Aptos" panose="020B0004020202020204" pitchFamily="34" charset="0"/>
+              </a:rPr>
+              <a:t> </a:t>
+            </a:r>
+            <a:r>
+              <a:rPr lang="en-US" dirty="0" err="1">
+                <a:latin typeface="Aptos" panose="020B0004020202020204" pitchFamily="34" charset="0"/>
+              </a:rPr>
               <a:t>vận</a:t>
             </a:r>
             <a:r>
-              <a:rPr lang="en-US" dirty="0"/>
-              <a:t> </a:t>
-            </a:r>
-            <a:r>
-              <a:rPr lang="en-US" dirty="0" err="1"/>
+              <a:rPr lang="en-US" dirty="0">
+                <a:latin typeface="Aptos" panose="020B0004020202020204" pitchFamily="34" charset="0"/>
+              </a:rPr>
+              <a:t> </a:t>
+            </a:r>
+            <a:r>
+              <a:rPr lang="en-US" dirty="0" err="1">
+                <a:latin typeface="Aptos" panose="020B0004020202020204" pitchFamily="34" charset="0"/>
+              </a:rPr>
               <a:t>hành</a:t>
             </a:r>
             <a:r>
-              <a:rPr lang="en-US" dirty="0"/>
-              <a:t> </a:t>
-            </a:r>
-            <a:r>
-              <a:rPr lang="en-US" dirty="0" err="1"/>
+              <a:rPr lang="en-US" dirty="0">
+                <a:latin typeface="Aptos" panose="020B0004020202020204" pitchFamily="34" charset="0"/>
+              </a:rPr>
+              <a:t> </a:t>
+            </a:r>
+            <a:r>
+              <a:rPr lang="en-US" dirty="0" err="1">
+                <a:latin typeface="Aptos" panose="020B0004020202020204" pitchFamily="34" charset="0"/>
+              </a:rPr>
               <a:t>hợp</a:t>
             </a:r>
             <a:r>
-              <a:rPr lang="en-US" dirty="0"/>
-              <a:t> </a:t>
-            </a:r>
-            <a:r>
-              <a:rPr lang="en-US" dirty="0" err="1"/>
+              <a:rPr lang="en-US" dirty="0">
+                <a:latin typeface="Aptos" panose="020B0004020202020204" pitchFamily="34" charset="0"/>
+              </a:rPr>
+              <a:t> </a:t>
+            </a:r>
+            <a:r>
+              <a:rPr lang="en-US" dirty="0" err="1">
+                <a:latin typeface="Aptos" panose="020B0004020202020204" pitchFamily="34" charset="0"/>
+              </a:rPr>
               <a:t>lý</a:t>
             </a:r>
             <a:r>
-              <a:rPr lang="en-US" dirty="0"/>
+              <a:rPr lang="en-US" dirty="0">
+                <a:latin typeface="Aptos" panose="020B0004020202020204" pitchFamily="34" charset="0"/>
+              </a:rPr>
               <a:t>.</a:t>
             </a:r>
           </a:p>
@@ -33380,7 +33656,9 @@
               <a:buChar char="q"/>
             </a:pPr>
             <a:r>
-              <a:rPr lang="vi-VN" dirty="0"/>
+              <a:rPr lang="vi-VN" dirty="0">
+                <a:latin typeface="Aptos" panose="020B0004020202020204" pitchFamily="34" charset="0"/>
+              </a:rPr>
               <a:t>LoRa (Long Range) là công nghệ RF được phát triển bởi Semtech cho các ứng dụng IoT công suất thấp, tầm truyền xa.</a:t>
             </a:r>
           </a:p>
@@ -33390,7 +33668,9 @@
               <a:buChar char="q"/>
             </a:pPr>
             <a:r>
-              <a:rPr lang="vi-VN" dirty="0"/>
+              <a:rPr lang="vi-VN" dirty="0">
+                <a:latin typeface="Aptos" panose="020B0004020202020204" pitchFamily="34" charset="0"/>
+              </a:rPr>
               <a:t>Các đặc điểm cơ bản:</a:t>
             </a:r>
           </a:p>
@@ -33400,7 +33680,9 @@
               <a:buChar char="Ø"/>
             </a:pPr>
             <a:r>
-              <a:rPr lang="vi-VN" dirty="0"/>
+              <a:rPr lang="vi-VN" dirty="0">
+                <a:latin typeface="Aptos" panose="020B0004020202020204" pitchFamily="34" charset="0"/>
+              </a:rPr>
               <a:t>Khoảng cách truyền: &lt;15km</a:t>
             </a:r>
           </a:p>
@@ -33410,39 +33692,57 @@
               <a:buChar char="Ø"/>
             </a:pPr>
             <a:r>
-              <a:rPr lang="vi-VN" dirty="0"/>
+              <a:rPr lang="vi-VN" dirty="0">
+                <a:latin typeface="Aptos" panose="020B0004020202020204" pitchFamily="34" charset="0"/>
+              </a:rPr>
               <a:t>Công suất tiêu thụ thấp: 20-120mA(</a:t>
             </a:r>
             <a:r>
-              <a:rPr lang="en-US" dirty="0" err="1"/>
+              <a:rPr lang="en-US" dirty="0" err="1">
+                <a:latin typeface="Aptos" panose="020B0004020202020204" pitchFamily="34" charset="0"/>
+              </a:rPr>
               <a:t>truyền</a:t>
             </a:r>
             <a:r>
-              <a:rPr lang="vi-VN" dirty="0"/>
+              <a:rPr lang="vi-VN" dirty="0">
+                <a:latin typeface="Aptos" panose="020B0004020202020204" pitchFamily="34" charset="0"/>
+              </a:rPr>
               <a:t>), 10-15mA(</a:t>
             </a:r>
             <a:r>
-              <a:rPr lang="en-US" dirty="0" err="1"/>
+              <a:rPr lang="en-US" dirty="0" err="1">
+                <a:latin typeface="Aptos" panose="020B0004020202020204" pitchFamily="34" charset="0"/>
+              </a:rPr>
               <a:t>nhận</a:t>
             </a:r>
             <a:r>
-              <a:rPr lang="en-US" dirty="0"/>
-              <a:t> </a:t>
-            </a:r>
-            <a:r>
-              <a:rPr lang="en-US" dirty="0" err="1"/>
+              <a:rPr lang="en-US" dirty="0">
+                <a:latin typeface="Aptos" panose="020B0004020202020204" pitchFamily="34" charset="0"/>
+              </a:rPr>
+              <a:t> </a:t>
+            </a:r>
+            <a:r>
+              <a:rPr lang="en-US" dirty="0" err="1">
+                <a:latin typeface="Aptos" panose="020B0004020202020204" pitchFamily="34" charset="0"/>
+              </a:rPr>
               <a:t>dữ</a:t>
             </a:r>
             <a:r>
-              <a:rPr lang="en-US" dirty="0"/>
-              <a:t> </a:t>
-            </a:r>
-            <a:r>
-              <a:rPr lang="en-US" dirty="0" err="1"/>
+              <a:rPr lang="en-US" dirty="0">
+                <a:latin typeface="Aptos" panose="020B0004020202020204" pitchFamily="34" charset="0"/>
+              </a:rPr>
+              <a:t> </a:t>
+            </a:r>
+            <a:r>
+              <a:rPr lang="en-US" dirty="0" err="1">
+                <a:latin typeface="Aptos" panose="020B0004020202020204" pitchFamily="34" charset="0"/>
+              </a:rPr>
               <a:t>liệu</a:t>
             </a:r>
             <a:r>
-              <a:rPr lang="vi-VN" dirty="0"/>
+              <a:rPr lang="vi-VN" dirty="0">
+                <a:latin typeface="Aptos" panose="020B0004020202020204" pitchFamily="34" charset="0"/>
+              </a:rPr>
               <a:t>), 0.1-0.2uA(sleep)</a:t>
             </a:r>
           </a:p>
@@ -33452,7 +33752,9 @@
               <a:buChar char="Ø"/>
             </a:pPr>
             <a:r>
-              <a:rPr lang="vi-VN" dirty="0"/>
+              <a:rPr lang="vi-VN" dirty="0">
+                <a:latin typeface="Aptos" panose="020B0004020202020204" pitchFamily="34" charset="0"/>
+              </a:rPr>
               <a:t>Băng tần: 433,868,915MHz</a:t>
             </a:r>
           </a:p>
@@ -33462,7 +33764,9 @@
               <a:buChar char="Ø"/>
             </a:pPr>
             <a:r>
-              <a:rPr lang="vi-VN" dirty="0"/>
+              <a:rPr lang="vi-VN" dirty="0">
+                <a:latin typeface="Aptos" panose="020B0004020202020204" pitchFamily="34" charset="0"/>
+              </a:rPr>
               <a:t>Băng thông: lên đến 500KHz</a:t>
             </a:r>
           </a:p>
@@ -33472,7 +33776,9 @@
               <a:buChar char="Ø"/>
             </a:pPr>
             <a:r>
-              <a:rPr lang="vi-VN" dirty="0"/>
+              <a:rPr lang="vi-VN" dirty="0">
+                <a:latin typeface="Aptos" panose="020B0004020202020204" pitchFamily="34" charset="0"/>
+              </a:rPr>
               <a:t>Tốc độ truyền thấp: &lt;300kbps</a:t>
             </a:r>
           </a:p>
@@ -33482,7 +33788,9 @@
               <a:buChar char="q"/>
             </a:pPr>
             <a:r>
-              <a:rPr lang="vi-VN" dirty="0"/>
+              <a:rPr lang="vi-VN" dirty="0">
+                <a:latin typeface="Aptos" panose="020B0004020202020204" pitchFamily="34" charset="0"/>
+              </a:rPr>
               <a:t>Ứng dụng:</a:t>
             </a:r>
           </a:p>
@@ -33492,7 +33800,9 @@
               <a:buChar char="Ø"/>
             </a:pPr>
             <a:r>
-              <a:rPr lang="vi-VN" dirty="0"/>
+              <a:rPr lang="vi-VN" dirty="0">
+                <a:latin typeface="Aptos" panose="020B0004020202020204" pitchFamily="34" charset="0"/>
+              </a:rPr>
               <a:t>Nông nghiệp</a:t>
             </a:r>
           </a:p>
@@ -33502,7 +33812,9 @@
               <a:buChar char="Ø"/>
             </a:pPr>
             <a:r>
-              <a:rPr lang="vi-VN" dirty="0"/>
+              <a:rPr lang="vi-VN" dirty="0">
+                <a:latin typeface="Aptos" panose="020B0004020202020204" pitchFamily="34" charset="0"/>
+              </a:rPr>
               <a:t>Giám sát, quan trắc môi trường</a:t>
             </a:r>
           </a:p>
@@ -33512,7 +33824,9 @@
               <a:buChar char="Ø"/>
             </a:pPr>
             <a:r>
-              <a:rPr lang="vi-VN" dirty="0"/>
+              <a:rPr lang="vi-VN" dirty="0">
+                <a:latin typeface="Aptos" panose="020B0004020202020204" pitchFamily="34" charset="0"/>
+              </a:rPr>
               <a:t>Định vị</a:t>
             </a:r>
           </a:p>
@@ -33973,7 +34287,7 @@
         <p:spPr>
           <a:xfrm>
             <a:off x="466494" y="1007497"/>
-            <a:ext cx="7827444" cy="3539430"/>
+            <a:ext cx="7827444" cy="5293757"/>
           </a:xfrm>
           <a:prstGeom prst="rect">
             <a:avLst/>
@@ -33987,67 +34301,67 @@
           <a:lstStyle/>
           <a:p>
             <a:r>
-              <a:rPr lang="en-US" sz="1400" dirty="0">
+              <a:rPr lang="en-US" dirty="0">
                 <a:latin typeface="Aptos" panose="020B0004020202020204" pitchFamily="34" charset="0"/>
               </a:rPr>
               <a:t>3.1 </a:t>
             </a:r>
             <a:r>
-              <a:rPr lang="en-US" sz="1400" dirty="0" err="1">
+              <a:rPr lang="en-US" dirty="0" err="1">
                 <a:latin typeface="Aptos" panose="020B0004020202020204" pitchFamily="34" charset="0"/>
               </a:rPr>
               <a:t>Cấu</a:t>
             </a:r>
             <a:r>
-              <a:rPr lang="en-US" sz="1400" dirty="0">
-                <a:latin typeface="Aptos" panose="020B0004020202020204" pitchFamily="34" charset="0"/>
-              </a:rPr>
-              <a:t> </a:t>
-            </a:r>
-            <a:r>
-              <a:rPr lang="en-US" sz="1400" dirty="0" err="1">
+              <a:rPr lang="en-US" dirty="0">
+                <a:latin typeface="Aptos" panose="020B0004020202020204" pitchFamily="34" charset="0"/>
+              </a:rPr>
+              <a:t> </a:t>
+            </a:r>
+            <a:r>
+              <a:rPr lang="en-US" dirty="0" err="1">
                 <a:latin typeface="Aptos" panose="020B0004020202020204" pitchFamily="34" charset="0"/>
               </a:rPr>
               <a:t>hình</a:t>
             </a:r>
             <a:r>
-              <a:rPr lang="en-US" sz="1400" dirty="0">
-                <a:latin typeface="Aptos" panose="020B0004020202020204" pitchFamily="34" charset="0"/>
-              </a:rPr>
-              <a:t> </a:t>
-            </a:r>
-            <a:r>
-              <a:rPr lang="en-US" sz="1400" dirty="0" err="1">
+              <a:rPr lang="en-US" dirty="0">
+                <a:latin typeface="Aptos" panose="020B0004020202020204" pitchFamily="34" charset="0"/>
+              </a:rPr>
+              <a:t> </a:t>
+            </a:r>
+            <a:r>
+              <a:rPr lang="en-US" dirty="0" err="1">
                 <a:latin typeface="Aptos" panose="020B0004020202020204" pitchFamily="34" charset="0"/>
               </a:rPr>
               <a:t>các</a:t>
             </a:r>
             <a:r>
-              <a:rPr lang="en-US" sz="1400" dirty="0">
-                <a:latin typeface="Aptos" panose="020B0004020202020204" pitchFamily="34" charset="0"/>
-              </a:rPr>
-              <a:t> </a:t>
-            </a:r>
-            <a:r>
-              <a:rPr lang="en-US" sz="1400" dirty="0" err="1">
+              <a:rPr lang="en-US" dirty="0">
+                <a:latin typeface="Aptos" panose="020B0004020202020204" pitchFamily="34" charset="0"/>
+              </a:rPr>
+              <a:t> </a:t>
+            </a:r>
+            <a:r>
+              <a:rPr lang="en-US" dirty="0" err="1">
                 <a:latin typeface="Aptos" panose="020B0004020202020204" pitchFamily="34" charset="0"/>
               </a:rPr>
               <a:t>thông</a:t>
             </a:r>
             <a:r>
-              <a:rPr lang="en-US" sz="1400" dirty="0">
-                <a:latin typeface="Aptos" panose="020B0004020202020204" pitchFamily="34" charset="0"/>
-              </a:rPr>
-              <a:t> </a:t>
-            </a:r>
-            <a:r>
-              <a:rPr lang="en-US" sz="1400" dirty="0" err="1">
+              <a:rPr lang="en-US" dirty="0">
+                <a:latin typeface="Aptos" panose="020B0004020202020204" pitchFamily="34" charset="0"/>
+              </a:rPr>
+              <a:t> </a:t>
+            </a:r>
+            <a:r>
+              <a:rPr lang="en-US" dirty="0" err="1">
                 <a:latin typeface="Aptos" panose="020B0004020202020204" pitchFamily="34" charset="0"/>
               </a:rPr>
               <a:t>số</a:t>
             </a:r>
             <a:r>
-              <a:rPr lang="en-US" sz="1400" dirty="0">
+              <a:rPr lang="en-US" dirty="0">
                 <a:latin typeface="Aptos" panose="020B0004020202020204" pitchFamily="34" charset="0"/>
               </a:rPr>
               <a:t> LoRa</a:t>
@@ -34055,259 +34369,259 @@
           </a:p>
           <a:p>
             <a:r>
-              <a:rPr lang="en-US" sz="1400" dirty="0" err="1">
+              <a:rPr lang="en-US" dirty="0" err="1">
                 <a:latin typeface="Aptos" panose="020B0004020202020204" pitchFamily="34" charset="0"/>
               </a:rPr>
               <a:t>Việc</a:t>
             </a:r>
             <a:r>
-              <a:rPr lang="en-US" sz="1400" dirty="0">
-                <a:latin typeface="Aptos" panose="020B0004020202020204" pitchFamily="34" charset="0"/>
-              </a:rPr>
-              <a:t> </a:t>
-            </a:r>
-            <a:r>
-              <a:rPr lang="en-US" sz="1400" dirty="0" err="1">
+              <a:rPr lang="en-US" dirty="0">
+                <a:latin typeface="Aptos" panose="020B0004020202020204" pitchFamily="34" charset="0"/>
+              </a:rPr>
+              <a:t> </a:t>
+            </a:r>
+            <a:r>
+              <a:rPr lang="en-US" dirty="0" err="1">
                 <a:latin typeface="Aptos" panose="020B0004020202020204" pitchFamily="34" charset="0"/>
               </a:rPr>
               <a:t>cấu</a:t>
             </a:r>
             <a:r>
-              <a:rPr lang="en-US" sz="1400" dirty="0">
-                <a:latin typeface="Aptos" panose="020B0004020202020204" pitchFamily="34" charset="0"/>
-              </a:rPr>
-              <a:t> </a:t>
-            </a:r>
-            <a:r>
-              <a:rPr lang="en-US" sz="1400" dirty="0" err="1">
+              <a:rPr lang="en-US" dirty="0">
+                <a:latin typeface="Aptos" panose="020B0004020202020204" pitchFamily="34" charset="0"/>
+              </a:rPr>
+              <a:t> </a:t>
+            </a:r>
+            <a:r>
+              <a:rPr lang="en-US" dirty="0" err="1">
                 <a:latin typeface="Aptos" panose="020B0004020202020204" pitchFamily="34" charset="0"/>
               </a:rPr>
               <a:t>hình</a:t>
             </a:r>
             <a:r>
-              <a:rPr lang="en-US" sz="1400" dirty="0">
+              <a:rPr lang="en-US" dirty="0">
                 <a:latin typeface="Aptos" panose="020B0004020202020204" pitchFamily="34" charset="0"/>
               </a:rPr>
               <a:t> LoRa </a:t>
             </a:r>
             <a:r>
-              <a:rPr lang="en-US" sz="1400" dirty="0" err="1">
+              <a:rPr lang="en-US" dirty="0" err="1">
                 <a:latin typeface="Aptos" panose="020B0004020202020204" pitchFamily="34" charset="0"/>
               </a:rPr>
               <a:t>là</a:t>
             </a:r>
             <a:r>
-              <a:rPr lang="en-US" sz="1400" dirty="0">
-                <a:latin typeface="Aptos" panose="020B0004020202020204" pitchFamily="34" charset="0"/>
-              </a:rPr>
-              <a:t> </a:t>
-            </a:r>
-            <a:r>
-              <a:rPr lang="en-US" sz="1400" dirty="0" err="1">
+              <a:rPr lang="en-US" dirty="0">
+                <a:latin typeface="Aptos" panose="020B0004020202020204" pitchFamily="34" charset="0"/>
+              </a:rPr>
+              <a:t> </a:t>
+            </a:r>
+            <a:r>
+              <a:rPr lang="en-US" dirty="0" err="1">
                 <a:latin typeface="Aptos" panose="020B0004020202020204" pitchFamily="34" charset="0"/>
               </a:rPr>
               <a:t>việc</a:t>
             </a:r>
             <a:r>
-              <a:rPr lang="en-US" sz="1400" dirty="0">
-                <a:latin typeface="Aptos" panose="020B0004020202020204" pitchFamily="34" charset="0"/>
-              </a:rPr>
-              <a:t> </a:t>
-            </a:r>
-            <a:r>
-              <a:rPr lang="en-US" sz="1400" dirty="0" err="1">
+              <a:rPr lang="en-US" dirty="0">
+                <a:latin typeface="Aptos" panose="020B0004020202020204" pitchFamily="34" charset="0"/>
+              </a:rPr>
+              <a:t> </a:t>
+            </a:r>
+            <a:r>
+              <a:rPr lang="en-US" dirty="0" err="1">
                 <a:latin typeface="Aptos" panose="020B0004020202020204" pitchFamily="34" charset="0"/>
               </a:rPr>
               <a:t>ghi</a:t>
             </a:r>
             <a:r>
-              <a:rPr lang="en-US" sz="1400" dirty="0">
-                <a:latin typeface="Aptos" panose="020B0004020202020204" pitchFamily="34" charset="0"/>
-              </a:rPr>
-              <a:t> </a:t>
-            </a:r>
-            <a:r>
-              <a:rPr lang="en-US" sz="1400" dirty="0" err="1">
+              <a:rPr lang="en-US" dirty="0">
+                <a:latin typeface="Aptos" panose="020B0004020202020204" pitchFamily="34" charset="0"/>
+              </a:rPr>
+              <a:t> </a:t>
+            </a:r>
+            <a:r>
+              <a:rPr lang="en-US" dirty="0" err="1">
                 <a:latin typeface="Aptos" panose="020B0004020202020204" pitchFamily="34" charset="0"/>
               </a:rPr>
               <a:t>dữ</a:t>
             </a:r>
             <a:r>
-              <a:rPr lang="en-US" sz="1400" dirty="0">
-                <a:latin typeface="Aptos" panose="020B0004020202020204" pitchFamily="34" charset="0"/>
-              </a:rPr>
-              <a:t> </a:t>
-            </a:r>
-            <a:r>
-              <a:rPr lang="en-US" sz="1400" dirty="0" err="1">
+              <a:rPr lang="en-US" dirty="0">
+                <a:latin typeface="Aptos" panose="020B0004020202020204" pitchFamily="34" charset="0"/>
+              </a:rPr>
+              <a:t> </a:t>
+            </a:r>
+            <a:r>
+              <a:rPr lang="en-US" dirty="0" err="1">
                 <a:latin typeface="Aptos" panose="020B0004020202020204" pitchFamily="34" charset="0"/>
               </a:rPr>
               <a:t>liệu</a:t>
             </a:r>
             <a:r>
-              <a:rPr lang="en-US" sz="1400" dirty="0">
-                <a:latin typeface="Aptos" panose="020B0004020202020204" pitchFamily="34" charset="0"/>
-              </a:rPr>
-              <a:t> </a:t>
-            </a:r>
-            <a:r>
-              <a:rPr lang="en-US" sz="1400" dirty="0" err="1">
+              <a:rPr lang="en-US" dirty="0">
+                <a:latin typeface="Aptos" panose="020B0004020202020204" pitchFamily="34" charset="0"/>
+              </a:rPr>
+              <a:t> </a:t>
+            </a:r>
+            <a:r>
+              <a:rPr lang="en-US" dirty="0" err="1">
                 <a:latin typeface="Aptos" panose="020B0004020202020204" pitchFamily="34" charset="0"/>
               </a:rPr>
               <a:t>vào</a:t>
             </a:r>
             <a:r>
-              <a:rPr lang="en-US" sz="1400" dirty="0">
-                <a:latin typeface="Aptos" panose="020B0004020202020204" pitchFamily="34" charset="0"/>
-              </a:rPr>
-              <a:t> </a:t>
-            </a:r>
-            <a:r>
-              <a:rPr lang="en-US" sz="1400" dirty="0" err="1">
+              <a:rPr lang="en-US" dirty="0">
+                <a:latin typeface="Aptos" panose="020B0004020202020204" pitchFamily="34" charset="0"/>
+              </a:rPr>
+              <a:t> </a:t>
+            </a:r>
+            <a:r>
+              <a:rPr lang="en-US" dirty="0" err="1">
                 <a:latin typeface="Aptos" panose="020B0004020202020204" pitchFamily="34" charset="0"/>
               </a:rPr>
               <a:t>các</a:t>
             </a:r>
             <a:r>
-              <a:rPr lang="en-US" sz="1400" dirty="0">
-                <a:latin typeface="Aptos" panose="020B0004020202020204" pitchFamily="34" charset="0"/>
-              </a:rPr>
-              <a:t> </a:t>
-            </a:r>
-            <a:r>
-              <a:rPr lang="en-US" sz="1400" dirty="0" err="1">
+              <a:rPr lang="en-US" dirty="0">
+                <a:latin typeface="Aptos" panose="020B0004020202020204" pitchFamily="34" charset="0"/>
+              </a:rPr>
+              <a:t> </a:t>
+            </a:r>
+            <a:r>
+              <a:rPr lang="en-US" dirty="0" err="1">
                 <a:latin typeface="Aptos" panose="020B0004020202020204" pitchFamily="34" charset="0"/>
               </a:rPr>
               <a:t>thanh</a:t>
             </a:r>
             <a:r>
-              <a:rPr lang="en-US" sz="1400" dirty="0">
-                <a:latin typeface="Aptos" panose="020B0004020202020204" pitchFamily="34" charset="0"/>
-              </a:rPr>
-              <a:t> </a:t>
-            </a:r>
-            <a:r>
-              <a:rPr lang="en-US" sz="1400" dirty="0" err="1">
+              <a:rPr lang="en-US" dirty="0">
+                <a:latin typeface="Aptos" panose="020B0004020202020204" pitchFamily="34" charset="0"/>
+              </a:rPr>
+              <a:t> </a:t>
+            </a:r>
+            <a:r>
+              <a:rPr lang="en-US" dirty="0" err="1">
                 <a:latin typeface="Aptos" panose="020B0004020202020204" pitchFamily="34" charset="0"/>
               </a:rPr>
               <a:t>ghi</a:t>
             </a:r>
             <a:r>
-              <a:rPr lang="en-US" sz="1400" dirty="0">
-                <a:latin typeface="Aptos" panose="020B0004020202020204" pitchFamily="34" charset="0"/>
-              </a:rPr>
-              <a:t> </a:t>
-            </a:r>
-            <a:r>
-              <a:rPr lang="en-US" sz="1400" dirty="0" err="1">
+              <a:rPr lang="en-US" dirty="0">
+                <a:latin typeface="Aptos" panose="020B0004020202020204" pitchFamily="34" charset="0"/>
+              </a:rPr>
+              <a:t> </a:t>
+            </a:r>
+            <a:r>
+              <a:rPr lang="en-US" dirty="0" err="1">
                 <a:latin typeface="Aptos" panose="020B0004020202020204" pitchFamily="34" charset="0"/>
               </a:rPr>
               <a:t>thông</a:t>
             </a:r>
             <a:r>
-              <a:rPr lang="en-US" sz="1400" dirty="0">
+              <a:rPr lang="en-US" dirty="0">
                 <a:latin typeface="Aptos" panose="020B0004020202020204" pitchFamily="34" charset="0"/>
               </a:rPr>
               <a:t> qua SPI</a:t>
             </a:r>
           </a:p>
           <a:p>
-            <a:endParaRPr lang="en-US" sz="1400" dirty="0">
+            <a:endParaRPr lang="en-US" dirty="0">
               <a:latin typeface="Aptos" panose="020B0004020202020204" pitchFamily="34" charset="0"/>
             </a:endParaRPr>
           </a:p>
           <a:p>
             <a:r>
-              <a:rPr lang="en-US" sz="1400" dirty="0">
+              <a:rPr lang="en-US" dirty="0">
                 <a:latin typeface="Aptos" panose="020B0004020202020204" pitchFamily="34" charset="0"/>
               </a:rPr>
               <a:t>3.1.1 </a:t>
             </a:r>
             <a:r>
-              <a:rPr lang="en-US" sz="1400" dirty="0" err="1">
+              <a:rPr lang="en-US" dirty="0" err="1">
                 <a:latin typeface="Aptos" panose="020B0004020202020204" pitchFamily="34" charset="0"/>
               </a:rPr>
               <a:t>Các</a:t>
             </a:r>
             <a:r>
-              <a:rPr lang="en-US" sz="1400" dirty="0">
-                <a:latin typeface="Aptos" panose="020B0004020202020204" pitchFamily="34" charset="0"/>
-              </a:rPr>
-              <a:t> </a:t>
-            </a:r>
-            <a:r>
-              <a:rPr lang="en-US" sz="1400" dirty="0" err="1">
+              <a:rPr lang="en-US" dirty="0">
+                <a:latin typeface="Aptos" panose="020B0004020202020204" pitchFamily="34" charset="0"/>
+              </a:rPr>
+              <a:t> </a:t>
+            </a:r>
+            <a:r>
+              <a:rPr lang="en-US" dirty="0" err="1">
                 <a:latin typeface="Aptos" panose="020B0004020202020204" pitchFamily="34" charset="0"/>
               </a:rPr>
               <a:t>thông</a:t>
             </a:r>
             <a:r>
-              <a:rPr lang="en-US" sz="1400" dirty="0">
-                <a:latin typeface="Aptos" panose="020B0004020202020204" pitchFamily="34" charset="0"/>
-              </a:rPr>
-              <a:t> </a:t>
-            </a:r>
-            <a:r>
-              <a:rPr lang="en-US" sz="1400" dirty="0" err="1">
+              <a:rPr lang="en-US" dirty="0">
+                <a:latin typeface="Aptos" panose="020B0004020202020204" pitchFamily="34" charset="0"/>
+              </a:rPr>
+              <a:t> </a:t>
+            </a:r>
+            <a:r>
+              <a:rPr lang="en-US" dirty="0" err="1">
                 <a:latin typeface="Aptos" panose="020B0004020202020204" pitchFamily="34" charset="0"/>
               </a:rPr>
               <a:t>số</a:t>
             </a:r>
-            <a:endParaRPr lang="en-US" sz="1400" dirty="0">
+            <a:endParaRPr lang="en-US" dirty="0">
               <a:latin typeface="Aptos" panose="020B0004020202020204" pitchFamily="34" charset="0"/>
             </a:endParaRPr>
           </a:p>
           <a:p>
             <a:r>
-              <a:rPr lang="en-US" sz="1400" dirty="0">
+              <a:rPr lang="en-US" dirty="0">
                 <a:latin typeface="Aptos" panose="020B0004020202020204" pitchFamily="34" charset="0"/>
               </a:rPr>
               <a:t>	3.1.1.1. </a:t>
             </a:r>
             <a:r>
-              <a:rPr lang="en-US" sz="1400" dirty="0" err="1">
+              <a:rPr lang="en-US" dirty="0" err="1">
                 <a:latin typeface="Aptos" panose="020B0004020202020204" pitchFamily="34" charset="0"/>
               </a:rPr>
               <a:t>Hệ</a:t>
             </a:r>
             <a:r>
-              <a:rPr lang="en-US" sz="1400" dirty="0">
-                <a:latin typeface="Aptos" panose="020B0004020202020204" pitchFamily="34" charset="0"/>
-              </a:rPr>
-              <a:t> </a:t>
-            </a:r>
-            <a:r>
-              <a:rPr lang="en-US" sz="1400" dirty="0" err="1">
+              <a:rPr lang="en-US" dirty="0">
+                <a:latin typeface="Aptos" panose="020B0004020202020204" pitchFamily="34" charset="0"/>
+              </a:rPr>
+              <a:t> </a:t>
+            </a:r>
+            <a:r>
+              <a:rPr lang="en-US" dirty="0" err="1">
                 <a:latin typeface="Aptos" panose="020B0004020202020204" pitchFamily="34" charset="0"/>
               </a:rPr>
               <a:t>số</a:t>
             </a:r>
             <a:r>
-              <a:rPr lang="en-US" sz="1400" dirty="0">
-                <a:latin typeface="Aptos" panose="020B0004020202020204" pitchFamily="34" charset="0"/>
-              </a:rPr>
-              <a:t> </a:t>
-            </a:r>
-            <a:r>
-              <a:rPr lang="en-US" sz="1400" dirty="0" err="1">
+              <a:rPr lang="en-US" dirty="0">
+                <a:latin typeface="Aptos" panose="020B0004020202020204" pitchFamily="34" charset="0"/>
+              </a:rPr>
+              <a:t> </a:t>
+            </a:r>
+            <a:r>
+              <a:rPr lang="en-US" dirty="0" err="1">
                 <a:latin typeface="Aptos" panose="020B0004020202020204" pitchFamily="34" charset="0"/>
               </a:rPr>
               <a:t>trải</a:t>
             </a:r>
             <a:r>
-              <a:rPr lang="en-US" sz="1400" dirty="0">
-                <a:latin typeface="Aptos" panose="020B0004020202020204" pitchFamily="34" charset="0"/>
-              </a:rPr>
-              <a:t> </a:t>
-            </a:r>
-            <a:r>
-              <a:rPr lang="en-US" sz="1400" dirty="0" err="1">
+              <a:rPr lang="en-US" dirty="0">
+                <a:latin typeface="Aptos" panose="020B0004020202020204" pitchFamily="34" charset="0"/>
+              </a:rPr>
+              <a:t> </a:t>
+            </a:r>
+            <a:r>
+              <a:rPr lang="en-US" dirty="0" err="1">
                 <a:latin typeface="Aptos" panose="020B0004020202020204" pitchFamily="34" charset="0"/>
               </a:rPr>
               <a:t>phổ</a:t>
             </a:r>
             <a:r>
-              <a:rPr lang="en-US" sz="1400" dirty="0">
+              <a:rPr lang="en-US" dirty="0">
                 <a:latin typeface="Aptos" panose="020B0004020202020204" pitchFamily="34" charset="0"/>
               </a:rPr>
               <a:t> Spreading Factor</a:t>
@@ -34315,7 +34629,7 @@
           </a:p>
           <a:p>
             <a:r>
-              <a:rPr lang="en-US" sz="1400" b="0" i="0" dirty="0">
+              <a:rPr lang="en-US" b="0" i="0" dirty="0">
                 <a:solidFill>
                   <a:srgbClr val="303030"/>
                 </a:solidFill>
@@ -34325,7 +34639,7 @@
               <a:t>	</a:t>
             </a:r>
             <a:r>
-              <a:rPr lang="en-US" sz="1400" i="0" dirty="0" err="1">
+              <a:rPr lang="en-US" i="0" dirty="0" err="1">
                 <a:solidFill>
                   <a:srgbClr val="303030"/>
                 </a:solidFill>
@@ -34335,7 +34649,7 @@
               <a:t>Quá</a:t>
             </a:r>
             <a:r>
-              <a:rPr lang="en-US" sz="1400" i="0" dirty="0">
+              <a:rPr lang="en-US" i="0" dirty="0">
                 <a:solidFill>
                   <a:srgbClr val="303030"/>
                 </a:solidFill>
@@ -34345,7 +34659,7 @@
               <a:t> </a:t>
             </a:r>
             <a:r>
-              <a:rPr lang="en-US" sz="1400" i="0" dirty="0" err="1">
+              <a:rPr lang="en-US" i="0" dirty="0" err="1">
                 <a:solidFill>
                   <a:srgbClr val="303030"/>
                 </a:solidFill>
@@ -34355,7 +34669,7 @@
               <a:t>trình</a:t>
             </a:r>
             <a:r>
-              <a:rPr lang="en-US" sz="1400" i="0" dirty="0">
+              <a:rPr lang="en-US" i="0" dirty="0">
                 <a:solidFill>
                   <a:srgbClr val="303030"/>
                 </a:solidFill>
@@ -34365,7 +34679,7 @@
               <a:t> </a:t>
             </a:r>
             <a:r>
-              <a:rPr lang="en-US" sz="1400" i="0" dirty="0" err="1">
+              <a:rPr lang="en-US" i="0" dirty="0" err="1">
                 <a:solidFill>
                   <a:srgbClr val="303030"/>
                 </a:solidFill>
@@ -34375,7 +34689,7 @@
               <a:t>điều</a:t>
             </a:r>
             <a:r>
-              <a:rPr lang="en-US" sz="1400" i="0" dirty="0">
+              <a:rPr lang="en-US" i="0" dirty="0">
                 <a:solidFill>
                   <a:srgbClr val="303030"/>
                 </a:solidFill>
@@ -34385,7 +34699,7 @@
               <a:t> </a:t>
             </a:r>
             <a:r>
-              <a:rPr lang="en-US" sz="1400" i="0" dirty="0" err="1">
+              <a:rPr lang="en-US" i="0" dirty="0" err="1">
                 <a:solidFill>
                   <a:srgbClr val="303030"/>
                 </a:solidFill>
@@ -34395,7 +34709,7 @@
               <a:t>chế</a:t>
             </a:r>
             <a:r>
-              <a:rPr lang="en-US" sz="1400" i="0" dirty="0">
+              <a:rPr lang="en-US" i="0" dirty="0">
                 <a:solidFill>
                   <a:srgbClr val="303030"/>
                 </a:solidFill>
@@ -34405,7 +34719,7 @@
               <a:t> </a:t>
             </a:r>
             <a:r>
-              <a:rPr lang="en-US" sz="1400" i="0" dirty="0" err="1">
+              <a:rPr lang="en-US" i="0" dirty="0" err="1">
                 <a:solidFill>
                   <a:srgbClr val="303030"/>
                 </a:solidFill>
@@ -34415,7 +34729,7 @@
               <a:t>LoRaTM</a:t>
             </a:r>
             <a:r>
-              <a:rPr lang="en-US" sz="1400" i="0" dirty="0">
+              <a:rPr lang="en-US" i="0" dirty="0">
                 <a:solidFill>
                   <a:srgbClr val="303030"/>
                 </a:solidFill>
@@ -34425,7 +34739,7 @@
               <a:t> </a:t>
             </a:r>
             <a:r>
-              <a:rPr lang="en-US" sz="1400" i="0" dirty="0" err="1">
+              <a:rPr lang="en-US" i="0" dirty="0" err="1">
                 <a:solidFill>
                   <a:srgbClr val="303030"/>
                 </a:solidFill>
@@ -34435,7 +34749,7 @@
               <a:t>thực</a:t>
             </a:r>
             <a:r>
-              <a:rPr lang="en-US" sz="1400" i="0" dirty="0">
+              <a:rPr lang="en-US" i="0" dirty="0">
                 <a:solidFill>
                   <a:srgbClr val="303030"/>
                 </a:solidFill>
@@ -34445,7 +34759,7 @@
               <a:t> </a:t>
             </a:r>
             <a:r>
-              <a:rPr lang="en-US" sz="1400" i="0" dirty="0" err="1">
+              <a:rPr lang="en-US" i="0" dirty="0" err="1">
                 <a:solidFill>
                   <a:srgbClr val="303030"/>
                 </a:solidFill>
@@ -34455,7 +34769,7 @@
               <a:t>hiện</a:t>
             </a:r>
             <a:r>
-              <a:rPr lang="en-US" sz="1400" i="0" dirty="0">
+              <a:rPr lang="en-US" i="0" dirty="0">
                 <a:solidFill>
                   <a:srgbClr val="303030"/>
                 </a:solidFill>
@@ -34465,7 +34779,7 @@
               <a:t> </a:t>
             </a:r>
             <a:r>
-              <a:rPr lang="en-US" sz="1400" i="0" dirty="0" err="1">
+              <a:rPr lang="en-US" i="0" dirty="0" err="1">
                 <a:solidFill>
                   <a:srgbClr val="303030"/>
                 </a:solidFill>
@@ -34475,7 +34789,7 @@
               <a:t>bằng</a:t>
             </a:r>
             <a:r>
-              <a:rPr lang="en-US" sz="1400" i="0" dirty="0">
+              <a:rPr lang="en-US" i="0" dirty="0">
                 <a:solidFill>
                   <a:srgbClr val="303030"/>
                 </a:solidFill>
@@ -34485,7 +34799,7 @@
               <a:t> </a:t>
             </a:r>
             <a:r>
-              <a:rPr lang="en-US" sz="1400" i="0" dirty="0" err="1">
+              <a:rPr lang="en-US" i="0" dirty="0" err="1">
                 <a:solidFill>
                   <a:srgbClr val="303030"/>
                 </a:solidFill>
@@ -34495,7 +34809,7 @@
               <a:t>cách</a:t>
             </a:r>
             <a:r>
-              <a:rPr lang="en-US" sz="1400" i="0" dirty="0">
+              <a:rPr lang="en-US" i="0" dirty="0">
                 <a:solidFill>
                   <a:srgbClr val="303030"/>
                 </a:solidFill>
@@ -34505,7 +34819,7 @@
               <a:t> </a:t>
             </a:r>
             <a:r>
-              <a:rPr lang="en-US" sz="1400" i="0" dirty="0" err="1">
+              <a:rPr lang="en-US" i="0" dirty="0" err="1">
                 <a:solidFill>
                   <a:srgbClr val="303030"/>
                 </a:solidFill>
@@ -34515,7 +34829,7 @@
               <a:t>biểu</a:t>
             </a:r>
             <a:r>
-              <a:rPr lang="en-US" sz="1400" i="0" dirty="0">
+              <a:rPr lang="en-US" i="0" dirty="0">
                 <a:solidFill>
                   <a:srgbClr val="303030"/>
                 </a:solidFill>
@@ -34525,7 +34839,7 @@
               <a:t> </a:t>
             </a:r>
             <a:r>
-              <a:rPr lang="en-US" sz="1400" i="0" dirty="0" err="1">
+              <a:rPr lang="en-US" i="0" dirty="0" err="1">
                 <a:solidFill>
                   <a:srgbClr val="303030"/>
                 </a:solidFill>
@@ -34535,7 +34849,7 @@
               <a:t>diễn</a:t>
             </a:r>
             <a:r>
-              <a:rPr lang="en-US" sz="1400" i="0" dirty="0">
+              <a:rPr lang="en-US" i="0" dirty="0">
                 <a:solidFill>
                   <a:srgbClr val="303030"/>
                 </a:solidFill>
@@ -34545,7 +34859,7 @@
               <a:t> </a:t>
             </a:r>
             <a:r>
-              <a:rPr lang="en-US" sz="1400" i="0" dirty="0" err="1">
+              <a:rPr lang="en-US" i="0" dirty="0" err="1">
                 <a:solidFill>
                   <a:srgbClr val="303030"/>
                 </a:solidFill>
@@ -34555,7 +34869,7 @@
               <a:t>mỗi</a:t>
             </a:r>
             <a:r>
-              <a:rPr lang="en-US" sz="1400" i="0" dirty="0">
+              <a:rPr lang="en-US" i="0" dirty="0">
                 <a:solidFill>
                   <a:srgbClr val="303030"/>
                 </a:solidFill>
@@ -34565,7 +34879,7 @@
               <a:t> bit </a:t>
             </a:r>
             <a:r>
-              <a:rPr lang="en-US" sz="1400" i="0" dirty="0" err="1">
+              <a:rPr lang="en-US" i="0" dirty="0" err="1">
                 <a:solidFill>
                   <a:srgbClr val="303030"/>
                 </a:solidFill>
@@ -34575,7 +34889,7 @@
               <a:t>thông</a:t>
             </a:r>
             <a:r>
-              <a:rPr lang="en-US" sz="1400" i="0" dirty="0">
+              <a:rPr lang="en-US" i="0" dirty="0">
                 <a:solidFill>
                   <a:srgbClr val="303030"/>
                 </a:solidFill>
@@ -34585,7 +34899,7 @@
               <a:t> tin </a:t>
             </a:r>
             <a:r>
-              <a:rPr lang="en-US" sz="1400" i="0" dirty="0" err="1">
+              <a:rPr lang="en-US" i="0" dirty="0" err="1">
                 <a:solidFill>
                   <a:srgbClr val="303030"/>
                 </a:solidFill>
@@ -34595,7 +34909,7 @@
               <a:t>bằng</a:t>
             </a:r>
             <a:r>
-              <a:rPr lang="en-US" sz="1400" i="0" dirty="0">
+              <a:rPr lang="en-US" i="0" dirty="0">
                 <a:solidFill>
                   <a:srgbClr val="303030"/>
                 </a:solidFill>
@@ -34605,7 +34919,7 @@
               <a:t> </a:t>
             </a:r>
             <a:r>
-              <a:rPr lang="en-US" sz="1400" i="0" dirty="0" err="1">
+              <a:rPr lang="en-US" i="0" dirty="0" err="1">
                 <a:solidFill>
                   <a:srgbClr val="303030"/>
                 </a:solidFill>
@@ -34615,7 +34929,7 @@
               <a:t>nhiều</a:t>
             </a:r>
             <a:r>
-              <a:rPr lang="en-US" sz="1400" i="0" dirty="0">
+              <a:rPr lang="en-US" i="0" dirty="0">
                 <a:solidFill>
                   <a:srgbClr val="303030"/>
                 </a:solidFill>
@@ -34625,7 +34939,7 @@
               <a:t> chip </a:t>
             </a:r>
             <a:r>
-              <a:rPr lang="en-US" sz="1400" i="0" dirty="0" err="1">
+              <a:rPr lang="en-US" i="0" dirty="0" err="1">
                 <a:solidFill>
                   <a:srgbClr val="303030"/>
                 </a:solidFill>
@@ -34635,7 +34949,7 @@
               <a:t>thông</a:t>
             </a:r>
             <a:r>
-              <a:rPr lang="en-US" sz="1400" i="0" dirty="0">
+              <a:rPr lang="en-US" i="0" dirty="0">
                 <a:solidFill>
                   <a:srgbClr val="303030"/>
                 </a:solidFill>
@@ -34645,13 +34959,13 @@
               <a:t> tin</a:t>
             </a:r>
             <a:r>
-              <a:rPr lang="en-US" sz="1400" dirty="0">
+              <a:rPr lang="en-US" dirty="0">
                 <a:latin typeface="Aptos" panose="020B0004020202020204" pitchFamily="34" charset="0"/>
               </a:rPr>
               <a:t>. </a:t>
             </a:r>
             <a:r>
-              <a:rPr lang="en-US" sz="1400" dirty="0" err="1">
+              <a:rPr lang="en-US" dirty="0" err="1">
                 <a:solidFill>
                   <a:srgbClr val="303030"/>
                 </a:solidFill>
@@ -34660,7 +34974,7 @@
               <a:t>t</a:t>
             </a:r>
             <a:r>
-              <a:rPr lang="en-US" sz="1400" i="0" dirty="0" err="1">
+              <a:rPr lang="en-US" i="0" dirty="0" err="1">
                 <a:solidFill>
                   <a:srgbClr val="303030"/>
                 </a:solidFill>
@@ -34670,7 +34984,7 @@
               <a:t>ỷ</a:t>
             </a:r>
             <a:r>
-              <a:rPr lang="en-US" sz="1400" i="0" dirty="0">
+              <a:rPr lang="en-US" i="0" dirty="0">
                 <a:solidFill>
                   <a:srgbClr val="303030"/>
                 </a:solidFill>
@@ -34680,7 +34994,7 @@
               <a:t> </a:t>
             </a:r>
             <a:r>
-              <a:rPr lang="en-US" sz="1400" i="0" dirty="0" err="1">
+              <a:rPr lang="en-US" i="0" dirty="0" err="1">
                 <a:solidFill>
                   <a:srgbClr val="303030"/>
                 </a:solidFill>
@@ -34690,7 +35004,7 @@
               <a:t>lệ</a:t>
             </a:r>
             <a:r>
-              <a:rPr lang="en-US" sz="1400" i="0" dirty="0">
+              <a:rPr lang="en-US" i="0" dirty="0">
                 <a:solidFill>
                   <a:srgbClr val="303030"/>
                 </a:solidFill>
@@ -34700,7 +35014,7 @@
               <a:t> </a:t>
             </a:r>
             <a:r>
-              <a:rPr lang="en-US" sz="1400" i="0" dirty="0" err="1">
+              <a:rPr lang="en-US" i="0" dirty="0" err="1">
                 <a:solidFill>
                   <a:srgbClr val="303030"/>
                 </a:solidFill>
@@ -34710,7 +35024,7 @@
               <a:t>giữa</a:t>
             </a:r>
             <a:r>
-              <a:rPr lang="en-US" sz="1400" i="0" dirty="0">
+              <a:rPr lang="en-US" i="0" dirty="0">
                 <a:solidFill>
                   <a:srgbClr val="303030"/>
                 </a:solidFill>
@@ -34720,7 +35034,7 @@
               <a:t> </a:t>
             </a:r>
             <a:r>
-              <a:rPr lang="en-US" sz="1400" i="0" dirty="0" err="1">
+              <a:rPr lang="en-US" i="0" dirty="0" err="1">
                 <a:solidFill>
                   <a:srgbClr val="303030"/>
                 </a:solidFill>
@@ -34730,7 +35044,7 @@
               <a:t>tốc</a:t>
             </a:r>
             <a:r>
-              <a:rPr lang="en-US" sz="1400" i="0" dirty="0">
+              <a:rPr lang="en-US" i="0" dirty="0">
                 <a:solidFill>
                   <a:srgbClr val="303030"/>
                 </a:solidFill>
@@ -34740,7 +35054,7 @@
               <a:t> </a:t>
             </a:r>
             <a:r>
-              <a:rPr lang="en-US" sz="1400" i="0" dirty="0" err="1">
+              <a:rPr lang="en-US" i="0" dirty="0" err="1">
                 <a:solidFill>
                   <a:srgbClr val="303030"/>
                 </a:solidFill>
@@ -34750,7 +35064,7 @@
               <a:t>độ</a:t>
             </a:r>
             <a:r>
-              <a:rPr lang="en-US" sz="1400" i="0" dirty="0">
+              <a:rPr lang="en-US" i="0" dirty="0">
                 <a:solidFill>
                   <a:srgbClr val="303030"/>
                 </a:solidFill>
@@ -34760,7 +35074,7 @@
               <a:t> chip </a:t>
             </a:r>
             <a:r>
-              <a:rPr lang="en-US" sz="1400" i="0" dirty="0" err="1">
+              <a:rPr lang="en-US" i="0" dirty="0" err="1">
                 <a:solidFill>
                   <a:srgbClr val="303030"/>
                 </a:solidFill>
@@ -34770,7 +35084,7 @@
               <a:t>và</a:t>
             </a:r>
             <a:r>
-              <a:rPr lang="en-US" sz="1400" i="0" dirty="0">
+              <a:rPr lang="en-US" i="0" dirty="0">
                 <a:solidFill>
                   <a:srgbClr val="303030"/>
                 </a:solidFill>
@@ -34780,7 +35094,7 @@
               <a:t> </a:t>
             </a:r>
             <a:r>
-              <a:rPr lang="en-US" sz="1400" i="0" dirty="0" err="1">
+              <a:rPr lang="en-US" i="0" dirty="0" err="1">
                 <a:solidFill>
                   <a:srgbClr val="303030"/>
                 </a:solidFill>
@@ -34790,7 +35104,7 @@
               <a:t>tốc</a:t>
             </a:r>
             <a:r>
-              <a:rPr lang="en-US" sz="1400" i="0" dirty="0">
+              <a:rPr lang="en-US" i="0" dirty="0">
                 <a:solidFill>
                   <a:srgbClr val="303030"/>
                 </a:solidFill>
@@ -34800,7 +35114,7 @@
               <a:t> </a:t>
             </a:r>
             <a:r>
-              <a:rPr lang="en-US" sz="1400" i="0" dirty="0" err="1">
+              <a:rPr lang="en-US" i="0" dirty="0" err="1">
                 <a:solidFill>
                   <a:srgbClr val="303030"/>
                 </a:solidFill>
@@ -34810,7 +35124,7 @@
               <a:t>độ</a:t>
             </a:r>
             <a:r>
-              <a:rPr lang="en-US" sz="1400" i="0" dirty="0">
+              <a:rPr lang="en-US" i="0" dirty="0">
                 <a:solidFill>
                   <a:srgbClr val="303030"/>
                 </a:solidFill>
@@ -34820,7 +35134,7 @@
               <a:t> </a:t>
             </a:r>
             <a:r>
-              <a:rPr lang="en-US" sz="1400" i="0" dirty="0" err="1">
+              <a:rPr lang="en-US" i="0" dirty="0" err="1">
                 <a:solidFill>
                   <a:srgbClr val="303030"/>
                 </a:solidFill>
@@ -34830,7 +35144,7 @@
               <a:t>ký</a:t>
             </a:r>
             <a:r>
-              <a:rPr lang="en-US" sz="1400" i="0" dirty="0">
+              <a:rPr lang="en-US" i="0" dirty="0">
                 <a:solidFill>
                   <a:srgbClr val="303030"/>
                 </a:solidFill>
@@ -34840,7 +35154,7 @@
               <a:t> </a:t>
             </a:r>
             <a:r>
-              <a:rPr lang="en-US" sz="1400" i="0" dirty="0" err="1">
+              <a:rPr lang="en-US" i="0" dirty="0" err="1">
                 <a:solidFill>
                   <a:srgbClr val="303030"/>
                 </a:solidFill>
@@ -34850,7 +35164,7 @@
               <a:t>hiệu</a:t>
             </a:r>
             <a:r>
-              <a:rPr lang="en-US" sz="1400" i="0" dirty="0">
+              <a:rPr lang="en-US" i="0" dirty="0">
                 <a:solidFill>
                   <a:srgbClr val="303030"/>
                 </a:solidFill>
@@ -34860,7 +35174,7 @@
               <a:t> </a:t>
             </a:r>
             <a:r>
-              <a:rPr lang="en-US" sz="1400" i="0" dirty="0" err="1">
+              <a:rPr lang="en-US" i="0" dirty="0" err="1">
                 <a:solidFill>
                   <a:srgbClr val="303030"/>
                 </a:solidFill>
@@ -34870,7 +35184,7 @@
               <a:t>chính</a:t>
             </a:r>
             <a:r>
-              <a:rPr lang="en-US" sz="1400" i="0" dirty="0">
+              <a:rPr lang="en-US" i="0" dirty="0">
                 <a:solidFill>
                   <a:srgbClr val="303030"/>
                 </a:solidFill>
@@ -34880,7 +35194,7 @@
               <a:t> </a:t>
             </a:r>
             <a:r>
-              <a:rPr lang="en-US" sz="1400" i="0" dirty="0" err="1">
+              <a:rPr lang="en-US" i="0" dirty="0" err="1">
                 <a:solidFill>
                   <a:srgbClr val="303030"/>
                 </a:solidFill>
@@ -34890,7 +35204,7 @@
               <a:t>là</a:t>
             </a:r>
             <a:r>
-              <a:rPr lang="en-US" sz="1400" i="0" dirty="0">
+              <a:rPr lang="en-US" i="0" dirty="0">
                 <a:solidFill>
                   <a:srgbClr val="303030"/>
                 </a:solidFill>
@@ -34900,7 +35214,7 @@
               <a:t> </a:t>
             </a:r>
             <a:r>
-              <a:rPr lang="en-US" sz="1400" i="0" dirty="0" err="1">
+              <a:rPr lang="en-US" i="0" dirty="0" err="1">
                 <a:solidFill>
                   <a:srgbClr val="303030"/>
                 </a:solidFill>
@@ -34910,7 +35224,7 @@
               <a:t>hệ</a:t>
             </a:r>
             <a:r>
-              <a:rPr lang="en-US" sz="1400" i="0" dirty="0">
+              <a:rPr lang="en-US" i="0" dirty="0">
                 <a:solidFill>
                   <a:srgbClr val="303030"/>
                 </a:solidFill>
@@ -34920,7 +35234,7 @@
               <a:t> </a:t>
             </a:r>
             <a:r>
-              <a:rPr lang="en-US" sz="1400" i="0" dirty="0" err="1">
+              <a:rPr lang="en-US" i="0" dirty="0" err="1">
                 <a:solidFill>
                   <a:srgbClr val="303030"/>
                 </a:solidFill>
@@ -34930,7 +35244,7 @@
               <a:t>số</a:t>
             </a:r>
             <a:r>
-              <a:rPr lang="en-US" sz="1400" i="0" dirty="0">
+              <a:rPr lang="en-US" i="0" dirty="0">
                 <a:solidFill>
                   <a:srgbClr val="303030"/>
                 </a:solidFill>
@@ -34940,7 +35254,7 @@
               <a:t> </a:t>
             </a:r>
             <a:r>
-              <a:rPr lang="en-US" sz="1400" i="0" dirty="0" err="1">
+              <a:rPr lang="en-US" i="0" dirty="0" err="1">
                 <a:solidFill>
                   <a:srgbClr val="303030"/>
                 </a:solidFill>
@@ -34950,7 +35264,7 @@
               <a:t>trải</a:t>
             </a:r>
             <a:r>
-              <a:rPr lang="en-US" sz="1400" i="0" dirty="0">
+              <a:rPr lang="en-US" i="0" dirty="0">
                 <a:solidFill>
                   <a:srgbClr val="303030"/>
                 </a:solidFill>
@@ -34960,7 +35274,7 @@
               <a:t> </a:t>
             </a:r>
             <a:r>
-              <a:rPr lang="en-US" sz="1400" i="0" dirty="0" err="1">
+              <a:rPr lang="en-US" i="0" dirty="0" err="1">
                 <a:solidFill>
                   <a:srgbClr val="303030"/>
                 </a:solidFill>
@@ -34969,7 +35283,7 @@
               </a:rPr>
               <a:t>phổ</a:t>
             </a:r>
-            <a:endParaRPr lang="en-US" sz="1400" dirty="0">
+            <a:endParaRPr lang="en-US" dirty="0">
               <a:solidFill>
                 <a:srgbClr val="303030"/>
               </a:solidFill>
@@ -34978,7 +35292,7 @@
           </a:p>
           <a:p>
             <a:r>
-              <a:rPr lang="en-US" sz="1400" dirty="0">
+              <a:rPr lang="en-US" dirty="0">
                 <a:solidFill>
                   <a:srgbClr val="303030"/>
                 </a:solidFill>
@@ -34987,7 +35301,7 @@
               <a:t>SF=6~12, SF </a:t>
             </a:r>
             <a:r>
-              <a:rPr lang="en-US" sz="1400" dirty="0" err="1">
+              <a:rPr lang="en-US" dirty="0" err="1">
                 <a:solidFill>
                   <a:srgbClr val="303030"/>
                 </a:solidFill>
@@ -34996,7 +35310,7 @@
               <a:t>càng</a:t>
             </a:r>
             <a:r>
-              <a:rPr lang="en-US" sz="1400" dirty="0">
+              <a:rPr lang="en-US" dirty="0">
                 <a:solidFill>
                   <a:srgbClr val="303030"/>
                 </a:solidFill>
@@ -35005,7 +35319,7 @@
               <a:t> </a:t>
             </a:r>
             <a:r>
-              <a:rPr lang="en-US" sz="1400" dirty="0" err="1">
+              <a:rPr lang="en-US" dirty="0" err="1">
                 <a:solidFill>
                   <a:srgbClr val="303030"/>
                 </a:solidFill>
@@ -35014,7 +35328,7 @@
               <a:t>cao</a:t>
             </a:r>
             <a:r>
-              <a:rPr lang="en-US" sz="1400" dirty="0">
+              <a:rPr lang="en-US" dirty="0">
                 <a:solidFill>
                   <a:srgbClr val="303030"/>
                 </a:solidFill>
@@ -35023,7 +35337,7 @@
               <a:t>, </a:t>
             </a:r>
             <a:r>
-              <a:rPr lang="en-US" sz="1400" dirty="0" err="1">
+              <a:rPr lang="en-US" dirty="0" err="1">
                 <a:solidFill>
                   <a:srgbClr val="303030"/>
                 </a:solidFill>
@@ -35032,7 +35346,7 @@
               <a:t>tốc</a:t>
             </a:r>
             <a:r>
-              <a:rPr lang="en-US" sz="1400" dirty="0">
+              <a:rPr lang="en-US" dirty="0">
                 <a:solidFill>
                   <a:srgbClr val="303030"/>
                 </a:solidFill>
@@ -35041,7 +35355,7 @@
               <a:t> </a:t>
             </a:r>
             <a:r>
-              <a:rPr lang="en-US" sz="1400" dirty="0" err="1">
+              <a:rPr lang="en-US" dirty="0" err="1">
                 <a:solidFill>
                   <a:srgbClr val="303030"/>
                 </a:solidFill>
@@ -35050,7 +35364,7 @@
               <a:t>độ</a:t>
             </a:r>
             <a:r>
-              <a:rPr lang="en-US" sz="1400" dirty="0">
+              <a:rPr lang="en-US" dirty="0">
                 <a:solidFill>
                   <a:srgbClr val="303030"/>
                 </a:solidFill>
@@ -35059,7 +35373,7 @@
               <a:t> </a:t>
             </a:r>
             <a:r>
-              <a:rPr lang="en-US" sz="1400" dirty="0" err="1">
+              <a:rPr lang="en-US" dirty="0" err="1">
                 <a:solidFill>
                   <a:srgbClr val="303030"/>
                 </a:solidFill>
@@ -35068,7 +35382,7 @@
               <a:t>truyền</a:t>
             </a:r>
             <a:r>
-              <a:rPr lang="en-US" sz="1400" dirty="0">
+              <a:rPr lang="en-US" dirty="0">
                 <a:solidFill>
                   <a:srgbClr val="303030"/>
                 </a:solidFill>
@@ -35077,7 +35391,7 @@
               <a:t> </a:t>
             </a:r>
             <a:r>
-              <a:rPr lang="en-US" sz="1400" dirty="0" err="1">
+              <a:rPr lang="en-US" dirty="0" err="1">
                 <a:solidFill>
                   <a:srgbClr val="303030"/>
                 </a:solidFill>
@@ -35086,7 +35400,7 @@
               <a:t>càng</a:t>
             </a:r>
             <a:r>
-              <a:rPr lang="en-US" sz="1400" dirty="0">
+              <a:rPr lang="en-US" dirty="0">
                 <a:solidFill>
                   <a:srgbClr val="303030"/>
                 </a:solidFill>
@@ -35095,7 +35409,7 @@
               <a:t> </a:t>
             </a:r>
             <a:r>
-              <a:rPr lang="en-US" sz="1400" dirty="0" err="1">
+              <a:rPr lang="en-US" dirty="0" err="1">
                 <a:solidFill>
                   <a:srgbClr val="303030"/>
                 </a:solidFill>
@@ -35104,7 +35418,7 @@
               <a:t>giảm</a:t>
             </a:r>
             <a:r>
-              <a:rPr lang="en-US" sz="1400" dirty="0">
+              <a:rPr lang="en-US" dirty="0">
                 <a:solidFill>
                   <a:srgbClr val="303030"/>
                 </a:solidFill>
@@ -35113,7 +35427,7 @@
               <a:t>, </a:t>
             </a:r>
             <a:r>
-              <a:rPr lang="en-US" sz="1400" dirty="0" err="1">
+              <a:rPr lang="en-US" dirty="0" err="1">
                 <a:solidFill>
                   <a:srgbClr val="303030"/>
                 </a:solidFill>
@@ -35122,7 +35436,7 @@
               <a:t>bù</a:t>
             </a:r>
             <a:r>
-              <a:rPr lang="en-US" sz="1400" dirty="0">
+              <a:rPr lang="en-US" dirty="0">
                 <a:solidFill>
                   <a:srgbClr val="303030"/>
                 </a:solidFill>
@@ -35131,7 +35445,7 @@
               <a:t> </a:t>
             </a:r>
             <a:r>
-              <a:rPr lang="en-US" sz="1400" dirty="0" err="1">
+              <a:rPr lang="en-US" i="1" dirty="0" err="1">
                 <a:solidFill>
                   <a:srgbClr val="303030"/>
                 </a:solidFill>
@@ -35140,7 +35454,7 @@
               <a:t>lại</a:t>
             </a:r>
             <a:r>
-              <a:rPr lang="en-US" sz="1400" dirty="0">
+              <a:rPr lang="en-US" i="1" dirty="0">
                 <a:solidFill>
                   <a:srgbClr val="303030"/>
                 </a:solidFill>
@@ -35149,7 +35463,7 @@
               <a:t> </a:t>
             </a:r>
             <a:r>
-              <a:rPr lang="en-US" sz="1400" dirty="0" err="1">
+              <a:rPr lang="en-US" i="1" dirty="0" err="1">
                 <a:solidFill>
                   <a:srgbClr val="303030"/>
                 </a:solidFill>
@@ -35158,7 +35472,7 @@
               <a:t>khoảng</a:t>
             </a:r>
             <a:r>
-              <a:rPr lang="en-US" sz="1400" dirty="0">
+              <a:rPr lang="en-US" i="1" dirty="0">
                 <a:solidFill>
                   <a:srgbClr val="303030"/>
                 </a:solidFill>
@@ -35167,7 +35481,7 @@
               <a:t> </a:t>
             </a:r>
             <a:r>
-              <a:rPr lang="en-US" sz="1400" dirty="0" err="1">
+              <a:rPr lang="en-US" i="1" dirty="0" err="1">
                 <a:solidFill>
                   <a:srgbClr val="303030"/>
                 </a:solidFill>
@@ -35176,7 +35490,7 @@
               <a:t>cách</a:t>
             </a:r>
             <a:r>
-              <a:rPr lang="en-US" sz="1400" dirty="0">
+              <a:rPr lang="en-US" i="1" dirty="0">
                 <a:solidFill>
                   <a:srgbClr val="303030"/>
                 </a:solidFill>
@@ -35185,7 +35499,7 @@
               <a:t> </a:t>
             </a:r>
             <a:r>
-              <a:rPr lang="en-US" sz="1400" dirty="0" err="1">
+              <a:rPr lang="en-US" i="1" dirty="0" err="1">
                 <a:solidFill>
                   <a:srgbClr val="303030"/>
                 </a:solidFill>
@@ -35194,7 +35508,7 @@
               <a:t>truyền</a:t>
             </a:r>
             <a:r>
-              <a:rPr lang="en-US" sz="1400" dirty="0">
+              <a:rPr lang="en-US" i="1" dirty="0">
                 <a:solidFill>
                   <a:srgbClr val="303030"/>
                 </a:solidFill>
@@ -35203,7 +35517,7 @@
               <a:t> xa do SNR </a:t>
             </a:r>
             <a:r>
-              <a:rPr lang="en-US" sz="1400" dirty="0" err="1">
+              <a:rPr lang="en-US" i="1" dirty="0" err="1">
                 <a:solidFill>
                   <a:srgbClr val="303030"/>
                 </a:solidFill>
@@ -35211,7 +35525,7 @@
               </a:rPr>
               <a:t>giảm</a:t>
             </a:r>
-            <a:endParaRPr lang="en-US" sz="1400" dirty="0">
+            <a:endParaRPr lang="en-US" i="1" dirty="0">
               <a:solidFill>
                 <a:srgbClr val="303030"/>
               </a:solidFill>
@@ -35220,7 +35534,7 @@
           </a:p>
           <a:p>
             <a:r>
-              <a:rPr lang="en-US" sz="1400" dirty="0">
+              <a:rPr lang="en-US" dirty="0">
                 <a:solidFill>
                   <a:srgbClr val="303030"/>
                 </a:solidFill>
@@ -35231,7 +35545,7 @@
           </a:p>
           <a:p>
             <a:r>
-              <a:rPr lang="en-US" sz="1400" dirty="0" err="1">
+              <a:rPr lang="en-US" dirty="0" err="1">
                 <a:solidFill>
                   <a:srgbClr val="303030"/>
                 </a:solidFill>
@@ -35240,7 +35554,7 @@
               <a:t>Thêm</a:t>
             </a:r>
             <a:r>
-              <a:rPr lang="en-US" sz="1400" dirty="0">
+              <a:rPr lang="en-US" dirty="0">
                 <a:solidFill>
                   <a:srgbClr val="303030"/>
                 </a:solidFill>
@@ -35249,7 +35563,7 @@
               <a:t> </a:t>
             </a:r>
             <a:r>
-              <a:rPr lang="en-US" sz="1400" dirty="0" err="1">
+              <a:rPr lang="en-US" dirty="0" err="1">
                 <a:solidFill>
                   <a:srgbClr val="303030"/>
                 </a:solidFill>
@@ -35258,7 +35572,7 @@
               <a:t>các</a:t>
             </a:r>
             <a:r>
-              <a:rPr lang="en-US" sz="1400" dirty="0">
+              <a:rPr lang="en-US" dirty="0">
                 <a:solidFill>
                   <a:srgbClr val="303030"/>
                 </a:solidFill>
@@ -35267,7 +35581,7 @@
               <a:t> bit </a:t>
             </a:r>
             <a:r>
-              <a:rPr lang="en-US" sz="1400" dirty="0" err="1">
+              <a:rPr lang="en-US" dirty="0" err="1">
                 <a:solidFill>
                   <a:srgbClr val="303030"/>
                 </a:solidFill>
@@ -35276,7 +35590,7 @@
               <a:t>sửa</a:t>
             </a:r>
             <a:r>
-              <a:rPr lang="en-US" sz="1400" dirty="0">
+              <a:rPr lang="en-US" dirty="0">
                 <a:solidFill>
                   <a:srgbClr val="303030"/>
                 </a:solidFill>
@@ -35285,7 +35599,7 @@
               <a:t> </a:t>
             </a:r>
             <a:r>
-              <a:rPr lang="en-US" sz="1400" dirty="0" err="1">
+              <a:rPr lang="en-US" dirty="0" err="1">
                 <a:solidFill>
                   <a:srgbClr val="303030"/>
                 </a:solidFill>
@@ -35294,7 +35608,7 @@
               <a:t>lỗi</a:t>
             </a:r>
             <a:r>
-              <a:rPr lang="en-US" sz="1400" dirty="0">
+              <a:rPr lang="en-US" dirty="0">
                 <a:solidFill>
                   <a:srgbClr val="303030"/>
                 </a:solidFill>
@@ -35305,7 +35619,7 @@
           </a:p>
           <a:p>
             <a:r>
-              <a:rPr lang="en-US" sz="1400" dirty="0">
+              <a:rPr lang="en-US" dirty="0">
                 <a:solidFill>
                   <a:srgbClr val="303030"/>
                 </a:solidFill>
@@ -35313,396 +35627,396 @@
               </a:rPr>
               <a:t>	3.1.1.3. Signal bandwidth kHz</a:t>
             </a:r>
-            <a:endParaRPr lang="en-US" sz="1400" dirty="0">
+            <a:endParaRPr lang="en-US" dirty="0">
               <a:latin typeface="Aptos" panose="020B0004020202020204" pitchFamily="34" charset="0"/>
             </a:endParaRPr>
           </a:p>
           <a:p>
             <a:r>
-              <a:rPr lang="en-US" sz="1400" dirty="0" err="1">
+              <a:rPr lang="en-US" dirty="0" err="1">
                 <a:latin typeface="Aptos" panose="020B0004020202020204" pitchFamily="34" charset="0"/>
               </a:rPr>
               <a:t>Tăng</a:t>
             </a:r>
             <a:r>
-              <a:rPr lang="en-US" sz="1400" dirty="0">
-                <a:latin typeface="Aptos" panose="020B0004020202020204" pitchFamily="34" charset="0"/>
-              </a:rPr>
-              <a:t> </a:t>
-            </a:r>
-            <a:r>
-              <a:rPr lang="en-US" sz="1400" dirty="0" err="1">
+              <a:rPr lang="en-US" dirty="0">
+                <a:latin typeface="Aptos" panose="020B0004020202020204" pitchFamily="34" charset="0"/>
+              </a:rPr>
+              <a:t> </a:t>
+            </a:r>
+            <a:r>
+              <a:rPr lang="en-US" dirty="0" err="1">
                 <a:latin typeface="Aptos" panose="020B0004020202020204" pitchFamily="34" charset="0"/>
               </a:rPr>
               <a:t>tốc</a:t>
             </a:r>
             <a:r>
-              <a:rPr lang="en-US" sz="1400" dirty="0">
-                <a:latin typeface="Aptos" panose="020B0004020202020204" pitchFamily="34" charset="0"/>
-              </a:rPr>
-              <a:t> </a:t>
-            </a:r>
-            <a:r>
-              <a:rPr lang="en-US" sz="1400" dirty="0" err="1">
+              <a:rPr lang="en-US" dirty="0">
+                <a:latin typeface="Aptos" panose="020B0004020202020204" pitchFamily="34" charset="0"/>
+              </a:rPr>
+              <a:t> </a:t>
+            </a:r>
+            <a:r>
+              <a:rPr lang="en-US" dirty="0" err="1">
                 <a:latin typeface="Aptos" panose="020B0004020202020204" pitchFamily="34" charset="0"/>
               </a:rPr>
               <a:t>độ</a:t>
             </a:r>
             <a:r>
-              <a:rPr lang="en-US" sz="1400" dirty="0">
-                <a:latin typeface="Aptos" panose="020B0004020202020204" pitchFamily="34" charset="0"/>
-              </a:rPr>
-              <a:t> </a:t>
-            </a:r>
-            <a:r>
-              <a:rPr lang="en-US" sz="1400" dirty="0" err="1">
+              <a:rPr lang="en-US" dirty="0">
+                <a:latin typeface="Aptos" panose="020B0004020202020204" pitchFamily="34" charset="0"/>
+              </a:rPr>
+              <a:t> </a:t>
+            </a:r>
+            <a:r>
+              <a:rPr lang="en-US" dirty="0" err="1">
                 <a:latin typeface="Aptos" panose="020B0004020202020204" pitchFamily="34" charset="0"/>
               </a:rPr>
               <a:t>truyền</a:t>
             </a:r>
             <a:r>
-              <a:rPr lang="en-US" sz="1400" dirty="0">
-                <a:latin typeface="Aptos" panose="020B0004020202020204" pitchFamily="34" charset="0"/>
-              </a:rPr>
-              <a:t> </a:t>
-            </a:r>
-            <a:r>
-              <a:rPr lang="en-US" sz="1400" dirty="0" err="1">
+              <a:rPr lang="en-US" dirty="0">
+                <a:latin typeface="Aptos" panose="020B0004020202020204" pitchFamily="34" charset="0"/>
+              </a:rPr>
+              <a:t> </a:t>
+            </a:r>
+            <a:r>
+              <a:rPr lang="en-US" dirty="0" err="1">
                 <a:latin typeface="Aptos" panose="020B0004020202020204" pitchFamily="34" charset="0"/>
               </a:rPr>
               <a:t>và</a:t>
             </a:r>
             <a:r>
-              <a:rPr lang="en-US" sz="1400" dirty="0">
-                <a:latin typeface="Aptos" panose="020B0004020202020204" pitchFamily="34" charset="0"/>
-              </a:rPr>
-              <a:t> </a:t>
-            </a:r>
-            <a:r>
-              <a:rPr lang="en-US" sz="1400" dirty="0" err="1">
+              <a:rPr lang="en-US" dirty="0">
+                <a:latin typeface="Aptos" panose="020B0004020202020204" pitchFamily="34" charset="0"/>
+              </a:rPr>
+              <a:t> </a:t>
+            </a:r>
+            <a:r>
+              <a:rPr lang="en-US" dirty="0" err="1">
                 <a:latin typeface="Aptos" panose="020B0004020202020204" pitchFamily="34" charset="0"/>
               </a:rPr>
               <a:t>giảm</a:t>
             </a:r>
             <a:r>
-              <a:rPr lang="en-US" sz="1400" dirty="0">
-                <a:latin typeface="Aptos" panose="020B0004020202020204" pitchFamily="34" charset="0"/>
-              </a:rPr>
-              <a:t> </a:t>
-            </a:r>
-            <a:r>
-              <a:rPr lang="en-US" sz="1400" dirty="0" err="1">
+              <a:rPr lang="en-US" dirty="0">
+                <a:latin typeface="Aptos" panose="020B0004020202020204" pitchFamily="34" charset="0"/>
+              </a:rPr>
+              <a:t> </a:t>
+            </a:r>
+            <a:r>
+              <a:rPr lang="en-US" dirty="0" err="1">
                 <a:latin typeface="Aptos" panose="020B0004020202020204" pitchFamily="34" charset="0"/>
               </a:rPr>
               <a:t>độ</a:t>
             </a:r>
             <a:r>
-              <a:rPr lang="en-US" sz="1400" dirty="0">
-                <a:latin typeface="Aptos" panose="020B0004020202020204" pitchFamily="34" charset="0"/>
-              </a:rPr>
-              <a:t> </a:t>
-            </a:r>
-            <a:r>
-              <a:rPr lang="en-US" sz="1400" dirty="0" err="1">
+              <a:rPr lang="en-US" dirty="0">
+                <a:latin typeface="Aptos" panose="020B0004020202020204" pitchFamily="34" charset="0"/>
+              </a:rPr>
+              <a:t> </a:t>
+            </a:r>
+            <a:r>
+              <a:rPr lang="en-US" dirty="0" err="1">
                 <a:latin typeface="Aptos" panose="020B0004020202020204" pitchFamily="34" charset="0"/>
               </a:rPr>
               <a:t>nhạy</a:t>
             </a:r>
             <a:r>
-              <a:rPr lang="en-US" sz="1400" dirty="0">
-                <a:latin typeface="Aptos" panose="020B0004020202020204" pitchFamily="34" charset="0"/>
-              </a:rPr>
-              <a:t> </a:t>
-            </a:r>
-            <a:r>
-              <a:rPr lang="en-US" sz="1400" dirty="0" err="1">
+              <a:rPr lang="en-US" dirty="0">
+                <a:latin typeface="Aptos" panose="020B0004020202020204" pitchFamily="34" charset="0"/>
+              </a:rPr>
+              <a:t> </a:t>
+            </a:r>
+            <a:r>
+              <a:rPr lang="en-US" dirty="0" err="1">
                 <a:latin typeface="Aptos" panose="020B0004020202020204" pitchFamily="34" charset="0"/>
               </a:rPr>
               <a:t>thu</a:t>
             </a:r>
-            <a:endParaRPr lang="en-US" sz="1400" dirty="0">
+            <a:endParaRPr lang="en-US" dirty="0">
               <a:latin typeface="Aptos" panose="020B0004020202020204" pitchFamily="34" charset="0"/>
             </a:endParaRPr>
           </a:p>
           <a:p>
             <a:r>
-              <a:rPr lang="en-US" sz="1400" dirty="0" err="1">
+              <a:rPr lang="en-US" dirty="0" err="1">
                 <a:latin typeface="Aptos" panose="020B0004020202020204" pitchFamily="34" charset="0"/>
               </a:rPr>
               <a:t>Mối</a:t>
             </a:r>
             <a:r>
-              <a:rPr lang="en-US" sz="1400" dirty="0">
-                <a:latin typeface="Aptos" panose="020B0004020202020204" pitchFamily="34" charset="0"/>
-              </a:rPr>
-              <a:t> </a:t>
-            </a:r>
-            <a:r>
-              <a:rPr lang="en-US" sz="1400" dirty="0" err="1">
+              <a:rPr lang="en-US" dirty="0">
+                <a:latin typeface="Aptos" panose="020B0004020202020204" pitchFamily="34" charset="0"/>
+              </a:rPr>
+              <a:t> </a:t>
+            </a:r>
+            <a:r>
+              <a:rPr lang="en-US" dirty="0" err="1">
                 <a:latin typeface="Aptos" panose="020B0004020202020204" pitchFamily="34" charset="0"/>
               </a:rPr>
               <a:t>liên</a:t>
             </a:r>
             <a:r>
-              <a:rPr lang="en-US" sz="1400" dirty="0">
-                <a:latin typeface="Aptos" panose="020B0004020202020204" pitchFamily="34" charset="0"/>
-              </a:rPr>
-              <a:t> </a:t>
-            </a:r>
-            <a:r>
-              <a:rPr lang="en-US" sz="1400" dirty="0" err="1">
+              <a:rPr lang="en-US" dirty="0">
+                <a:latin typeface="Aptos" panose="020B0004020202020204" pitchFamily="34" charset="0"/>
+              </a:rPr>
+              <a:t> </a:t>
+            </a:r>
+            <a:r>
+              <a:rPr lang="en-US" dirty="0" err="1">
                 <a:latin typeface="Aptos" panose="020B0004020202020204" pitchFamily="34" charset="0"/>
               </a:rPr>
               <a:t>hệ</a:t>
             </a:r>
             <a:r>
-              <a:rPr lang="en-US" sz="1400" dirty="0">
-                <a:latin typeface="Aptos" panose="020B0004020202020204" pitchFamily="34" charset="0"/>
-              </a:rPr>
-              <a:t> </a:t>
-            </a:r>
-            <a:r>
-              <a:rPr lang="en-US" sz="1400" dirty="0" err="1">
+              <a:rPr lang="en-US" dirty="0">
+                <a:latin typeface="Aptos" panose="020B0004020202020204" pitchFamily="34" charset="0"/>
+              </a:rPr>
+              <a:t> </a:t>
+            </a:r>
+            <a:r>
+              <a:rPr lang="en-US" dirty="0" err="1">
                 <a:latin typeface="Aptos" panose="020B0004020202020204" pitchFamily="34" charset="0"/>
               </a:rPr>
               <a:t>giữa</a:t>
             </a:r>
             <a:r>
-              <a:rPr lang="en-US" sz="1400" dirty="0">
+              <a:rPr lang="en-US" dirty="0">
                 <a:latin typeface="Aptos" panose="020B0004020202020204" pitchFamily="34" charset="0"/>
               </a:rPr>
               <a:t> SF, CR, FEC</a:t>
             </a:r>
           </a:p>
           <a:p>
-            <a:endParaRPr lang="en-US" sz="1400" dirty="0">
+            <a:endParaRPr lang="en-US" dirty="0">
               <a:latin typeface="Aptos" panose="020B0004020202020204" pitchFamily="34" charset="0"/>
             </a:endParaRPr>
           </a:p>
           <a:p>
             <a:r>
-              <a:rPr lang="en-US" sz="1400" dirty="0" err="1">
+              <a:rPr lang="en-US" dirty="0" err="1">
                 <a:latin typeface="Aptos" panose="020B0004020202020204" pitchFamily="34" charset="0"/>
               </a:rPr>
               <a:t>Ngoài</a:t>
             </a:r>
             <a:r>
-              <a:rPr lang="en-US" sz="1400" dirty="0">
+              <a:rPr lang="en-US" dirty="0">
                 <a:latin typeface="Aptos" panose="020B0004020202020204" pitchFamily="34" charset="0"/>
               </a:rPr>
               <a:t> 3 </a:t>
             </a:r>
             <a:r>
-              <a:rPr lang="en-US" sz="1400" dirty="0" err="1">
+              <a:rPr lang="en-US" dirty="0" err="1">
                 <a:latin typeface="Aptos" panose="020B0004020202020204" pitchFamily="34" charset="0"/>
               </a:rPr>
               <a:t>thông</a:t>
             </a:r>
             <a:r>
-              <a:rPr lang="en-US" sz="1400" dirty="0">
-                <a:latin typeface="Aptos" panose="020B0004020202020204" pitchFamily="34" charset="0"/>
-              </a:rPr>
-              <a:t> </a:t>
-            </a:r>
-            <a:r>
-              <a:rPr lang="en-US" sz="1400" dirty="0" err="1">
+              <a:rPr lang="en-US" dirty="0">
+                <a:latin typeface="Aptos" panose="020B0004020202020204" pitchFamily="34" charset="0"/>
+              </a:rPr>
+              <a:t> </a:t>
+            </a:r>
+            <a:r>
+              <a:rPr lang="en-US" dirty="0" err="1">
                 <a:latin typeface="Aptos" panose="020B0004020202020204" pitchFamily="34" charset="0"/>
               </a:rPr>
               <a:t>số</a:t>
             </a:r>
             <a:r>
-              <a:rPr lang="en-US" sz="1400" dirty="0">
-                <a:latin typeface="Aptos" panose="020B0004020202020204" pitchFamily="34" charset="0"/>
-              </a:rPr>
-              <a:t> </a:t>
-            </a:r>
-            <a:r>
-              <a:rPr lang="en-US" sz="1400" dirty="0" err="1">
+              <a:rPr lang="en-US" dirty="0">
+                <a:latin typeface="Aptos" panose="020B0004020202020204" pitchFamily="34" charset="0"/>
+              </a:rPr>
+              <a:t> </a:t>
+            </a:r>
+            <a:r>
+              <a:rPr lang="en-US" dirty="0" err="1">
                 <a:latin typeface="Aptos" panose="020B0004020202020204" pitchFamily="34" charset="0"/>
               </a:rPr>
               <a:t>kể</a:t>
             </a:r>
             <a:r>
-              <a:rPr lang="en-US" sz="1400" dirty="0">
-                <a:latin typeface="Aptos" panose="020B0004020202020204" pitchFamily="34" charset="0"/>
-              </a:rPr>
-              <a:t> </a:t>
-            </a:r>
-            <a:r>
-              <a:rPr lang="en-US" sz="1400" dirty="0" err="1">
+              <a:rPr lang="en-US" dirty="0">
+                <a:latin typeface="Aptos" panose="020B0004020202020204" pitchFamily="34" charset="0"/>
+              </a:rPr>
+              <a:t> </a:t>
+            </a:r>
+            <a:r>
+              <a:rPr lang="en-US" dirty="0" err="1">
                 <a:latin typeface="Aptos" panose="020B0004020202020204" pitchFamily="34" charset="0"/>
               </a:rPr>
               <a:t>trên</a:t>
             </a:r>
             <a:r>
-              <a:rPr lang="en-US" sz="1400" dirty="0">
+              <a:rPr lang="en-US" dirty="0">
                 <a:latin typeface="Aptos" panose="020B0004020202020204" pitchFamily="34" charset="0"/>
               </a:rPr>
               <a:t>, </a:t>
             </a:r>
             <a:r>
-              <a:rPr lang="en-US" sz="1400" dirty="0" err="1">
+              <a:rPr lang="en-US" dirty="0" err="1">
                 <a:latin typeface="Aptos" panose="020B0004020202020204" pitchFamily="34" charset="0"/>
               </a:rPr>
               <a:t>các</a:t>
             </a:r>
             <a:r>
-              <a:rPr lang="en-US" sz="1400" dirty="0">
-                <a:latin typeface="Aptos" panose="020B0004020202020204" pitchFamily="34" charset="0"/>
-              </a:rPr>
-              <a:t> </a:t>
-            </a:r>
-            <a:r>
-              <a:rPr lang="en-US" sz="1400" dirty="0" err="1">
+              <a:rPr lang="en-US" dirty="0">
+                <a:latin typeface="Aptos" panose="020B0004020202020204" pitchFamily="34" charset="0"/>
+              </a:rPr>
+              <a:t> </a:t>
+            </a:r>
+            <a:r>
+              <a:rPr lang="en-US" dirty="0" err="1">
                 <a:latin typeface="Aptos" panose="020B0004020202020204" pitchFamily="34" charset="0"/>
               </a:rPr>
               <a:t>thông</a:t>
             </a:r>
             <a:r>
-              <a:rPr lang="en-US" sz="1400" dirty="0">
-                <a:latin typeface="Aptos" panose="020B0004020202020204" pitchFamily="34" charset="0"/>
-              </a:rPr>
-              <a:t> </a:t>
-            </a:r>
-            <a:r>
-              <a:rPr lang="en-US" sz="1400" dirty="0" err="1">
+              <a:rPr lang="en-US" dirty="0">
+                <a:latin typeface="Aptos" panose="020B0004020202020204" pitchFamily="34" charset="0"/>
+              </a:rPr>
+              <a:t> </a:t>
+            </a:r>
+            <a:r>
+              <a:rPr lang="en-US" dirty="0" err="1">
                 <a:latin typeface="Aptos" panose="020B0004020202020204" pitchFamily="34" charset="0"/>
               </a:rPr>
               <a:t>số</a:t>
             </a:r>
             <a:r>
-              <a:rPr lang="en-US" sz="1400" dirty="0">
-                <a:latin typeface="Aptos" panose="020B0004020202020204" pitchFamily="34" charset="0"/>
-              </a:rPr>
-              <a:t> </a:t>
-            </a:r>
-            <a:r>
-              <a:rPr lang="en-US" sz="1400" dirty="0" err="1">
+              <a:rPr lang="en-US" dirty="0">
+                <a:latin typeface="Aptos" panose="020B0004020202020204" pitchFamily="34" charset="0"/>
+              </a:rPr>
+              <a:t> </a:t>
+            </a:r>
+            <a:r>
+              <a:rPr lang="en-US" dirty="0" err="1">
                 <a:latin typeface="Aptos" panose="020B0004020202020204" pitchFamily="34" charset="0"/>
               </a:rPr>
               <a:t>như</a:t>
             </a:r>
             <a:r>
-              <a:rPr lang="en-US" sz="1400" dirty="0">
-                <a:latin typeface="Aptos" panose="020B0004020202020204" pitchFamily="34" charset="0"/>
-              </a:rPr>
-              <a:t> </a:t>
-            </a:r>
-            <a:r>
-              <a:rPr lang="en-US" sz="1400" dirty="0" err="1">
+              <a:rPr lang="en-US" dirty="0">
+                <a:latin typeface="Aptos" panose="020B0004020202020204" pitchFamily="34" charset="0"/>
+              </a:rPr>
+              <a:t> </a:t>
+            </a:r>
+            <a:r>
+              <a:rPr lang="en-US" dirty="0" err="1">
                 <a:latin typeface="Aptos" panose="020B0004020202020204" pitchFamily="34" charset="0"/>
               </a:rPr>
               <a:t>tần</a:t>
             </a:r>
             <a:r>
-              <a:rPr lang="en-US" sz="1400" dirty="0">
-                <a:latin typeface="Aptos" panose="020B0004020202020204" pitchFamily="34" charset="0"/>
-              </a:rPr>
-              <a:t> </a:t>
-            </a:r>
-            <a:r>
-              <a:rPr lang="en-US" sz="1400" dirty="0" err="1">
+              <a:rPr lang="en-US" dirty="0">
+                <a:latin typeface="Aptos" panose="020B0004020202020204" pitchFamily="34" charset="0"/>
+              </a:rPr>
+              <a:t> </a:t>
+            </a:r>
+            <a:r>
+              <a:rPr lang="en-US" dirty="0" err="1">
                 <a:latin typeface="Aptos" panose="020B0004020202020204" pitchFamily="34" charset="0"/>
               </a:rPr>
               <a:t>số</a:t>
             </a:r>
             <a:r>
-              <a:rPr lang="en-US" sz="1400" dirty="0">
+              <a:rPr lang="en-US" dirty="0">
                 <a:latin typeface="Aptos" panose="020B0004020202020204" pitchFamily="34" charset="0"/>
               </a:rPr>
               <a:t>, </a:t>
             </a:r>
             <a:r>
-              <a:rPr lang="en-US" sz="1400" dirty="0" err="1">
+              <a:rPr lang="en-US" dirty="0" err="1">
                 <a:latin typeface="Aptos" panose="020B0004020202020204" pitchFamily="34" charset="0"/>
               </a:rPr>
               <a:t>công</a:t>
             </a:r>
             <a:r>
-              <a:rPr lang="en-US" sz="1400" dirty="0">
-                <a:latin typeface="Aptos" panose="020B0004020202020204" pitchFamily="34" charset="0"/>
-              </a:rPr>
-              <a:t> </a:t>
-            </a:r>
-            <a:r>
-              <a:rPr lang="en-US" sz="1400" dirty="0" err="1">
+              <a:rPr lang="en-US" dirty="0">
+                <a:latin typeface="Aptos" panose="020B0004020202020204" pitchFamily="34" charset="0"/>
+              </a:rPr>
+              <a:t> </a:t>
+            </a:r>
+            <a:r>
+              <a:rPr lang="en-US" dirty="0" err="1">
                 <a:latin typeface="Aptos" panose="020B0004020202020204" pitchFamily="34" charset="0"/>
               </a:rPr>
               <a:t>suất</a:t>
             </a:r>
             <a:r>
-              <a:rPr lang="en-US" sz="1400" dirty="0">
-                <a:latin typeface="Aptos" panose="020B0004020202020204" pitchFamily="34" charset="0"/>
-              </a:rPr>
-              <a:t> </a:t>
-            </a:r>
-            <a:r>
-              <a:rPr lang="en-US" sz="1400" dirty="0" err="1">
+              <a:rPr lang="en-US" dirty="0">
+                <a:latin typeface="Aptos" panose="020B0004020202020204" pitchFamily="34" charset="0"/>
+              </a:rPr>
+              <a:t> </a:t>
+            </a:r>
+            <a:r>
+              <a:rPr lang="en-US" dirty="0" err="1">
                 <a:latin typeface="Aptos" panose="020B0004020202020204" pitchFamily="34" charset="0"/>
               </a:rPr>
               <a:t>phát</a:t>
             </a:r>
             <a:r>
-              <a:rPr lang="en-US" sz="1400" dirty="0">
-                <a:latin typeface="Aptos" panose="020B0004020202020204" pitchFamily="34" charset="0"/>
-              </a:rPr>
-              <a:t> </a:t>
-            </a:r>
-            <a:r>
-              <a:rPr lang="en-US" sz="1400" dirty="0" err="1">
+              <a:rPr lang="en-US" dirty="0">
+                <a:latin typeface="Aptos" panose="020B0004020202020204" pitchFamily="34" charset="0"/>
+              </a:rPr>
+              <a:t> </a:t>
+            </a:r>
+            <a:r>
+              <a:rPr lang="en-US" dirty="0" err="1">
                 <a:latin typeface="Aptos" panose="020B0004020202020204" pitchFamily="34" charset="0"/>
               </a:rPr>
               <a:t>cũng</a:t>
             </a:r>
             <a:r>
-              <a:rPr lang="en-US" sz="1400" dirty="0">
-                <a:latin typeface="Aptos" panose="020B0004020202020204" pitchFamily="34" charset="0"/>
-              </a:rPr>
-              <a:t> </a:t>
-            </a:r>
-            <a:r>
-              <a:rPr lang="en-US" sz="1400" dirty="0" err="1">
+              <a:rPr lang="en-US" dirty="0">
+                <a:latin typeface="Aptos" panose="020B0004020202020204" pitchFamily="34" charset="0"/>
+              </a:rPr>
+              <a:t> </a:t>
+            </a:r>
+            <a:r>
+              <a:rPr lang="en-US" dirty="0" err="1">
                 <a:latin typeface="Aptos" panose="020B0004020202020204" pitchFamily="34" charset="0"/>
               </a:rPr>
               <a:t>cần</a:t>
             </a:r>
             <a:r>
-              <a:rPr lang="en-US" sz="1400" dirty="0">
-                <a:latin typeface="Aptos" panose="020B0004020202020204" pitchFamily="34" charset="0"/>
-              </a:rPr>
-              <a:t> </a:t>
-            </a:r>
-            <a:r>
-              <a:rPr lang="en-US" sz="1400" dirty="0" err="1">
+              <a:rPr lang="en-US" dirty="0">
+                <a:latin typeface="Aptos" panose="020B0004020202020204" pitchFamily="34" charset="0"/>
+              </a:rPr>
+              <a:t> </a:t>
+            </a:r>
+            <a:r>
+              <a:rPr lang="en-US" dirty="0" err="1">
                 <a:latin typeface="Aptos" panose="020B0004020202020204" pitchFamily="34" charset="0"/>
               </a:rPr>
               <a:t>được</a:t>
             </a:r>
             <a:r>
-              <a:rPr lang="en-US" sz="1400" dirty="0">
-                <a:latin typeface="Aptos" panose="020B0004020202020204" pitchFamily="34" charset="0"/>
-              </a:rPr>
-              <a:t> </a:t>
-            </a:r>
-            <a:r>
-              <a:rPr lang="en-US" sz="1400" dirty="0" err="1">
+              <a:rPr lang="en-US" dirty="0">
+                <a:latin typeface="Aptos" panose="020B0004020202020204" pitchFamily="34" charset="0"/>
+              </a:rPr>
+              <a:t> </a:t>
+            </a:r>
+            <a:r>
+              <a:rPr lang="en-US" dirty="0" err="1">
                 <a:latin typeface="Aptos" panose="020B0004020202020204" pitchFamily="34" charset="0"/>
               </a:rPr>
               <a:t>cấu</a:t>
             </a:r>
             <a:r>
-              <a:rPr lang="en-US" sz="1400" dirty="0">
-                <a:latin typeface="Aptos" panose="020B0004020202020204" pitchFamily="34" charset="0"/>
-              </a:rPr>
-              <a:t> </a:t>
-            </a:r>
-            <a:r>
-              <a:rPr lang="en-US" sz="1400" dirty="0" err="1">
+              <a:rPr lang="en-US" dirty="0">
+                <a:latin typeface="Aptos" panose="020B0004020202020204" pitchFamily="34" charset="0"/>
+              </a:rPr>
+              <a:t> </a:t>
+            </a:r>
+            <a:r>
+              <a:rPr lang="en-US" dirty="0" err="1">
                 <a:latin typeface="Aptos" panose="020B0004020202020204" pitchFamily="34" charset="0"/>
               </a:rPr>
               <a:t>hình</a:t>
             </a:r>
-            <a:endParaRPr lang="en-US" sz="1400" dirty="0">
+            <a:endParaRPr lang="en-US" dirty="0">
               <a:latin typeface="Aptos" panose="020B0004020202020204" pitchFamily="34" charset="0"/>
             </a:endParaRPr>
           </a:p>
@@ -35735,7 +36049,7 @@
         </p:blipFill>
         <p:spPr>
           <a:xfrm>
-            <a:off x="5759531" y="2888528"/>
+            <a:off x="5547094" y="4190856"/>
             <a:ext cx="2215704" cy="937554"/>
           </a:xfrm>
           <a:prstGeom prst="rect">
@@ -35765,7 +36079,7 @@
         </p:blipFill>
         <p:spPr>
           <a:xfrm>
-            <a:off x="3689414" y="2903449"/>
+            <a:off x="4380216" y="3654375"/>
             <a:ext cx="1095528" cy="647790"/>
           </a:xfrm>
           <a:prstGeom prst="rect">
@@ -35882,7 +36196,7 @@
         <p:spPr>
           <a:xfrm>
             <a:off x="466494" y="1007497"/>
-            <a:ext cx="3930142" cy="3970318"/>
+            <a:ext cx="3930142" cy="5078313"/>
           </a:xfrm>
           <a:prstGeom prst="rect">
             <a:avLst/>
@@ -35896,31 +36210,31 @@
           <a:lstStyle/>
           <a:p>
             <a:r>
-              <a:rPr lang="en-US" sz="1400" dirty="0">
+              <a:rPr lang="en-US" dirty="0">
                 <a:latin typeface="Aptos" panose="020B0004020202020204" pitchFamily="34" charset="0"/>
               </a:rPr>
               <a:t>3.2 </a:t>
             </a:r>
             <a:r>
-              <a:rPr lang="en-US" sz="1400" dirty="0" err="1">
+              <a:rPr lang="en-US" dirty="0" err="1">
                 <a:latin typeface="Aptos" panose="020B0004020202020204" pitchFamily="34" charset="0"/>
               </a:rPr>
               <a:t>Khung</a:t>
             </a:r>
             <a:r>
-              <a:rPr lang="en-US" sz="1400" dirty="0">
-                <a:latin typeface="Aptos" panose="020B0004020202020204" pitchFamily="34" charset="0"/>
-              </a:rPr>
-              <a:t> </a:t>
-            </a:r>
-            <a:r>
-              <a:rPr lang="en-US" sz="1400" dirty="0" err="1">
+              <a:rPr lang="en-US" dirty="0">
+                <a:latin typeface="Aptos" panose="020B0004020202020204" pitchFamily="34" charset="0"/>
+              </a:rPr>
+              <a:t> </a:t>
+            </a:r>
+            <a:r>
+              <a:rPr lang="en-US" dirty="0" err="1">
                 <a:latin typeface="Aptos" panose="020B0004020202020204" pitchFamily="34" charset="0"/>
               </a:rPr>
               <a:t>truyền</a:t>
             </a:r>
             <a:r>
-              <a:rPr lang="en-US" sz="1400" dirty="0">
+              <a:rPr lang="en-US" dirty="0">
                 <a:latin typeface="Aptos" panose="020B0004020202020204" pitchFamily="34" charset="0"/>
               </a:rPr>
               <a:t> tin</a:t>
@@ -35928,25 +36242,31 @@
           </a:p>
           <a:p>
             <a:r>
-              <a:rPr lang="en-US" sz="1400" dirty="0" err="1">
+              <a:rPr lang="en-US" dirty="0">
+                <a:latin typeface="Aptos" panose="020B0004020202020204" pitchFamily="34" charset="0"/>
+              </a:rPr>
+              <a:t>	</a:t>
+            </a:r>
+            <a:r>
+              <a:rPr lang="en-US" dirty="0" err="1">
                 <a:latin typeface="Aptos" panose="020B0004020202020204" pitchFamily="34" charset="0"/>
               </a:rPr>
               <a:t>Khung</a:t>
             </a:r>
             <a:r>
-              <a:rPr lang="en-US" sz="1400" dirty="0">
-                <a:latin typeface="Aptos" panose="020B0004020202020204" pitchFamily="34" charset="0"/>
-              </a:rPr>
-              <a:t> </a:t>
-            </a:r>
-            <a:r>
-              <a:rPr lang="en-US" sz="1400" dirty="0" err="1">
+              <a:rPr lang="en-US" dirty="0">
+                <a:latin typeface="Aptos" panose="020B0004020202020204" pitchFamily="34" charset="0"/>
+              </a:rPr>
+              <a:t> </a:t>
+            </a:r>
+            <a:r>
+              <a:rPr lang="en-US" dirty="0" err="1">
                 <a:latin typeface="Aptos" panose="020B0004020202020204" pitchFamily="34" charset="0"/>
               </a:rPr>
               <a:t>bản</a:t>
             </a:r>
             <a:r>
-              <a:rPr lang="en-US" sz="1400" dirty="0">
+              <a:rPr lang="en-US" dirty="0">
                 <a:latin typeface="Aptos" panose="020B0004020202020204" pitchFamily="34" charset="0"/>
               </a:rPr>
               <a:t> tin explicit:</a:t>
@@ -35954,127 +36274,127 @@
           </a:p>
           <a:p>
             <a:r>
-              <a:rPr lang="en-US" sz="1400" dirty="0">
+              <a:rPr lang="en-US" dirty="0">
                 <a:latin typeface="Aptos" panose="020B0004020202020204" pitchFamily="34" charset="0"/>
               </a:rPr>
               <a:t>Preamble : </a:t>
             </a:r>
             <a:r>
-              <a:rPr lang="en-US" sz="1400" dirty="0" err="1">
+              <a:rPr lang="en-US" dirty="0" err="1">
                 <a:latin typeface="Aptos" panose="020B0004020202020204" pitchFamily="34" charset="0"/>
               </a:rPr>
               <a:t>đồng</a:t>
             </a:r>
             <a:r>
-              <a:rPr lang="en-US" sz="1400" dirty="0">
-                <a:latin typeface="Aptos" panose="020B0004020202020204" pitchFamily="34" charset="0"/>
-              </a:rPr>
-              <a:t> </a:t>
-            </a:r>
-            <a:r>
-              <a:rPr lang="en-US" sz="1400" dirty="0" err="1">
+              <a:rPr lang="en-US" dirty="0">
+                <a:latin typeface="Aptos" panose="020B0004020202020204" pitchFamily="34" charset="0"/>
+              </a:rPr>
+              <a:t> </a:t>
+            </a:r>
+            <a:r>
+              <a:rPr lang="en-US" dirty="0" err="1">
                 <a:latin typeface="Aptos" panose="020B0004020202020204" pitchFamily="34" charset="0"/>
               </a:rPr>
               <a:t>bộ</a:t>
             </a:r>
             <a:r>
-              <a:rPr lang="en-US" sz="1400" dirty="0">
-                <a:latin typeface="Aptos" panose="020B0004020202020204" pitchFamily="34" charset="0"/>
-              </a:rPr>
-              <a:t> </a:t>
-            </a:r>
-            <a:r>
-              <a:rPr lang="en-US" sz="1400" dirty="0" err="1">
+              <a:rPr lang="en-US" dirty="0">
+                <a:latin typeface="Aptos" panose="020B0004020202020204" pitchFamily="34" charset="0"/>
+              </a:rPr>
+              <a:t> </a:t>
+            </a:r>
+            <a:r>
+              <a:rPr lang="en-US" dirty="0" err="1">
                 <a:latin typeface="Aptos" panose="020B0004020202020204" pitchFamily="34" charset="0"/>
               </a:rPr>
               <a:t>tín</a:t>
             </a:r>
             <a:r>
-              <a:rPr lang="en-US" sz="1400" dirty="0">
-                <a:latin typeface="Aptos" panose="020B0004020202020204" pitchFamily="34" charset="0"/>
-              </a:rPr>
-              <a:t> </a:t>
-            </a:r>
-            <a:r>
-              <a:rPr lang="en-US" sz="1400" dirty="0" err="1">
+              <a:rPr lang="en-US" dirty="0">
+                <a:latin typeface="Aptos" panose="020B0004020202020204" pitchFamily="34" charset="0"/>
+              </a:rPr>
+              <a:t> </a:t>
+            </a:r>
+            <a:r>
+              <a:rPr lang="en-US" dirty="0" err="1">
                 <a:latin typeface="Aptos" panose="020B0004020202020204" pitchFamily="34" charset="0"/>
               </a:rPr>
               <a:t>hiệu</a:t>
             </a:r>
             <a:r>
-              <a:rPr lang="en-US" sz="1400" dirty="0">
+              <a:rPr lang="en-US" dirty="0">
                 <a:latin typeface="Aptos" panose="020B0004020202020204" pitchFamily="34" charset="0"/>
               </a:rPr>
               <a:t>, </a:t>
             </a:r>
             <a:r>
-              <a:rPr lang="en-US" sz="1400" dirty="0" err="1">
+              <a:rPr lang="en-US" dirty="0" err="1">
                 <a:latin typeface="Aptos" panose="020B0004020202020204" pitchFamily="34" charset="0"/>
               </a:rPr>
               <a:t>có</a:t>
             </a:r>
             <a:r>
-              <a:rPr lang="en-US" sz="1400" dirty="0">
-                <a:latin typeface="Aptos" panose="020B0004020202020204" pitchFamily="34" charset="0"/>
-              </a:rPr>
-              <a:t> </a:t>
-            </a:r>
-            <a:r>
-              <a:rPr lang="en-US" sz="1400" dirty="0" err="1">
+              <a:rPr lang="en-US" dirty="0">
+                <a:latin typeface="Aptos" panose="020B0004020202020204" pitchFamily="34" charset="0"/>
+              </a:rPr>
+              <a:t> </a:t>
+            </a:r>
+            <a:r>
+              <a:rPr lang="en-US" dirty="0" err="1">
                 <a:latin typeface="Aptos" panose="020B0004020202020204" pitchFamily="34" charset="0"/>
               </a:rPr>
               <a:t>thể</a:t>
             </a:r>
             <a:r>
-              <a:rPr lang="en-US" sz="1400" dirty="0">
-                <a:latin typeface="Aptos" panose="020B0004020202020204" pitchFamily="34" charset="0"/>
-              </a:rPr>
-              <a:t> </a:t>
-            </a:r>
-            <a:r>
-              <a:rPr lang="en-US" sz="1400" dirty="0" err="1">
+              <a:rPr lang="en-US" dirty="0">
+                <a:latin typeface="Aptos" panose="020B0004020202020204" pitchFamily="34" charset="0"/>
+              </a:rPr>
+              <a:t> </a:t>
+            </a:r>
+            <a:r>
+              <a:rPr lang="en-US" dirty="0" err="1">
                 <a:latin typeface="Aptos" panose="020B0004020202020204" pitchFamily="34" charset="0"/>
               </a:rPr>
               <a:t>thay</a:t>
             </a:r>
             <a:r>
-              <a:rPr lang="en-US" sz="1400" dirty="0">
-                <a:latin typeface="Aptos" panose="020B0004020202020204" pitchFamily="34" charset="0"/>
-              </a:rPr>
-              <a:t> </a:t>
-            </a:r>
-            <a:r>
-              <a:rPr lang="en-US" sz="1400" dirty="0" err="1">
+              <a:rPr lang="en-US" dirty="0">
+                <a:latin typeface="Aptos" panose="020B0004020202020204" pitchFamily="34" charset="0"/>
+              </a:rPr>
+              <a:t> </a:t>
+            </a:r>
+            <a:r>
+              <a:rPr lang="en-US" dirty="0" err="1">
                 <a:latin typeface="Aptos" panose="020B0004020202020204" pitchFamily="34" charset="0"/>
               </a:rPr>
               <a:t>đổi</a:t>
             </a:r>
             <a:r>
-              <a:rPr lang="en-US" sz="1400" dirty="0">
-                <a:latin typeface="Aptos" panose="020B0004020202020204" pitchFamily="34" charset="0"/>
-              </a:rPr>
-              <a:t> </a:t>
-            </a:r>
-            <a:r>
-              <a:rPr lang="en-US" sz="1400" dirty="0" err="1">
+              <a:rPr lang="en-US" dirty="0">
+                <a:latin typeface="Aptos" panose="020B0004020202020204" pitchFamily="34" charset="0"/>
+              </a:rPr>
+              <a:t> </a:t>
+            </a:r>
+            <a:r>
+              <a:rPr lang="en-US" dirty="0" err="1">
                 <a:latin typeface="Aptos" panose="020B0004020202020204" pitchFamily="34" charset="0"/>
               </a:rPr>
               <a:t>độ</a:t>
             </a:r>
             <a:r>
-              <a:rPr lang="en-US" sz="1400" dirty="0">
-                <a:latin typeface="Aptos" panose="020B0004020202020204" pitchFamily="34" charset="0"/>
-              </a:rPr>
-              <a:t> </a:t>
-            </a:r>
-            <a:r>
-              <a:rPr lang="en-US" sz="1400" dirty="0" err="1">
+              <a:rPr lang="en-US" dirty="0">
+                <a:latin typeface="Aptos" panose="020B0004020202020204" pitchFamily="34" charset="0"/>
+              </a:rPr>
+              <a:t> </a:t>
+            </a:r>
+            <a:r>
+              <a:rPr lang="en-US" dirty="0" err="1">
                 <a:latin typeface="Aptos" panose="020B0004020202020204" pitchFamily="34" charset="0"/>
               </a:rPr>
               <a:t>dài</a:t>
             </a:r>
             <a:r>
-              <a:rPr lang="en-US" sz="1400" dirty="0">
+              <a:rPr lang="en-US" dirty="0">
                 <a:latin typeface="Aptos" panose="020B0004020202020204" pitchFamily="34" charset="0"/>
               </a:rPr>
               <a:t> </a:t>
@@ -36082,13 +36402,13 @@
           </a:p>
           <a:p>
             <a:r>
-              <a:rPr lang="en-US" sz="1400" dirty="0" err="1">
+              <a:rPr lang="en-US" dirty="0" err="1">
                 <a:latin typeface="Aptos" panose="020B0004020202020204" pitchFamily="34" charset="0"/>
               </a:rPr>
               <a:t>từ</a:t>
             </a:r>
             <a:r>
-              <a:rPr lang="en-US" sz="1400" dirty="0">
+              <a:rPr lang="en-US" dirty="0">
                 <a:latin typeface="Aptos" panose="020B0004020202020204" pitchFamily="34" charset="0"/>
               </a:rPr>
               <a:t> 6+4 ~ 65535+4</a:t>
@@ -36096,127 +36416,127 @@
           </a:p>
           <a:p>
             <a:r>
-              <a:rPr lang="en-US" sz="1400" dirty="0">
+              <a:rPr lang="en-US" dirty="0">
                 <a:latin typeface="Aptos" panose="020B0004020202020204" pitchFamily="34" charset="0"/>
               </a:rPr>
               <a:t>Header: </a:t>
             </a:r>
             <a:r>
-              <a:rPr lang="en-US" sz="1400" dirty="0" err="1">
+              <a:rPr lang="en-US" dirty="0" err="1">
                 <a:latin typeface="Aptos" panose="020B0004020202020204" pitchFamily="34" charset="0"/>
               </a:rPr>
               <a:t>chứa</a:t>
             </a:r>
             <a:r>
-              <a:rPr lang="en-US" sz="1400" dirty="0">
-                <a:latin typeface="Aptos" panose="020B0004020202020204" pitchFamily="34" charset="0"/>
-              </a:rPr>
-              <a:t> </a:t>
-            </a:r>
-            <a:r>
-              <a:rPr lang="en-US" sz="1400" dirty="0" err="1">
+              <a:rPr lang="en-US" dirty="0">
+                <a:latin typeface="Aptos" panose="020B0004020202020204" pitchFamily="34" charset="0"/>
+              </a:rPr>
+              <a:t> </a:t>
+            </a:r>
+            <a:r>
+              <a:rPr lang="en-US" dirty="0" err="1">
                 <a:latin typeface="Aptos" panose="020B0004020202020204" pitchFamily="34" charset="0"/>
               </a:rPr>
               <a:t>dữ</a:t>
             </a:r>
             <a:r>
-              <a:rPr lang="en-US" sz="1400" dirty="0">
-                <a:latin typeface="Aptos" panose="020B0004020202020204" pitchFamily="34" charset="0"/>
-              </a:rPr>
-              <a:t> </a:t>
-            </a:r>
-            <a:r>
-              <a:rPr lang="en-US" sz="1400" dirty="0" err="1">
+              <a:rPr lang="en-US" dirty="0">
+                <a:latin typeface="Aptos" panose="020B0004020202020204" pitchFamily="34" charset="0"/>
+              </a:rPr>
+              <a:t> </a:t>
+            </a:r>
+            <a:r>
+              <a:rPr lang="en-US" dirty="0" err="1">
                 <a:latin typeface="Aptos" panose="020B0004020202020204" pitchFamily="34" charset="0"/>
               </a:rPr>
               <a:t>liệu</a:t>
             </a:r>
             <a:r>
-              <a:rPr lang="en-US" sz="1400" dirty="0">
-                <a:latin typeface="Aptos" panose="020B0004020202020204" pitchFamily="34" charset="0"/>
-              </a:rPr>
-              <a:t> </a:t>
-            </a:r>
-            <a:r>
-              <a:rPr lang="en-US" sz="1400" dirty="0" err="1">
+              <a:rPr lang="en-US" dirty="0">
+                <a:latin typeface="Aptos" panose="020B0004020202020204" pitchFamily="34" charset="0"/>
+              </a:rPr>
+              <a:t> </a:t>
+            </a:r>
+            <a:r>
+              <a:rPr lang="en-US" dirty="0" err="1">
                 <a:latin typeface="Aptos" panose="020B0004020202020204" pitchFamily="34" charset="0"/>
               </a:rPr>
               <a:t>về</a:t>
             </a:r>
             <a:r>
-              <a:rPr lang="en-US" sz="1400" dirty="0">
-                <a:latin typeface="Aptos" panose="020B0004020202020204" pitchFamily="34" charset="0"/>
-              </a:rPr>
-              <a:t> </a:t>
-            </a:r>
-            <a:r>
-              <a:rPr lang="en-US" sz="1400" dirty="0" err="1">
+              <a:rPr lang="en-US" dirty="0">
+                <a:latin typeface="Aptos" panose="020B0004020202020204" pitchFamily="34" charset="0"/>
+              </a:rPr>
+              <a:t> </a:t>
+            </a:r>
+            <a:r>
+              <a:rPr lang="en-US" dirty="0" err="1">
                 <a:latin typeface="Aptos" panose="020B0004020202020204" pitchFamily="34" charset="0"/>
               </a:rPr>
               <a:t>độ</a:t>
             </a:r>
             <a:r>
-              <a:rPr lang="en-US" sz="1400" dirty="0">
-                <a:latin typeface="Aptos" panose="020B0004020202020204" pitchFamily="34" charset="0"/>
-              </a:rPr>
-              <a:t> </a:t>
-            </a:r>
-            <a:r>
-              <a:rPr lang="en-US" sz="1400" dirty="0" err="1">
+              <a:rPr lang="en-US" dirty="0">
+                <a:latin typeface="Aptos" panose="020B0004020202020204" pitchFamily="34" charset="0"/>
+              </a:rPr>
+              <a:t> </a:t>
+            </a:r>
+            <a:r>
+              <a:rPr lang="en-US" dirty="0" err="1">
                 <a:latin typeface="Aptos" panose="020B0004020202020204" pitchFamily="34" charset="0"/>
               </a:rPr>
               <a:t>dài</a:t>
             </a:r>
             <a:r>
-              <a:rPr lang="en-US" sz="1400" dirty="0">
+              <a:rPr lang="en-US" dirty="0">
                 <a:latin typeface="Aptos" panose="020B0004020202020204" pitchFamily="34" charset="0"/>
               </a:rPr>
               <a:t> payload (byte), CRC </a:t>
             </a:r>
             <a:r>
-              <a:rPr lang="en-US" sz="1400" dirty="0" err="1">
+              <a:rPr lang="en-US" dirty="0" err="1">
                 <a:latin typeface="Aptos" panose="020B0004020202020204" pitchFamily="34" charset="0"/>
               </a:rPr>
               <a:t>cho</a:t>
             </a:r>
             <a:r>
-              <a:rPr lang="en-US" sz="1400" dirty="0">
-                <a:latin typeface="Aptos" panose="020B0004020202020204" pitchFamily="34" charset="0"/>
-              </a:rPr>
-              <a:t> </a:t>
-            </a:r>
-            <a:r>
-              <a:rPr lang="en-US" sz="1400" dirty="0" err="1">
+              <a:rPr lang="en-US" dirty="0">
+                <a:latin typeface="Aptos" panose="020B0004020202020204" pitchFamily="34" charset="0"/>
+              </a:rPr>
+              <a:t> </a:t>
+            </a:r>
+            <a:r>
+              <a:rPr lang="en-US" dirty="0" err="1">
                 <a:latin typeface="Aptos" panose="020B0004020202020204" pitchFamily="34" charset="0"/>
               </a:rPr>
               <a:t>biết</a:t>
             </a:r>
             <a:r>
-              <a:rPr lang="en-US" sz="1400" dirty="0">
-                <a:latin typeface="Aptos" panose="020B0004020202020204" pitchFamily="34" charset="0"/>
-              </a:rPr>
-              <a:t> </a:t>
-            </a:r>
-            <a:r>
-              <a:rPr lang="en-US" sz="1400" dirty="0" err="1">
+              <a:rPr lang="en-US" dirty="0">
+                <a:latin typeface="Aptos" panose="020B0004020202020204" pitchFamily="34" charset="0"/>
+              </a:rPr>
+              <a:t> </a:t>
+            </a:r>
+            <a:r>
+              <a:rPr lang="en-US" dirty="0" err="1">
                 <a:latin typeface="Aptos" panose="020B0004020202020204" pitchFamily="34" charset="0"/>
               </a:rPr>
               <a:t>có</a:t>
             </a:r>
             <a:r>
-              <a:rPr lang="en-US" sz="1400" dirty="0">
-                <a:latin typeface="Aptos" panose="020B0004020202020204" pitchFamily="34" charset="0"/>
-              </a:rPr>
-              <a:t> </a:t>
-            </a:r>
-            <a:r>
-              <a:rPr lang="en-US" sz="1400" dirty="0" err="1">
+              <a:rPr lang="en-US" dirty="0">
+                <a:latin typeface="Aptos" panose="020B0004020202020204" pitchFamily="34" charset="0"/>
+              </a:rPr>
+              <a:t> </a:t>
+            </a:r>
+            <a:r>
+              <a:rPr lang="en-US" dirty="0" err="1">
                 <a:latin typeface="Aptos" panose="020B0004020202020204" pitchFamily="34" charset="0"/>
               </a:rPr>
               <a:t>dùng</a:t>
             </a:r>
             <a:r>
-              <a:rPr lang="en-US" sz="1400" dirty="0">
+              <a:rPr lang="en-US" dirty="0">
                 <a:latin typeface="Aptos" panose="020B0004020202020204" pitchFamily="34" charset="0"/>
               </a:rPr>
               <a:t> CRC hay ko</a:t>
@@ -36224,163 +36544,163 @@
           </a:p>
           <a:p>
             <a:r>
-              <a:rPr lang="en-US" sz="1400" dirty="0">
+              <a:rPr lang="en-US" dirty="0">
                 <a:latin typeface="Aptos" panose="020B0004020202020204" pitchFamily="34" charset="0"/>
               </a:rPr>
               <a:t>Payload: </a:t>
             </a:r>
             <a:r>
-              <a:rPr lang="en-US" sz="1400" dirty="0" err="1">
+              <a:rPr lang="en-US" dirty="0" err="1">
                 <a:latin typeface="Aptos" panose="020B0004020202020204" pitchFamily="34" charset="0"/>
               </a:rPr>
               <a:t>chứa</a:t>
             </a:r>
             <a:r>
-              <a:rPr lang="en-US" sz="1400" dirty="0">
-                <a:latin typeface="Aptos" panose="020B0004020202020204" pitchFamily="34" charset="0"/>
-              </a:rPr>
-              <a:t> </a:t>
-            </a:r>
-            <a:r>
-              <a:rPr lang="en-US" sz="1400" dirty="0" err="1">
+              <a:rPr lang="en-US" dirty="0">
+                <a:latin typeface="Aptos" panose="020B0004020202020204" pitchFamily="34" charset="0"/>
+              </a:rPr>
+              <a:t> </a:t>
+            </a:r>
+            <a:r>
+              <a:rPr lang="en-US" dirty="0" err="1">
                 <a:latin typeface="Aptos" panose="020B0004020202020204" pitchFamily="34" charset="0"/>
               </a:rPr>
               <a:t>dữ</a:t>
             </a:r>
             <a:r>
-              <a:rPr lang="en-US" sz="1400" dirty="0">
-                <a:latin typeface="Aptos" panose="020B0004020202020204" pitchFamily="34" charset="0"/>
-              </a:rPr>
-              <a:t> </a:t>
-            </a:r>
-            <a:r>
-              <a:rPr lang="en-US" sz="1400" dirty="0" err="1">
+              <a:rPr lang="en-US" dirty="0">
+                <a:latin typeface="Aptos" panose="020B0004020202020204" pitchFamily="34" charset="0"/>
+              </a:rPr>
+              <a:t> </a:t>
+            </a:r>
+            <a:r>
+              <a:rPr lang="en-US" dirty="0" err="1">
                 <a:latin typeface="Aptos" panose="020B0004020202020204" pitchFamily="34" charset="0"/>
               </a:rPr>
               <a:t>liệu</a:t>
             </a:r>
             <a:r>
-              <a:rPr lang="en-US" sz="1400" dirty="0">
-                <a:latin typeface="Aptos" panose="020B0004020202020204" pitchFamily="34" charset="0"/>
-              </a:rPr>
-              <a:t> </a:t>
-            </a:r>
-            <a:r>
-              <a:rPr lang="en-US" sz="1400" dirty="0" err="1">
+              <a:rPr lang="en-US" dirty="0">
+                <a:latin typeface="Aptos" panose="020B0004020202020204" pitchFamily="34" charset="0"/>
+              </a:rPr>
+              <a:t> </a:t>
+            </a:r>
+            <a:r>
+              <a:rPr lang="en-US" dirty="0" err="1">
                 <a:latin typeface="Aptos" panose="020B0004020202020204" pitchFamily="34" charset="0"/>
               </a:rPr>
               <a:t>truyền</a:t>
             </a:r>
             <a:r>
-              <a:rPr lang="en-US" sz="1400" dirty="0">
-                <a:latin typeface="Aptos" panose="020B0004020202020204" pitchFamily="34" charset="0"/>
-              </a:rPr>
-              <a:t> </a:t>
-            </a:r>
-            <a:r>
-              <a:rPr lang="en-US" sz="1400" dirty="0" err="1">
+              <a:rPr lang="en-US" dirty="0">
+                <a:latin typeface="Aptos" panose="020B0004020202020204" pitchFamily="34" charset="0"/>
+              </a:rPr>
+              <a:t> </a:t>
+            </a:r>
+            <a:r>
+              <a:rPr lang="en-US" dirty="0" err="1">
                 <a:latin typeface="Aptos" panose="020B0004020202020204" pitchFamily="34" charset="0"/>
               </a:rPr>
               <a:t>đi</a:t>
             </a:r>
-            <a:endParaRPr lang="en-US" sz="1400" dirty="0">
+            <a:endParaRPr lang="en-US" dirty="0">
               <a:latin typeface="Aptos" panose="020B0004020202020204" pitchFamily="34" charset="0"/>
             </a:endParaRPr>
           </a:p>
           <a:p>
             <a:r>
-              <a:rPr lang="en-US" sz="1400" dirty="0" err="1">
+              <a:rPr lang="en-US" dirty="0" err="1">
                 <a:latin typeface="Aptos" panose="020B0004020202020204" pitchFamily="34" charset="0"/>
               </a:rPr>
               <a:t>Cách</a:t>
             </a:r>
             <a:r>
-              <a:rPr lang="en-US" sz="1400" dirty="0">
-                <a:latin typeface="Aptos" panose="020B0004020202020204" pitchFamily="34" charset="0"/>
-              </a:rPr>
-              <a:t> </a:t>
-            </a:r>
-            <a:r>
-              <a:rPr lang="en-US" sz="1400" dirty="0" err="1">
+              <a:rPr lang="en-US" dirty="0">
+                <a:latin typeface="Aptos" panose="020B0004020202020204" pitchFamily="34" charset="0"/>
+              </a:rPr>
+              <a:t> </a:t>
+            </a:r>
+            <a:r>
+              <a:rPr lang="en-US" dirty="0" err="1">
                 <a:latin typeface="Aptos" panose="020B0004020202020204" pitchFamily="34" charset="0"/>
               </a:rPr>
               <a:t>cấu</a:t>
             </a:r>
             <a:r>
-              <a:rPr lang="en-US" sz="1400" dirty="0">
-                <a:latin typeface="Aptos" panose="020B0004020202020204" pitchFamily="34" charset="0"/>
-              </a:rPr>
-              <a:t> </a:t>
-            </a:r>
-            <a:r>
-              <a:rPr lang="en-US" sz="1400" dirty="0" err="1">
+              <a:rPr lang="en-US" dirty="0">
+                <a:latin typeface="Aptos" panose="020B0004020202020204" pitchFamily="34" charset="0"/>
+              </a:rPr>
+              <a:t> </a:t>
+            </a:r>
+            <a:r>
+              <a:rPr lang="en-US" dirty="0" err="1">
                 <a:latin typeface="Aptos" panose="020B0004020202020204" pitchFamily="34" charset="0"/>
               </a:rPr>
               <a:t>hình</a:t>
             </a:r>
             <a:r>
-              <a:rPr lang="en-US" sz="1400" dirty="0">
-                <a:latin typeface="Aptos" panose="020B0004020202020204" pitchFamily="34" charset="0"/>
-              </a:rPr>
-              <a:t> </a:t>
-            </a:r>
-            <a:r>
-              <a:rPr lang="en-US" sz="1400" dirty="0" err="1">
+              <a:rPr lang="en-US" dirty="0">
+                <a:latin typeface="Aptos" panose="020B0004020202020204" pitchFamily="34" charset="0"/>
+              </a:rPr>
+              <a:t> </a:t>
+            </a:r>
+            <a:r>
+              <a:rPr lang="en-US" dirty="0" err="1">
                 <a:latin typeface="Aptos" panose="020B0004020202020204" pitchFamily="34" charset="0"/>
               </a:rPr>
               <a:t>và</a:t>
             </a:r>
             <a:r>
-              <a:rPr lang="en-US" sz="1400" dirty="0">
-                <a:latin typeface="Aptos" panose="020B0004020202020204" pitchFamily="34" charset="0"/>
-              </a:rPr>
-              <a:t> </a:t>
-            </a:r>
-            <a:r>
-              <a:rPr lang="en-US" sz="1400" dirty="0" err="1">
+              <a:rPr lang="en-US" dirty="0">
+                <a:latin typeface="Aptos" panose="020B0004020202020204" pitchFamily="34" charset="0"/>
+              </a:rPr>
+              <a:t> </a:t>
+            </a:r>
+            <a:r>
+              <a:rPr lang="en-US" dirty="0" err="1">
                 <a:latin typeface="Aptos" panose="020B0004020202020204" pitchFamily="34" charset="0"/>
               </a:rPr>
               <a:t>kiểm</a:t>
             </a:r>
             <a:r>
-              <a:rPr lang="en-US" sz="1400" dirty="0">
-                <a:latin typeface="Aptos" panose="020B0004020202020204" pitchFamily="34" charset="0"/>
-              </a:rPr>
-              <a:t> </a:t>
-            </a:r>
-            <a:r>
-              <a:rPr lang="en-US" sz="1400" dirty="0" err="1">
+              <a:rPr lang="en-US" dirty="0">
+                <a:latin typeface="Aptos" panose="020B0004020202020204" pitchFamily="34" charset="0"/>
+              </a:rPr>
+              <a:t> </a:t>
+            </a:r>
+            <a:r>
+              <a:rPr lang="en-US" dirty="0" err="1">
                 <a:latin typeface="Aptos" panose="020B0004020202020204" pitchFamily="34" charset="0"/>
               </a:rPr>
               <a:t>tra</a:t>
             </a:r>
             <a:r>
-              <a:rPr lang="en-US" sz="1400" dirty="0">
+              <a:rPr lang="en-US" dirty="0">
                 <a:latin typeface="Aptos" panose="020B0004020202020204" pitchFamily="34" charset="0"/>
               </a:rPr>
               <a:t> CRC (</a:t>
             </a:r>
             <a:r>
-              <a:rPr lang="en-US" sz="1400" dirty="0" err="1">
+              <a:rPr lang="en-US" dirty="0" err="1">
                 <a:latin typeface="Aptos" panose="020B0004020202020204" pitchFamily="34" charset="0"/>
               </a:rPr>
               <a:t>trang</a:t>
             </a:r>
             <a:r>
-              <a:rPr lang="en-US" sz="1400" dirty="0">
+              <a:rPr lang="en-US" dirty="0">
                 <a:latin typeface="Aptos" panose="020B0004020202020204" pitchFamily="34" charset="0"/>
               </a:rPr>
               <a:t> 30)</a:t>
             </a:r>
           </a:p>
           <a:p>
-            <a:endParaRPr lang="en-US" sz="1400" dirty="0">
+            <a:endParaRPr lang="en-US" dirty="0">
               <a:latin typeface="Aptos" panose="020B0004020202020204" pitchFamily="34" charset="0"/>
             </a:endParaRPr>
           </a:p>
           <a:p>
             <a:r>
-              <a:rPr lang="en-US" sz="1400" dirty="0">
+              <a:rPr lang="en-US" dirty="0">
                 <a:latin typeface="Aptos" panose="020B0004020202020204" pitchFamily="34" charset="0"/>
               </a:rPr>
               <a:t>3.3 time on air</a:t>
@@ -36388,199 +36708,184 @@
           </a:p>
           <a:p>
             <a:r>
-              <a:rPr lang="en-US" sz="1400" dirty="0" err="1">
+              <a:rPr lang="en-US" dirty="0" err="1">
                 <a:latin typeface="Aptos" panose="020B0004020202020204" pitchFamily="34" charset="0"/>
               </a:rPr>
               <a:t>Tính</a:t>
             </a:r>
             <a:r>
-              <a:rPr lang="en-US" sz="1400" dirty="0">
-                <a:latin typeface="Aptos" panose="020B0004020202020204" pitchFamily="34" charset="0"/>
-              </a:rPr>
-              <a:t> </a:t>
-            </a:r>
-            <a:r>
-              <a:rPr lang="en-US" sz="1400" dirty="0" err="1">
+              <a:rPr lang="en-US" dirty="0">
+                <a:latin typeface="Aptos" panose="020B0004020202020204" pitchFamily="34" charset="0"/>
+              </a:rPr>
+              <a:t> </a:t>
+            </a:r>
+            <a:r>
+              <a:rPr lang="en-US" dirty="0" err="1">
                 <a:latin typeface="Aptos" panose="020B0004020202020204" pitchFamily="34" charset="0"/>
               </a:rPr>
               <a:t>toán</a:t>
             </a:r>
             <a:r>
-              <a:rPr lang="en-US" sz="1400" dirty="0">
-                <a:latin typeface="Aptos" panose="020B0004020202020204" pitchFamily="34" charset="0"/>
-              </a:rPr>
-              <a:t> </a:t>
-            </a:r>
-            <a:r>
-              <a:rPr lang="en-US" sz="1400" dirty="0" err="1">
+              <a:rPr lang="en-US" dirty="0">
+                <a:latin typeface="Aptos" panose="020B0004020202020204" pitchFamily="34" charset="0"/>
+              </a:rPr>
+              <a:t> </a:t>
+            </a:r>
+            <a:r>
+              <a:rPr lang="en-US" dirty="0" err="1">
                 <a:latin typeface="Aptos" panose="020B0004020202020204" pitchFamily="34" charset="0"/>
               </a:rPr>
               <a:t>khoảng</a:t>
             </a:r>
             <a:r>
-              <a:rPr lang="en-US" sz="1400" dirty="0">
-                <a:latin typeface="Aptos" panose="020B0004020202020204" pitchFamily="34" charset="0"/>
-              </a:rPr>
-              <a:t> </a:t>
-            </a:r>
-            <a:r>
-              <a:rPr lang="en-US" sz="1400" dirty="0" err="1">
+              <a:rPr lang="en-US" dirty="0">
+                <a:latin typeface="Aptos" panose="020B0004020202020204" pitchFamily="34" charset="0"/>
+              </a:rPr>
+              <a:t> </a:t>
+            </a:r>
+            <a:r>
+              <a:rPr lang="en-US" dirty="0" err="1">
                 <a:latin typeface="Aptos" panose="020B0004020202020204" pitchFamily="34" charset="0"/>
               </a:rPr>
               <a:t>thời</a:t>
             </a:r>
             <a:r>
-              <a:rPr lang="en-US" sz="1400" dirty="0">
-                <a:latin typeface="Aptos" panose="020B0004020202020204" pitchFamily="34" charset="0"/>
-              </a:rPr>
-              <a:t> </a:t>
-            </a:r>
-            <a:r>
-              <a:rPr lang="en-US" sz="1400" dirty="0" err="1">
+              <a:rPr lang="en-US" dirty="0">
+                <a:latin typeface="Aptos" panose="020B0004020202020204" pitchFamily="34" charset="0"/>
+              </a:rPr>
+              <a:t> </a:t>
+            </a:r>
+            <a:r>
+              <a:rPr lang="en-US" dirty="0" err="1">
                 <a:latin typeface="Aptos" panose="020B0004020202020204" pitchFamily="34" charset="0"/>
               </a:rPr>
               <a:t>gian</a:t>
             </a:r>
             <a:r>
-              <a:rPr lang="en-US" sz="1400" dirty="0">
-                <a:latin typeface="Aptos" panose="020B0004020202020204" pitchFamily="34" charset="0"/>
-              </a:rPr>
-              <a:t> </a:t>
-            </a:r>
-            <a:r>
-              <a:rPr lang="en-US" sz="1400" dirty="0" err="1">
+              <a:rPr lang="en-US" dirty="0">
+                <a:latin typeface="Aptos" panose="020B0004020202020204" pitchFamily="34" charset="0"/>
+              </a:rPr>
+              <a:t> </a:t>
+            </a:r>
+            <a:r>
+              <a:rPr lang="en-US" dirty="0" err="1">
                 <a:latin typeface="Aptos" panose="020B0004020202020204" pitchFamily="34" charset="0"/>
               </a:rPr>
               <a:t>truyền</a:t>
             </a:r>
             <a:r>
-              <a:rPr lang="en-US" sz="1400" dirty="0">
+              <a:rPr lang="en-US" dirty="0">
                 <a:latin typeface="Aptos" panose="020B0004020202020204" pitchFamily="34" charset="0"/>
               </a:rPr>
               <a:t> 1 </a:t>
             </a:r>
             <a:r>
-              <a:rPr lang="en-US" sz="1400" dirty="0" err="1">
+              <a:rPr lang="en-US" dirty="0" err="1">
                 <a:latin typeface="Aptos" panose="020B0004020202020204" pitchFamily="34" charset="0"/>
               </a:rPr>
               <a:t>bản</a:t>
             </a:r>
             <a:r>
-              <a:rPr lang="en-US" sz="1400" dirty="0">
+              <a:rPr lang="en-US" dirty="0">
                 <a:latin typeface="Aptos" panose="020B0004020202020204" pitchFamily="34" charset="0"/>
               </a:rPr>
               <a:t> tin</a:t>
             </a:r>
           </a:p>
           <a:p>
-            <a:endParaRPr lang="en-US" sz="1400" dirty="0">
+            <a:endParaRPr lang="en-US" dirty="0">
               <a:latin typeface="Aptos" panose="020B0004020202020204" pitchFamily="34" charset="0"/>
             </a:endParaRPr>
           </a:p>
           <a:p>
-            <a:endParaRPr lang="en-US" sz="1400" dirty="0">
-              <a:latin typeface="Aptos" panose="020B0004020202020204" pitchFamily="34" charset="0"/>
-            </a:endParaRPr>
+            <a:r>
+              <a:rPr lang="en-US" dirty="0">
+                <a:latin typeface="Aptos" panose="020B0004020202020204" pitchFamily="34" charset="0"/>
+              </a:rPr>
+              <a:t>3.4 </a:t>
+            </a:r>
+            <a:r>
+              <a:rPr lang="en-US" dirty="0" err="1">
+                <a:latin typeface="Aptos" panose="020B0004020202020204" pitchFamily="34" charset="0"/>
+              </a:rPr>
+              <a:t>chế</a:t>
+            </a:r>
+            <a:r>
+              <a:rPr lang="en-US" dirty="0">
+                <a:latin typeface="Aptos" panose="020B0004020202020204" pitchFamily="34" charset="0"/>
+              </a:rPr>
+              <a:t> </a:t>
+            </a:r>
+            <a:r>
+              <a:rPr lang="en-US" dirty="0" err="1">
+                <a:latin typeface="Aptos" panose="020B0004020202020204" pitchFamily="34" charset="0"/>
+              </a:rPr>
+              <a:t>độ</a:t>
+            </a:r>
+            <a:r>
+              <a:rPr lang="en-US" dirty="0">
+                <a:latin typeface="Aptos" panose="020B0004020202020204" pitchFamily="34" charset="0"/>
+              </a:rPr>
+              <a:t> </a:t>
+            </a:r>
+            <a:r>
+              <a:rPr lang="en-US" dirty="0" err="1">
+                <a:latin typeface="Aptos" panose="020B0004020202020204" pitchFamily="34" charset="0"/>
+              </a:rPr>
+              <a:t>lowdata</a:t>
+            </a:r>
+            <a:r>
+              <a:rPr lang="en-US" dirty="0">
+                <a:latin typeface="Aptos" panose="020B0004020202020204" pitchFamily="34" charset="0"/>
+              </a:rPr>
+              <a:t> rate</a:t>
+            </a:r>
           </a:p>
           <a:p>
-            <a:endParaRPr lang="en-US" sz="1400" dirty="0">
-              <a:latin typeface="Aptos" panose="020B0004020202020204" pitchFamily="34" charset="0"/>
-            </a:endParaRPr>
-          </a:p>
-          <a:p>
-            <a:endParaRPr lang="en-US" sz="1400" dirty="0">
-              <a:latin typeface="Aptos" panose="020B0004020202020204" pitchFamily="34" charset="0"/>
-            </a:endParaRPr>
-          </a:p>
-          <a:p>
-            <a:r>
-              <a:rPr lang="en-US" sz="1400" dirty="0">
-                <a:latin typeface="Aptos" panose="020B0004020202020204" pitchFamily="34" charset="0"/>
-              </a:rPr>
-              <a:t>3.4 </a:t>
-            </a:r>
-            <a:r>
-              <a:rPr lang="en-US" sz="1400" dirty="0" err="1">
-                <a:latin typeface="Aptos" panose="020B0004020202020204" pitchFamily="34" charset="0"/>
-              </a:rPr>
-              <a:t>chế</a:t>
-            </a:r>
-            <a:r>
-              <a:rPr lang="en-US" sz="1400" dirty="0">
-                <a:latin typeface="Aptos" panose="020B0004020202020204" pitchFamily="34" charset="0"/>
-              </a:rPr>
-              <a:t> </a:t>
-            </a:r>
-            <a:r>
-              <a:rPr lang="en-US" sz="1400" dirty="0" err="1">
-                <a:latin typeface="Aptos" panose="020B0004020202020204" pitchFamily="34" charset="0"/>
-              </a:rPr>
-              <a:t>độ</a:t>
-            </a:r>
-            <a:r>
-              <a:rPr lang="en-US" sz="1400" dirty="0">
-                <a:latin typeface="Aptos" panose="020B0004020202020204" pitchFamily="34" charset="0"/>
-              </a:rPr>
-              <a:t> </a:t>
-            </a:r>
-            <a:r>
-              <a:rPr lang="en-US" sz="1400" dirty="0" err="1">
-                <a:latin typeface="Aptos" panose="020B0004020202020204" pitchFamily="34" charset="0"/>
-              </a:rPr>
-              <a:t>lowdata</a:t>
-            </a:r>
-            <a:r>
-              <a:rPr lang="en-US" sz="1400" dirty="0">
-                <a:latin typeface="Aptos" panose="020B0004020202020204" pitchFamily="34" charset="0"/>
-              </a:rPr>
-              <a:t> rate</a:t>
-            </a:r>
-          </a:p>
-          <a:p>
-            <a:r>
-              <a:rPr lang="en-US" sz="1400" dirty="0" err="1">
+            <a:r>
+              <a:rPr lang="en-US" dirty="0" err="1">
                 <a:latin typeface="Aptos" panose="020B0004020202020204" pitchFamily="34" charset="0"/>
               </a:rPr>
               <a:t>Cần</a:t>
             </a:r>
             <a:r>
-              <a:rPr lang="en-US" sz="1400" dirty="0">
-                <a:latin typeface="Aptos" panose="020B0004020202020204" pitchFamily="34" charset="0"/>
-              </a:rPr>
-              <a:t> </a:t>
-            </a:r>
-            <a:r>
-              <a:rPr lang="en-US" sz="1400" dirty="0" err="1">
+              <a:rPr lang="en-US" dirty="0">
+                <a:latin typeface="Aptos" panose="020B0004020202020204" pitchFamily="34" charset="0"/>
+              </a:rPr>
+              <a:t> </a:t>
+            </a:r>
+            <a:r>
+              <a:rPr lang="en-US" dirty="0" err="1">
                 <a:latin typeface="Aptos" panose="020B0004020202020204" pitchFamily="34" charset="0"/>
               </a:rPr>
               <a:t>cấu</a:t>
             </a:r>
             <a:r>
-              <a:rPr lang="en-US" sz="1400" dirty="0">
-                <a:latin typeface="Aptos" panose="020B0004020202020204" pitchFamily="34" charset="0"/>
-              </a:rPr>
-              <a:t> </a:t>
-            </a:r>
-            <a:r>
-              <a:rPr lang="en-US" sz="1400" dirty="0" err="1">
+              <a:rPr lang="en-US" dirty="0">
+                <a:latin typeface="Aptos" panose="020B0004020202020204" pitchFamily="34" charset="0"/>
+              </a:rPr>
+              <a:t> </a:t>
+            </a:r>
+            <a:r>
+              <a:rPr lang="en-US" dirty="0" err="1">
                 <a:latin typeface="Aptos" panose="020B0004020202020204" pitchFamily="34" charset="0"/>
               </a:rPr>
               <a:t>hình</a:t>
             </a:r>
             <a:r>
-              <a:rPr lang="en-US" sz="1400" dirty="0">
-                <a:latin typeface="Aptos" panose="020B0004020202020204" pitchFamily="34" charset="0"/>
-              </a:rPr>
-              <a:t> </a:t>
-            </a:r>
-            <a:r>
-              <a:rPr lang="en-US" sz="1400" dirty="0" err="1">
+              <a:rPr lang="en-US" dirty="0">
+                <a:latin typeface="Aptos" panose="020B0004020202020204" pitchFamily="34" charset="0"/>
+              </a:rPr>
+              <a:t> </a:t>
+            </a:r>
+            <a:r>
+              <a:rPr lang="en-US" dirty="0" err="1">
                 <a:latin typeface="Aptos" panose="020B0004020202020204" pitchFamily="34" charset="0"/>
               </a:rPr>
               <a:t>khi</a:t>
             </a:r>
             <a:r>
-              <a:rPr lang="en-US" sz="1400" dirty="0">
+              <a:rPr lang="en-US" dirty="0">
                 <a:latin typeface="Aptos" panose="020B0004020202020204" pitchFamily="34" charset="0"/>
               </a:rPr>
               <a:t> Ts&gt;16ms</a:t>
@@ -36610,8 +36915,8 @@
         </p:blipFill>
         <p:spPr>
           <a:xfrm>
-            <a:off x="4334005" y="1007497"/>
-            <a:ext cx="4426034" cy="1400407"/>
+            <a:off x="4087636" y="1007497"/>
+            <a:ext cx="4806060" cy="1520648"/>
           </a:xfrm>
           <a:prstGeom prst="rect">
             <a:avLst/>
@@ -36640,38 +36945,8 @@
         </p:blipFill>
         <p:spPr>
           <a:xfrm>
-            <a:off x="4440429" y="2462974"/>
-            <a:ext cx="3770336" cy="3000160"/>
-          </a:xfrm>
-          <a:prstGeom prst="rect">
-            <a:avLst/>
-          </a:prstGeom>
-        </p:spPr>
-      </p:pic>
-      <p:pic>
-        <p:nvPicPr>
-          <p:cNvPr id="13" name="Picture 12">
-            <a:extLst>
-              <a:ext uri="{FF2B5EF4-FFF2-40B4-BE49-F238E27FC236}">
-                <a16:creationId xmlns:a16="http://schemas.microsoft.com/office/drawing/2014/main" id="{1294F52C-14C1-E03B-3AE0-92A540749A87}"/>
-              </a:ext>
-            </a:extLst>
-          </p:cNvPr>
-          <p:cNvPicPr>
-            <a:picLocks noChangeAspect="1"/>
-          </p:cNvPicPr>
-          <p:nvPr/>
-        </p:nvPicPr>
-        <p:blipFill>
-          <a:blip r:embed="rId4"/>
-          <a:stretch>
-            <a:fillRect/>
-          </a:stretch>
-        </p:blipFill>
-        <p:spPr>
-          <a:xfrm>
-            <a:off x="422701" y="4721510"/>
-            <a:ext cx="3973935" cy="681000"/>
+            <a:off x="4200348" y="2528145"/>
+            <a:ext cx="4693348" cy="3734626"/>
           </a:xfrm>
           <a:prstGeom prst="rect">
             <a:avLst/>
